--- a/_designs/deck/TransferHub-Hackathon.pptx
+++ b/_designs/deck/TransferHub-Hackathon.pptx
@@ -21,9 +21,10 @@
     <p:sldId id="269" r:id="rId15"/>
     <p:sldId id="270" r:id="rId16"/>
     <p:sldId id="271" r:id="rId17"/>
+    <p:sldId id="272" r:id="rId18"/>
   </p:sldIdLst>
   <p:notesMasterIdLst>
-    <p:notesMasterId r:id="rId18"/>
+    <p:notesMasterId r:id="rId19"/>
   </p:notesMasterIdLst>
   <p:sldSz cx="12192000" cy="6858000"/>
   <p:notesSz cx="6858000" cy="12192000"/>
@@ -311,13 +312,13 @@
               <c:numCache>
                 <c:ptCount val="3"/>
                 <c:pt idx="0">
-                  <c:v>17</c:v>
+                  <c:v>20</c:v>
                 </c:pt>
                 <c:pt idx="1">
-                  <c:v>3</c:v>
+                  <c:v>2</c:v>
                 </c:pt>
                 <c:pt idx="2">
-                  <c:v>2</c:v>
+                  <c:v>0</c:v>
                 </c:pt>
               </c:numCache>
             </c:numRef>
@@ -1203,7 +1204,7 @@
           <a:p>
             <a:r>
               <a:rPr lang="en-US" dirty="0"/>
-              <a:t>We compared every rule and ask in the design docs with the code. 17 built, 3 partial, 2 open. Full table in _designs/GAP_ANALYSIS.md.</a:t>
+              <a:t>Backtest: for each past decision (63), hide it from the matcher and ask whether the right BU course is in its top 1 or top 3. Built-in rules only, no AI key. Smoke suite ran against the live site.</a:t>
             </a:r>
             <a:endParaRPr lang="en-US" dirty="0"/>
           </a:p>
@@ -1291,7 +1292,7 @@
           <a:p>
             <a:r>
               <a:rPr lang="en-US" dirty="0"/>
-              <a:t>Be honest: no live Claude key, no BU baseline numbers. Plan to close the gaps.</a:t>
+              <a:t>We compared every rule and ask in the design docs with the code. 20 built, 2 partial, 0 open (the partials: a faculty picker for several BU courses, and the 5-credit lab rule that needs an answer from BU). Full table in _designs/GAP_ANALYSIS.md.</a:t>
             </a:r>
             <a:endParaRPr lang="en-US" dirty="0"/>
           </a:p>
@@ -1379,7 +1380,7 @@
           <a:p>
             <a:r>
               <a:rPr lang="en-US" dirty="0"/>
-              <a:t>Close on the promise and invite the live demo.</a:t>
+              <a:t>Be honest: no live Claude key, no BU baseline numbers. Plan to close the gaps.</a:t>
             </a:r>
             <a:endParaRPr lang="en-US" dirty="0"/>
           </a:p>
@@ -1403,6 +1404,94 @@
             <a:fld id="{F7021451-1387-4CA6-816F-3879F97B5CBC}" type="slidenum">
               <a:rPr lang="en-US"/>
               <a:t>16</a:t>
+            </a:fld>
+            <a:endParaRPr lang="en-US"/>
+          </a:p>
+        </p:txBody>
+      </p:sp>
+    </p:spTree>
+    <p:extLst>
+      <p:ext uri="{BB962C8B-B14F-4D97-AF65-F5344CB8AC3E}">
+        <p14:creationId xmlns:p14="http://schemas.microsoft.com/office/powerpoint/2010/main" val="1024086991"/>
+      </p:ext>
+    </p:extLst>
+  </p:cSld>
+  <p:clrMapOvr>
+    <a:masterClrMapping/>
+  </p:clrMapOvr>
+</p:notes>
+</file>
+
+<file path=ppt/notesSlides/notesSlide17.xml><?xml version="1.0" encoding="utf-8"?>
+<p:notes xmlns:a="http://schemas.openxmlformats.org/drawingml/2006/main" xmlns:r="http://schemas.openxmlformats.org/officeDocument/2006/relationships" xmlns:p="http://schemas.openxmlformats.org/presentationml/2006/main">
+  <p:cSld>
+    <p:spTree>
+      <p:nvGrpSpPr>
+        <p:cNvPr id="1" name=""/>
+        <p:cNvGrpSpPr/>
+        <p:nvPr/>
+      </p:nvGrpSpPr>
+      <p:grpSpPr>
+        <a:xfrm>
+          <a:off x="0" y="0"/>
+          <a:ext cx="0" cy="0"/>
+          <a:chOff x="0" y="0"/>
+          <a:chExt cx="0" cy="0"/>
+        </a:xfrm>
+      </p:grpSpPr>
+      <p:sp>
+        <p:nvSpPr>
+          <p:cNvPr id="2" name="Slide Image Placeholder 1"/>
+          <p:cNvSpPr>
+            <a:spLocks noGrp="1" noRot="1" noChangeAspect="1"/>
+          </p:cNvSpPr>
+          <p:nvPr>
+            <p:ph type="sldImg"/>
+          </p:nvPr>
+        </p:nvSpPr>
+        <p:spPr/>
+      </p:sp>
+      <p:sp>
+        <p:nvSpPr>
+          <p:cNvPr id="3" name="Notes Placeholder 2"/>
+          <p:cNvSpPr>
+            <a:spLocks noGrp="1"/>
+          </p:cNvSpPr>
+          <p:nvPr>
+            <p:ph type="body" idx="1"/>
+          </p:nvPr>
+        </p:nvSpPr>
+        <p:spPr/>
+        <p:txBody>
+          <a:bodyPr/>
+          <a:lstStyle/>
+          <a:p>
+            <a:r>
+              <a:rPr lang="en-US" dirty="0"/>
+              <a:t>Close on the promise and invite the live demo.</a:t>
+            </a:r>
+            <a:endParaRPr lang="en-US" dirty="0"/>
+          </a:p>
+        </p:txBody>
+      </p:sp>
+      <p:sp>
+        <p:nvSpPr>
+          <p:cNvPr id="4" name="Slide Number Placeholder 3"/>
+          <p:cNvSpPr>
+            <a:spLocks noGrp="1"/>
+          </p:cNvSpPr>
+          <p:nvPr>
+            <p:ph type="sldNum" sz="quarter" idx="10"/>
+          </p:nvPr>
+        </p:nvSpPr>
+        <p:spPr/>
+        <p:txBody>
+          <a:bodyPr/>
+          <a:lstStyle/>
+          <a:p>
+            <a:fld id="{F7021451-1387-4CA6-816F-3879F97B5CBC}" type="slidenum">
+              <a:rPr lang="en-US"/>
+              <a:t>17</a:t>
             </a:fld>
             <a:endParaRPr lang="en-US"/>
           </a:p>
@@ -5785,7 +5874,7 @@
                 <a:ea typeface="Cambria" pitchFamily="34" charset="-122"/>
                 <a:cs typeface="Cambria" pitchFamily="34" charset="-120"/>
               </a:rPr>
-              <a:t>Scorecard: 22 requirements vs. the code</a:t>
+              <a:t>Measured, not claimed</a:t>
             </a:r>
             <a:endParaRPr lang="en-US" sz="3400" dirty="0"/>
           </a:p>
@@ -5827,36 +5916,20 @@
           </a:p>
         </p:txBody>
       </p:sp>
-      <p:graphicFrame>
-        <p:nvGraphicFramePr>
-          <p:cNvPr id="5" name="Chart 0" descr=""/>
-          <p:cNvGraphicFramePr/>
-          <p:nvPr/>
-        </p:nvGraphicFramePr>
-        <p:xfrm>
-          <a:off x="548640" y="1371600"/>
-          <a:ext cx="4754880" cy="4480560"/>
-        </p:xfrm>
-        <a:graphic xmlns:a="http://schemas.openxmlformats.org/drawingml/2006/main">
-          <a:graphicData uri="http://schemas.openxmlformats.org/drawingml/2006/chart">
-            <c:chart xmlns:c="http://schemas.openxmlformats.org/drawingml/2006/chart" r:id="rId1"/>
-          </a:graphicData>
-        </a:graphic>
-      </p:graphicFrame>
-      <p:sp>
-        <p:nvSpPr>
-          <p:cNvPr id="6" name="Shape 2"/>
+      <p:sp>
+        <p:nvSpPr>
+          <p:cNvPr id="5" name="Shape 2"/>
           <p:cNvSpPr/>
           <p:nvPr/>
         </p:nvSpPr>
         <p:spPr>
           <a:xfrm>
-            <a:off x="5669280" y="1463040"/>
-            <a:ext cx="5943600" cy="1280160"/>
+            <a:off x="548640" y="1463040"/>
+            <a:ext cx="3566160" cy="2194560"/>
           </a:xfrm>
           <a:prstGeom prst="roundRect">
             <a:avLst>
-              <a:gd name="adj" fmla="val 8571"/>
+              <a:gd name="adj" fmla="val 5000"/>
             </a:avLst>
           </a:prstGeom>
           <a:solidFill>
@@ -5879,93 +5952,93 @@
       </p:sp>
       <p:sp>
         <p:nvSpPr>
-          <p:cNvPr id="7" name="Shape 3"/>
+          <p:cNvPr id="6" name="Text 3"/>
+          <p:cNvSpPr txBox="1"/>
+          <p:nvPr/>
+        </p:nvSpPr>
+        <p:spPr>
+          <a:xfrm>
+            <a:off x="548640" y="1645920"/>
+            <a:ext cx="3566160" cy="1188720"/>
+          </a:xfrm>
+          <a:prstGeom prst="rect">
+            <a:avLst/>
+          </a:prstGeom>
+          <a:noFill/>
+          <a:ln/>
+        </p:spPr>
+        <p:txBody>
+          <a:bodyPr wrap="square" lIns="0" tIns="0" rIns="0" bIns="0" rtlCol="0" anchor="ctr"/>
+          <a:lstStyle/>
+          <a:p>
+            <a:pPr algn="ctr" indent="0" marL="0">
+              <a:buNone/>
+            </a:pPr>
+            <a:r>
+              <a:rPr lang="en-US" sz="6000" b="1" dirty="0">
+                <a:solidFill>
+                  <a:srgbClr val="770816"/>
+                </a:solidFill>
+                <a:latin typeface="Cambria" pitchFamily="34" charset="0"/>
+                <a:ea typeface="Cambria" pitchFamily="34" charset="-122"/>
+                <a:cs typeface="Cambria" pitchFamily="34" charset="-120"/>
+              </a:rPr>
+              <a:t>96.8%</a:t>
+            </a:r>
+            <a:endParaRPr lang="en-US" sz="6000" dirty="0"/>
+          </a:p>
+        </p:txBody>
+      </p:sp>
+      <p:sp>
+        <p:nvSpPr>
+          <p:cNvPr id="7" name="Text 4"/>
+          <p:cNvSpPr txBox="1"/>
+          <p:nvPr/>
+        </p:nvSpPr>
+        <p:spPr>
+          <a:xfrm>
+            <a:off x="731520" y="2880360"/>
+            <a:ext cx="3200400" cy="640080"/>
+          </a:xfrm>
+          <a:prstGeom prst="rect">
+            <a:avLst/>
+          </a:prstGeom>
+          <a:noFill/>
+          <a:ln/>
+        </p:spPr>
+        <p:txBody>
+          <a:bodyPr wrap="square" lIns="0" tIns="0" rIns="0" bIns="0" rtlCol="0" anchor="ctr"/>
+          <a:lstStyle/>
+          <a:p>
+            <a:pPr algn="ctr" indent="0" marL="0">
+              <a:buNone/>
+            </a:pPr>
+            <a:r>
+              <a:rPr lang="en-US" sz="1600" dirty="0">
+                <a:solidFill>
+                  <a:srgbClr val="2B1A1D"/>
+                </a:solidFill>
+              </a:rPr>
+              <a:t>right BU course in the top 3</a:t>
+            </a:r>
+            <a:endParaRPr lang="en-US" sz="1600" dirty="0"/>
+          </a:p>
+        </p:txBody>
+      </p:sp>
+      <p:sp>
+        <p:nvSpPr>
+          <p:cNvPr id="8" name="Shape 5"/>
           <p:cNvSpPr/>
           <p:nvPr/>
         </p:nvSpPr>
         <p:spPr>
           <a:xfrm>
-            <a:off x="5897880" y="1920240"/>
-            <a:ext cx="365760" cy="365760"/>
-          </a:xfrm>
-          <a:prstGeom prst="ellipse">
-            <a:avLst/>
-          </a:prstGeom>
-          <a:solidFill>
-            <a:srgbClr val="B3261E"/>
-          </a:solidFill>
-          <a:ln w="12700">
-            <a:solidFill>
-              <a:srgbClr val="B3261E"/>
-            </a:solidFill>
-            <a:prstDash val="solid"/>
-          </a:ln>
-        </p:spPr>
-      </p:sp>
-      <p:sp>
-        <p:nvSpPr>
-          <p:cNvPr id="8" name="Text 4"/>
-          <p:cNvSpPr txBox="1"/>
-          <p:nvPr/>
-        </p:nvSpPr>
-        <p:spPr>
-          <a:xfrm>
-            <a:off x="6446520" y="1463040"/>
-            <a:ext cx="5029200" cy="1280160"/>
-          </a:xfrm>
-          <a:prstGeom prst="rect">
-            <a:avLst/>
-          </a:prstGeom>
-          <a:noFill/>
-          <a:ln/>
-        </p:spPr>
-        <p:txBody>
-          <a:bodyPr wrap="square" lIns="0" tIns="0" rIns="0" bIns="0" rtlCol="0" anchor="ctr"/>
-          <a:lstStyle/>
-          <a:p>
-            <a:pPr indent="0" marL="0">
-              <a:buNone/>
-            </a:pPr>
-            <a:r>
-              <a:rPr lang="en-US" sz="1800" b="1" dirty="0">
-                <a:solidFill>
-                  <a:srgbClr val="B3261E"/>
-                </a:solidFill>
-              </a:rPr>
-              <a:t>Open</a:t>
-            </a:r>
-            <a:endParaRPr lang="en-US" sz="1800" dirty="0"/>
-          </a:p>
-          <a:p>
-            <a:pPr indent="0" marL="0">
-              <a:buNone/>
-            </a:pPr>
-            <a:r>
-              <a:rPr lang="en-US" sz="1300" dirty="0">
-                <a:solidFill>
-                  <a:srgbClr val="2B1A1D"/>
-                </a:solidFill>
-              </a:rPr>
-              <a:t>One-year deadline tracker · programme rules (Econ/Bio caps, substitutions)</a:t>
-            </a:r>
-            <a:endParaRPr lang="en-US" sz="1800" dirty="0"/>
-          </a:p>
-        </p:txBody>
-      </p:sp>
-      <p:sp>
-        <p:nvSpPr>
-          <p:cNvPr id="9" name="Shape 5"/>
-          <p:cNvSpPr/>
-          <p:nvPr/>
-        </p:nvSpPr>
-        <p:spPr>
-          <a:xfrm>
-            <a:off x="5669280" y="2926080"/>
-            <a:ext cx="5943600" cy="1280160"/>
+            <a:off x="4297680" y="1463040"/>
+            <a:ext cx="3566160" cy="2194560"/>
           </a:xfrm>
           <a:prstGeom prst="roundRect">
             <a:avLst>
-              <a:gd name="adj" fmla="val 8571"/>
+              <a:gd name="adj" fmla="val 5000"/>
             </a:avLst>
           </a:prstGeom>
           <a:solidFill>
@@ -5988,93 +6061,93 @@
       </p:sp>
       <p:sp>
         <p:nvSpPr>
-          <p:cNvPr id="10" name="Shape 6"/>
+          <p:cNvPr id="9" name="Text 6"/>
+          <p:cNvSpPr txBox="1"/>
+          <p:nvPr/>
+        </p:nvSpPr>
+        <p:spPr>
+          <a:xfrm>
+            <a:off x="4297680" y="1645920"/>
+            <a:ext cx="3566160" cy="1188720"/>
+          </a:xfrm>
+          <a:prstGeom prst="rect">
+            <a:avLst/>
+          </a:prstGeom>
+          <a:noFill/>
+          <a:ln/>
+        </p:spPr>
+        <p:txBody>
+          <a:bodyPr wrap="square" lIns="0" tIns="0" rIns="0" bIns="0" rtlCol="0" anchor="ctr"/>
+          <a:lstStyle/>
+          <a:p>
+            <a:pPr algn="ctr" indent="0" marL="0">
+              <a:buNone/>
+            </a:pPr>
+            <a:r>
+              <a:rPr lang="en-US" sz="6000" b="1" dirty="0">
+                <a:solidFill>
+                  <a:srgbClr val="770816"/>
+                </a:solidFill>
+                <a:latin typeface="Cambria" pitchFamily="34" charset="0"/>
+                <a:ea typeface="Cambria" pitchFamily="34" charset="-122"/>
+                <a:cs typeface="Cambria" pitchFamily="34" charset="-120"/>
+              </a:rPr>
+              <a:t>88.9%</a:t>
+            </a:r>
+            <a:endParaRPr lang="en-US" sz="6000" dirty="0"/>
+          </a:p>
+        </p:txBody>
+      </p:sp>
+      <p:sp>
+        <p:nvSpPr>
+          <p:cNvPr id="10" name="Text 7"/>
+          <p:cNvSpPr txBox="1"/>
+          <p:nvPr/>
+        </p:nvSpPr>
+        <p:spPr>
+          <a:xfrm>
+            <a:off x="4480560" y="2880360"/>
+            <a:ext cx="3200400" cy="640080"/>
+          </a:xfrm>
+          <a:prstGeom prst="rect">
+            <a:avLst/>
+          </a:prstGeom>
+          <a:noFill/>
+          <a:ln/>
+        </p:spPr>
+        <p:txBody>
+          <a:bodyPr wrap="square" lIns="0" tIns="0" rIns="0" bIns="0" rtlCol="0" anchor="ctr"/>
+          <a:lstStyle/>
+          <a:p>
+            <a:pPr algn="ctr" indent="0" marL="0">
+              <a:buNone/>
+            </a:pPr>
+            <a:r>
+              <a:rPr lang="en-US" sz="1600" dirty="0">
+                <a:solidFill>
+                  <a:srgbClr val="2B1A1D"/>
+                </a:solidFill>
+              </a:rPr>
+              <a:t>right BU course ranked first</a:t>
+            </a:r>
+            <a:endParaRPr lang="en-US" sz="1600" dirty="0"/>
+          </a:p>
+        </p:txBody>
+      </p:sp>
+      <p:sp>
+        <p:nvSpPr>
+          <p:cNvPr id="11" name="Shape 8"/>
           <p:cNvSpPr/>
           <p:nvPr/>
         </p:nvSpPr>
         <p:spPr>
           <a:xfrm>
-            <a:off x="5897880" y="3383280"/>
-            <a:ext cx="365760" cy="365760"/>
-          </a:xfrm>
-          <a:prstGeom prst="ellipse">
-            <a:avLst/>
-          </a:prstGeom>
-          <a:solidFill>
-            <a:srgbClr val="C98A1B"/>
-          </a:solidFill>
-          <a:ln w="12700">
-            <a:solidFill>
-              <a:srgbClr val="C98A1B"/>
-            </a:solidFill>
-            <a:prstDash val="solid"/>
-          </a:ln>
-        </p:spPr>
-      </p:sp>
-      <p:sp>
-        <p:nvSpPr>
-          <p:cNvPr id="11" name="Text 7"/>
-          <p:cNvSpPr txBox="1"/>
-          <p:nvPr/>
-        </p:nvSpPr>
-        <p:spPr>
-          <a:xfrm>
-            <a:off x="6446520" y="2926080"/>
-            <a:ext cx="5029200" cy="1280160"/>
-          </a:xfrm>
-          <a:prstGeom prst="rect">
-            <a:avLst/>
-          </a:prstGeom>
-          <a:noFill/>
-          <a:ln/>
-        </p:spPr>
-        <p:txBody>
-          <a:bodyPr wrap="square" lIns="0" tIns="0" rIns="0" bIns="0" rtlCol="0" anchor="ctr"/>
-          <a:lstStyle/>
-          <a:p>
-            <a:pPr indent="0" marL="0">
-              <a:buNone/>
-            </a:pPr>
-            <a:r>
-              <a:rPr lang="en-US" sz="1800" b="1" dirty="0">
-                <a:solidFill>
-                  <a:srgbClr val="C98A1B"/>
-                </a:solidFill>
-              </a:rPr>
-              <a:t>Partial</a:t>
-            </a:r>
-            <a:endParaRPr lang="en-US" sz="1800" dirty="0"/>
-          </a:p>
-          <a:p>
-            <a:pPr indent="0" marL="0">
-              <a:buNone/>
-            </a:pPr>
-            <a:r>
-              <a:rPr lang="en-US" sz="1300" dirty="0">
-                <a:solidFill>
-                  <a:srgbClr val="2B1A1D"/>
-                </a:solidFill>
-              </a:rPr>
-              <a:t>Side-by-side course diff · one-to-many mappings · 5-credit lab rule (BU to confirm)</a:t>
-            </a:r>
-            <a:endParaRPr lang="en-US" sz="1800" dirty="0"/>
-          </a:p>
-        </p:txBody>
-      </p:sp>
-      <p:sp>
-        <p:nvSpPr>
-          <p:cNvPr id="12" name="Shape 8"/>
-          <p:cNvSpPr/>
-          <p:nvPr/>
-        </p:nvSpPr>
-        <p:spPr>
-          <a:xfrm>
-            <a:off x="5669280" y="4389120"/>
-            <a:ext cx="5943600" cy="1280160"/>
+            <a:off x="8046720" y="1463040"/>
+            <a:ext cx="3566160" cy="2194560"/>
           </a:xfrm>
           <a:prstGeom prst="roundRect">
             <a:avLst>
-              <a:gd name="adj" fmla="val 8571"/>
+              <a:gd name="adj" fmla="val 5000"/>
             </a:avLst>
           </a:prstGeom>
           <a:solidFill>
@@ -6097,76 +6170,217 @@
       </p:sp>
       <p:sp>
         <p:nvSpPr>
-          <p:cNvPr id="13" name="Shape 9"/>
-          <p:cNvSpPr/>
-          <p:nvPr/>
-        </p:nvSpPr>
-        <p:spPr>
-          <a:xfrm>
-            <a:off x="5897880" y="4846320"/>
-            <a:ext cx="365760" cy="365760"/>
-          </a:xfrm>
-          <a:prstGeom prst="ellipse">
-            <a:avLst/>
-          </a:prstGeom>
-          <a:solidFill>
-            <a:srgbClr val="2F7D5B"/>
-          </a:solidFill>
-          <a:ln w="12700">
-            <a:solidFill>
-              <a:srgbClr val="2F7D5B"/>
-            </a:solidFill>
-            <a:prstDash val="solid"/>
-          </a:ln>
-        </p:spPr>
-      </p:sp>
-      <p:sp>
-        <p:nvSpPr>
-          <p:cNvPr id="14" name="Text 10"/>
-          <p:cNvSpPr txBox="1"/>
-          <p:nvPr/>
-        </p:nvSpPr>
-        <p:spPr>
-          <a:xfrm>
-            <a:off x="6446520" y="4389120"/>
-            <a:ext cx="5029200" cy="1280160"/>
-          </a:xfrm>
-          <a:prstGeom prst="rect">
-            <a:avLst/>
-          </a:prstGeom>
-          <a:noFill/>
-          <a:ln/>
-        </p:spPr>
-        <p:txBody>
-          <a:bodyPr wrap="square" lIns="0" tIns="0" rIns="0" bIns="0" rtlCol="0" anchor="ctr"/>
-          <a:lstStyle/>
-          <a:p>
-            <a:pPr indent="0" marL="0">
-              <a:buNone/>
-            </a:pPr>
-            <a:r>
-              <a:rPr lang="en-US" sz="1800" b="1" dirty="0">
-                <a:solidFill>
-                  <a:srgbClr val="2F7D5B"/>
-                </a:solidFill>
-              </a:rPr>
-              <a:t>Built</a:t>
-            </a:r>
-            <a:endParaRPr lang="en-US" sz="1800" dirty="0"/>
-          </a:p>
-          <a:p>
-            <a:pPr indent="0" marL="0">
-              <a:buNone/>
-            </a:pPr>
-            <a:r>
-              <a:rPr lang="en-US" sz="1300" dirty="0">
+          <p:cNvPr id="12" name="Text 9"/>
+          <p:cNvSpPr txBox="1"/>
+          <p:nvPr/>
+        </p:nvSpPr>
+        <p:spPr>
+          <a:xfrm>
+            <a:off x="8046720" y="1645920"/>
+            <a:ext cx="3566160" cy="1188720"/>
+          </a:xfrm>
+          <a:prstGeom prst="rect">
+            <a:avLst/>
+          </a:prstGeom>
+          <a:noFill/>
+          <a:ln/>
+        </p:spPr>
+        <p:txBody>
+          <a:bodyPr wrap="square" lIns="0" tIns="0" rIns="0" bIns="0" rtlCol="0" anchor="ctr"/>
+          <a:lstStyle/>
+          <a:p>
+            <a:pPr algn="ctr" indent="0" marL="0">
+              <a:buNone/>
+            </a:pPr>
+            <a:r>
+              <a:rPr lang="en-US" sz="6000" b="1" dirty="0">
+                <a:solidFill>
+                  <a:srgbClr val="3A040B"/>
+                </a:solidFill>
+                <a:latin typeface="Cambria" pitchFamily="34" charset="0"/>
+                <a:ea typeface="Cambria" pitchFamily="34" charset="-122"/>
+                <a:cs typeface="Cambria" pitchFamily="34" charset="-120"/>
+              </a:rPr>
+              <a:t>63</a:t>
+            </a:r>
+            <a:endParaRPr lang="en-US" sz="6000" dirty="0"/>
+          </a:p>
+        </p:txBody>
+      </p:sp>
+      <p:sp>
+        <p:nvSpPr>
+          <p:cNvPr id="13" name="Text 10"/>
+          <p:cNvSpPr txBox="1"/>
+          <p:nvPr/>
+        </p:nvSpPr>
+        <p:spPr>
+          <a:xfrm>
+            <a:off x="8229600" y="2880360"/>
+            <a:ext cx="3200400" cy="640080"/>
+          </a:xfrm>
+          <a:prstGeom prst="rect">
+            <a:avLst/>
+          </a:prstGeom>
+          <a:noFill/>
+          <a:ln/>
+        </p:spPr>
+        <p:txBody>
+          <a:bodyPr wrap="square" lIns="0" tIns="0" rIns="0" bIns="0" rtlCol="0" anchor="ctr"/>
+          <a:lstStyle/>
+          <a:p>
+            <a:pPr algn="ctr" indent="0" marL="0">
+              <a:buNone/>
+            </a:pPr>
+            <a:r>
+              <a:rPr lang="en-US" sz="1600" dirty="0">
                 <a:solidFill>
                   <a:srgbClr val="2B1A1D"/>
                 </a:solidFill>
               </a:rPr>
-              <a:t>Lanes, quarter 2/3, grade rules, BU caps, Hub, appeals, workflow, learning loop, degree progress, accuracy backtest, Maya demo data</a:t>
-            </a:r>
-            <a:endParaRPr lang="en-US" sz="1800" dirty="0"/>
+              <a:t>past decisions tested</a:t>
+            </a:r>
+            <a:endParaRPr lang="en-US" sz="1600" dirty="0"/>
+          </a:p>
+        </p:txBody>
+      </p:sp>
+      <p:sp>
+        <p:nvSpPr>
+          <p:cNvPr id="14" name="Text 11"/>
+          <p:cNvSpPr txBox="1"/>
+          <p:nvPr/>
+        </p:nvSpPr>
+        <p:spPr>
+          <a:xfrm>
+            <a:off x="548640" y="3977640"/>
+            <a:ext cx="11064240" cy="731520"/>
+          </a:xfrm>
+          <a:prstGeom prst="rect">
+            <a:avLst/>
+          </a:prstGeom>
+          <a:noFill/>
+          <a:ln/>
+        </p:spPr>
+        <p:txBody>
+          <a:bodyPr wrap="square" lIns="0" tIns="0" rIns="0" bIns="0" rtlCol="0" anchor="ctr"/>
+          <a:lstStyle/>
+          <a:p>
+            <a:pPr indent="0" marL="0">
+              <a:buNone/>
+            </a:pPr>
+            <a:r>
+              <a:rPr lang="en-US" sz="1400" b="1" dirty="0">
+                <a:solidFill>
+                  <a:srgbClr val="770816"/>
+                </a:solidFill>
+              </a:rPr>
+              <a:t>Live smoke test  </a:t>
+            </a:r>
+            <a:pPr indent="0" marL="0">
+              <a:buNone/>
+            </a:pPr>
+            <a:r>
+              <a:rPr lang="en-US" sz="1400" dirty="0">
+                <a:solidFill>
+                  <a:srgbClr val="2B1A1D"/>
+                </a:solidFill>
+              </a:rPr>
+              <a:t>39 of 40 checks pass on the deployed app, 1 skipped (a write check), 0 failed: logins for all five roles, dashboards, the Maya scenario with the 2.66 quarter conversion, transfers, backtest, permissions and role checks.</a:t>
+            </a:r>
+            <a:endParaRPr lang="en-US" sz="1400" dirty="0"/>
+          </a:p>
+        </p:txBody>
+      </p:sp>
+      <p:sp>
+        <p:nvSpPr>
+          <p:cNvPr id="15" name="Text 12"/>
+          <p:cNvSpPr txBox="1"/>
+          <p:nvPr/>
+        </p:nvSpPr>
+        <p:spPr>
+          <a:xfrm>
+            <a:off x="548640" y="4754880"/>
+            <a:ext cx="11064240" cy="731520"/>
+          </a:xfrm>
+          <a:prstGeom prst="rect">
+            <a:avLst/>
+          </a:prstGeom>
+          <a:noFill/>
+          <a:ln/>
+        </p:spPr>
+        <p:txBody>
+          <a:bodyPr wrap="square" lIns="0" tIns="0" rIns="0" bIns="0" rtlCol="0" anchor="ctr"/>
+          <a:lstStyle/>
+          <a:p>
+            <a:pPr indent="0" marL="0">
+              <a:buNone/>
+            </a:pPr>
+            <a:r>
+              <a:rPr lang="en-US" sz="1400" b="1" dirty="0">
+                <a:solidFill>
+                  <a:srgbClr val="770816"/>
+                </a:solidFill>
+              </a:rPr>
+              <a:t>Database checks  </a:t>
+            </a:r>
+            <a:pPr indent="0" marL="0">
+              <a:buNone/>
+            </a:pPr>
+            <a:r>
+              <a:rPr lang="en-US" sz="1400" dirty="0">
+                <a:solidFill>
+                  <a:srgbClr val="2B1A1D"/>
+                </a:solidFill>
+              </a:rPr>
+              <a:t>243 SQL checks pass and all 11 triage contract cases pass, including the quarter 2.66 rule and "must be taken at BU".</a:t>
+            </a:r>
+            <a:endParaRPr lang="en-US" sz="1400" dirty="0"/>
+          </a:p>
+        </p:txBody>
+      </p:sp>
+      <p:sp>
+        <p:nvSpPr>
+          <p:cNvPr id="16" name="Text 13"/>
+          <p:cNvSpPr txBox="1"/>
+          <p:nvPr/>
+        </p:nvSpPr>
+        <p:spPr>
+          <a:xfrm>
+            <a:off x="548640" y="5532120"/>
+            <a:ext cx="11064240" cy="731520"/>
+          </a:xfrm>
+          <a:prstGeom prst="rect">
+            <a:avLst/>
+          </a:prstGeom>
+          <a:noFill/>
+          <a:ln/>
+        </p:spPr>
+        <p:txBody>
+          <a:bodyPr wrap="square" lIns="0" tIns="0" rIns="0" bIns="0" rtlCol="0" anchor="ctr"/>
+          <a:lstStyle/>
+          <a:p>
+            <a:pPr indent="0" marL="0">
+              <a:buNone/>
+            </a:pPr>
+            <a:r>
+              <a:rPr lang="en-US" sz="1400" b="1" dirty="0">
+                <a:solidFill>
+                  <a:srgbClr val="770816"/>
+                </a:solidFill>
+              </a:rPr>
+              <a:t>What this is  </a:t>
+            </a:r>
+            <a:pPr indent="0" marL="0">
+              <a:buNone/>
+            </a:pPr>
+            <a:r>
+              <a:rPr lang="en-US" sz="1400" dirty="0">
+                <a:solidFill>
+                  <a:srgbClr val="2B1A1D"/>
+                </a:solidFill>
+              </a:rPr>
+              <a:t>A hold-out test of the built-in rules matcher on past equivalencies. The same harness will score Claude once the key arrives.</a:t>
+            </a:r>
+            <a:endParaRPr lang="en-US" sz="1400" dirty="0"/>
           </a:p>
         </p:txBody>
       </p:sp>
@@ -6235,7 +6449,7 @@
                 <a:ea typeface="Cambria" pitchFamily="34" charset="-122"/>
                 <a:cs typeface="Cambria" pitchFamily="34" charset="-120"/>
               </a:rPr>
-              <a:t>What we have not proven yet, and what comes next</a:t>
+              <a:t>Scorecard: 22 requirements vs. the code</a:t>
             </a:r>
             <a:endParaRPr lang="en-US" sz="3400" dirty="0"/>
           </a:p>
@@ -6277,192 +6491,36 @@
           </a:p>
         </p:txBody>
       </p:sp>
-      <p:sp>
-        <p:nvSpPr>
-          <p:cNvPr id="5" name="Text 2"/>
-          <p:cNvSpPr txBox="1"/>
-          <p:nvPr/>
-        </p:nvSpPr>
-        <p:spPr>
-          <a:xfrm>
-            <a:off x="548640" y="1417320"/>
-            <a:ext cx="5303520" cy="457200"/>
-          </a:xfrm>
-          <a:prstGeom prst="rect">
-            <a:avLst/>
-          </a:prstGeom>
-          <a:noFill/>
-          <a:ln/>
-        </p:spPr>
-        <p:txBody>
-          <a:bodyPr wrap="square" lIns="0" tIns="0" rIns="0" bIns="0" rtlCol="0" anchor="ctr"/>
-          <a:lstStyle/>
-          <a:p>
-            <a:pPr indent="0" marL="0">
-              <a:buNone/>
-            </a:pPr>
-            <a:r>
-              <a:rPr lang="en-US" sz="2200" b="1" dirty="0">
-                <a:solidFill>
-                  <a:srgbClr val="770816"/>
-                </a:solidFill>
-                <a:latin typeface="Cambria" pitchFamily="34" charset="0"/>
-                <a:ea typeface="Cambria" pitchFamily="34" charset="-122"/>
-                <a:cs typeface="Cambria" pitchFamily="34" charset="-120"/>
-              </a:rPr>
-              <a:t>Not proven yet</a:t>
-            </a:r>
-            <a:endParaRPr lang="en-US" sz="2200" dirty="0"/>
-          </a:p>
-        </p:txBody>
-      </p:sp>
-      <p:sp>
-        <p:nvSpPr>
-          <p:cNvPr id="6" name="Text 3"/>
-          <p:cNvSpPr txBox="1"/>
-          <p:nvPr/>
-        </p:nvSpPr>
-        <p:spPr>
-          <a:xfrm>
-            <a:off x="548640" y="1965960"/>
-            <a:ext cx="5303520" cy="4023360"/>
-          </a:xfrm>
-          <a:prstGeom prst="rect">
-            <a:avLst/>
-          </a:prstGeom>
-          <a:noFill/>
-          <a:ln/>
-        </p:spPr>
-        <p:txBody>
-          <a:bodyPr wrap="square" lIns="0" tIns="0" rIns="0" bIns="0" rtlCol="0" anchor="t"/>
-          <a:lstStyle/>
-          <a:p>
-            <a:pPr marL="342900" indent="-342900">
-              <a:spcAft>
-                <a:spcPts val="1000"/>
-              </a:spcAft>
-              <a:buSzPct val="100000"/>
-              <a:buChar char="•"/>
-            </a:pPr>
-            <a:r>
-              <a:rPr lang="en-US" sz="1600" dirty="0">
-                <a:solidFill>
-                  <a:srgbClr val="2B1A1D"/>
-                </a:solidFill>
-              </a:rPr>
-              <a:t>No Anthropic key yet: AI paths are unverified, the rules fallback carries the demo</a:t>
-            </a:r>
-            <a:endParaRPr lang="en-US" sz="1600" dirty="0"/>
-          </a:p>
-          <a:p>
-            <a:pPr marL="342900" indent="-342900">
-              <a:spcAft>
-                <a:spcPts val="1000"/>
-              </a:spcAft>
-              <a:buSzPct val="100000"/>
-              <a:buChar char="•"/>
-            </a:pPr>
-            <a:r>
-              <a:rPr lang="en-US" sz="1600" dirty="0">
-                <a:solidFill>
-                  <a:srgbClr val="2B1A1D"/>
-                </a:solidFill>
-              </a:rPr>
-              <a:t>No BU baseline for evaluator minutes or turnaround, so the saving is not yet quantified</a:t>
-            </a:r>
-            <a:endParaRPr lang="en-US" sz="1600" dirty="0"/>
-          </a:p>
-          <a:p>
-            <a:pPr marL="342900" indent="-342900">
-              <a:spcAft>
-                <a:spcPts val="1000"/>
-              </a:spcAft>
-              <a:buSzPct val="100000"/>
-              <a:buChar char="•"/>
-            </a:pPr>
-            <a:r>
-              <a:rPr lang="en-US" sz="1600" dirty="0">
-                <a:solidFill>
-                  <a:srgbClr val="2B1A1D"/>
-                </a:solidFill>
-              </a:rPr>
-              <a:t>SQL logic was written and reviewed but has no automated tests</a:t>
-            </a:r>
-            <a:endParaRPr lang="en-US" sz="1600" dirty="0"/>
-          </a:p>
-          <a:p>
-            <a:pPr marL="342900" indent="-342900">
-              <a:spcAft>
-                <a:spcPts val="1000"/>
-              </a:spcAft>
-              <a:buSzPct val="100000"/>
-              <a:buChar char="•"/>
-            </a:pPr>
-            <a:r>
-              <a:rPr lang="en-US" sz="1600" dirty="0">
-                <a:solidFill>
-                  <a:srgbClr val="2B1A1D"/>
-                </a:solidFill>
-              </a:rPr>
-              <a:t>Quarter rounding (2.66) follows the brief; BU to confirm</a:t>
-            </a:r>
-            <a:endParaRPr lang="en-US" sz="1600" dirty="0"/>
-          </a:p>
-        </p:txBody>
-      </p:sp>
-      <p:sp>
-        <p:nvSpPr>
-          <p:cNvPr id="7" name="Text 4"/>
-          <p:cNvSpPr txBox="1"/>
-          <p:nvPr/>
-        </p:nvSpPr>
-        <p:spPr>
-          <a:xfrm>
-            <a:off x="6309360" y="1417320"/>
-            <a:ext cx="5303520" cy="457200"/>
-          </a:xfrm>
-          <a:prstGeom prst="rect">
-            <a:avLst/>
-          </a:prstGeom>
-          <a:noFill/>
-          <a:ln/>
-        </p:spPr>
-        <p:txBody>
-          <a:bodyPr wrap="square" lIns="0" tIns="0" rIns="0" bIns="0" rtlCol="0" anchor="ctr"/>
-          <a:lstStyle/>
-          <a:p>
-            <a:pPr indent="0" marL="0">
-              <a:buNone/>
-            </a:pPr>
-            <a:r>
-              <a:rPr lang="en-US" sz="2200" b="1" dirty="0">
-                <a:solidFill>
-                  <a:srgbClr val="770816"/>
-                </a:solidFill>
-                <a:latin typeface="Cambria" pitchFamily="34" charset="0"/>
-                <a:ea typeface="Cambria" pitchFamily="34" charset="-122"/>
-                <a:cs typeface="Cambria" pitchFamily="34" charset="-120"/>
-              </a:rPr>
-              <a:t>Next</a:t>
-            </a:r>
-            <a:endParaRPr lang="en-US" sz="2200" dirty="0"/>
-          </a:p>
-        </p:txBody>
-      </p:sp>
-      <p:sp>
-        <p:nvSpPr>
-          <p:cNvPr id="8" name="Shape 5"/>
+      <p:graphicFrame>
+        <p:nvGraphicFramePr>
+          <p:cNvPr id="5" name="Chart 0" descr=""/>
+          <p:cNvGraphicFramePr/>
+          <p:nvPr/>
+        </p:nvGraphicFramePr>
+        <p:xfrm>
+          <a:off x="548640" y="1371600"/>
+          <a:ext cx="4754880" cy="4480560"/>
+        </p:xfrm>
+        <a:graphic xmlns:a="http://schemas.openxmlformats.org/drawingml/2006/main">
+          <a:graphicData uri="http://schemas.openxmlformats.org/drawingml/2006/chart">
+            <c:chart xmlns:c="http://schemas.openxmlformats.org/drawingml/2006/chart" r:id="rId1"/>
+          </a:graphicData>
+        </a:graphic>
+      </p:graphicFrame>
+      <p:sp>
+        <p:nvSpPr>
+          <p:cNvPr id="6" name="Shape 2"/>
           <p:cNvSpPr/>
           <p:nvPr/>
         </p:nvSpPr>
         <p:spPr>
           <a:xfrm>
-            <a:off x="6309360" y="2011680"/>
-            <a:ext cx="5303520" cy="658368"/>
+            <a:off x="5669280" y="1463040"/>
+            <a:ext cx="5943600" cy="1280160"/>
           </a:xfrm>
           <a:prstGeom prst="roundRect">
             <a:avLst>
-              <a:gd name="adj" fmla="val 16667"/>
+              <a:gd name="adj" fmla="val 8571"/>
             </a:avLst>
           </a:prstGeom>
           <a:solidFill>
@@ -6485,93 +6543,93 @@
       </p:sp>
       <p:sp>
         <p:nvSpPr>
-          <p:cNvPr id="9" name="Text 6"/>
-          <p:cNvSpPr txBox="1"/>
-          <p:nvPr/>
-        </p:nvSpPr>
-        <p:spPr>
-          <a:xfrm>
-            <a:off x="6446520" y="2011680"/>
-            <a:ext cx="457200" cy="658368"/>
-          </a:xfrm>
-          <a:prstGeom prst="rect">
-            <a:avLst/>
-          </a:prstGeom>
-          <a:noFill/>
-          <a:ln/>
-        </p:spPr>
-        <p:txBody>
-          <a:bodyPr wrap="square" lIns="0" tIns="0" rIns="0" bIns="0" rtlCol="0" anchor="ctr"/>
-          <a:lstStyle/>
-          <a:p>
-            <a:pPr indent="0" marL="0">
-              <a:buNone/>
-            </a:pPr>
-            <a:r>
-              <a:rPr lang="en-US" sz="2200" b="1" dirty="0">
-                <a:solidFill>
-                  <a:srgbClr val="D9A441"/>
-                </a:solidFill>
-                <a:latin typeface="Cambria" pitchFamily="34" charset="0"/>
-                <a:ea typeface="Cambria" pitchFamily="34" charset="-122"/>
-                <a:cs typeface="Cambria" pitchFamily="34" charset="-120"/>
-              </a:rPr>
-              <a:t>1</a:t>
-            </a:r>
-            <a:endParaRPr lang="en-US" sz="2200" dirty="0"/>
-          </a:p>
-        </p:txBody>
-      </p:sp>
-      <p:sp>
-        <p:nvSpPr>
-          <p:cNvPr id="10" name="Text 7"/>
-          <p:cNvSpPr txBox="1"/>
-          <p:nvPr/>
-        </p:nvSpPr>
-        <p:spPr>
-          <a:xfrm>
-            <a:off x="6995160" y="2011680"/>
-            <a:ext cx="4480560" cy="658368"/>
-          </a:xfrm>
-          <a:prstGeom prst="rect">
-            <a:avLst/>
-          </a:prstGeom>
-          <a:noFill/>
-          <a:ln/>
-        </p:spPr>
-        <p:txBody>
-          <a:bodyPr wrap="square" lIns="0" tIns="0" rIns="0" bIns="0" rtlCol="0" anchor="ctr"/>
-          <a:lstStyle/>
-          <a:p>
-            <a:pPr indent="0" marL="0">
-              <a:buNone/>
-            </a:pPr>
-            <a:r>
-              <a:rPr lang="en-US" sz="1500" dirty="0">
+          <p:cNvPr id="7" name="Shape 3"/>
+          <p:cNvSpPr/>
+          <p:nvPr/>
+        </p:nvSpPr>
+        <p:spPr>
+          <a:xfrm>
+            <a:off x="5897880" y="1920240"/>
+            <a:ext cx="365760" cy="365760"/>
+          </a:xfrm>
+          <a:prstGeom prst="ellipse">
+            <a:avLst/>
+          </a:prstGeom>
+          <a:solidFill>
+            <a:srgbClr val="B3261E"/>
+          </a:solidFill>
+          <a:ln w="12700">
+            <a:solidFill>
+              <a:srgbClr val="B3261E"/>
+            </a:solidFill>
+            <a:prstDash val="solid"/>
+          </a:ln>
+        </p:spPr>
+      </p:sp>
+      <p:sp>
+        <p:nvSpPr>
+          <p:cNvPr id="8" name="Text 4"/>
+          <p:cNvSpPr txBox="1"/>
+          <p:nvPr/>
+        </p:nvSpPr>
+        <p:spPr>
+          <a:xfrm>
+            <a:off x="6446520" y="1463040"/>
+            <a:ext cx="5029200" cy="1280160"/>
+          </a:xfrm>
+          <a:prstGeom prst="rect">
+            <a:avLst/>
+          </a:prstGeom>
+          <a:noFill/>
+          <a:ln/>
+        </p:spPr>
+        <p:txBody>
+          <a:bodyPr wrap="square" lIns="0" tIns="0" rIns="0" bIns="0" rtlCol="0" anchor="ctr"/>
+          <a:lstStyle/>
+          <a:p>
+            <a:pPr indent="0" marL="0">
+              <a:buNone/>
+            </a:pPr>
+            <a:r>
+              <a:rPr lang="en-US" sz="1800" b="1" dirty="0">
+                <a:solidFill>
+                  <a:srgbClr val="B3261E"/>
+                </a:solidFill>
+              </a:rPr>
+              <a:t>Open</a:t>
+            </a:r>
+            <a:endParaRPr lang="en-US" sz="1800" dirty="0"/>
+          </a:p>
+          <a:p>
+            <a:pPr indent="0" marL="0">
+              <a:buNone/>
+            </a:pPr>
+            <a:r>
+              <a:rPr lang="en-US" sz="1300" dirty="0">
                 <a:solidFill>
                   <a:srgbClr val="2B1A1D"/>
                 </a:solidFill>
               </a:rPr>
-              <a:t>Apply migrations and seeds, then rehearse the demo</a:t>
-            </a:r>
-            <a:endParaRPr lang="en-US" sz="1500" dirty="0"/>
-          </a:p>
-        </p:txBody>
-      </p:sp>
-      <p:sp>
-        <p:nvSpPr>
-          <p:cNvPr id="11" name="Shape 8"/>
+              <a:t>No requirement is left open</a:t>
+            </a:r>
+            <a:endParaRPr lang="en-US" sz="1800" dirty="0"/>
+          </a:p>
+        </p:txBody>
+      </p:sp>
+      <p:sp>
+        <p:nvSpPr>
+          <p:cNvPr id="9" name="Shape 5"/>
           <p:cNvSpPr/>
           <p:nvPr/>
         </p:nvSpPr>
         <p:spPr>
           <a:xfrm>
-            <a:off x="6309360" y="2788920"/>
-            <a:ext cx="5303520" cy="658368"/>
+            <a:off x="5669280" y="2926080"/>
+            <a:ext cx="5943600" cy="1280160"/>
           </a:xfrm>
           <a:prstGeom prst="roundRect">
             <a:avLst>
-              <a:gd name="adj" fmla="val 16667"/>
+              <a:gd name="adj" fmla="val 8571"/>
             </a:avLst>
           </a:prstGeom>
           <a:solidFill>
@@ -6594,93 +6652,93 @@
       </p:sp>
       <p:sp>
         <p:nvSpPr>
-          <p:cNvPr id="12" name="Text 9"/>
-          <p:cNvSpPr txBox="1"/>
-          <p:nvPr/>
-        </p:nvSpPr>
-        <p:spPr>
-          <a:xfrm>
-            <a:off x="6446520" y="2788920"/>
-            <a:ext cx="457200" cy="658368"/>
-          </a:xfrm>
-          <a:prstGeom prst="rect">
-            <a:avLst/>
-          </a:prstGeom>
-          <a:noFill/>
-          <a:ln/>
-        </p:spPr>
-        <p:txBody>
-          <a:bodyPr wrap="square" lIns="0" tIns="0" rIns="0" bIns="0" rtlCol="0" anchor="ctr"/>
-          <a:lstStyle/>
-          <a:p>
-            <a:pPr indent="0" marL="0">
-              <a:buNone/>
-            </a:pPr>
-            <a:r>
-              <a:rPr lang="en-US" sz="2200" b="1" dirty="0">
-                <a:solidFill>
-                  <a:srgbClr val="D9A441"/>
-                </a:solidFill>
-                <a:latin typeface="Cambria" pitchFamily="34" charset="0"/>
-                <a:ea typeface="Cambria" pitchFamily="34" charset="-122"/>
-                <a:cs typeface="Cambria" pitchFamily="34" charset="-120"/>
-              </a:rPr>
-              <a:t>2</a:t>
-            </a:r>
-            <a:endParaRPr lang="en-US" sz="2200" dirty="0"/>
-          </a:p>
-        </p:txBody>
-      </p:sp>
-      <p:sp>
-        <p:nvSpPr>
-          <p:cNvPr id="13" name="Text 10"/>
-          <p:cNvSpPr txBox="1"/>
-          <p:nvPr/>
-        </p:nvSpPr>
-        <p:spPr>
-          <a:xfrm>
-            <a:off x="6995160" y="2788920"/>
-            <a:ext cx="4480560" cy="658368"/>
-          </a:xfrm>
-          <a:prstGeom prst="rect">
-            <a:avLst/>
-          </a:prstGeom>
-          <a:noFill/>
-          <a:ln/>
-        </p:spPr>
-        <p:txBody>
-          <a:bodyPr wrap="square" lIns="0" tIns="0" rIns="0" bIns="0" rtlCol="0" anchor="ctr"/>
-          <a:lstStyle/>
-          <a:p>
-            <a:pPr indent="0" marL="0">
-              <a:buNone/>
-            </a:pPr>
-            <a:r>
-              <a:rPr lang="en-US" sz="1500" dirty="0">
+          <p:cNvPr id="10" name="Shape 6"/>
+          <p:cNvSpPr/>
+          <p:nvPr/>
+        </p:nvSpPr>
+        <p:spPr>
+          <a:xfrm>
+            <a:off x="5897880" y="3383280"/>
+            <a:ext cx="365760" cy="365760"/>
+          </a:xfrm>
+          <a:prstGeom prst="ellipse">
+            <a:avLst/>
+          </a:prstGeom>
+          <a:solidFill>
+            <a:srgbClr val="C98A1B"/>
+          </a:solidFill>
+          <a:ln w="12700">
+            <a:solidFill>
+              <a:srgbClr val="C98A1B"/>
+            </a:solidFill>
+            <a:prstDash val="solid"/>
+          </a:ln>
+        </p:spPr>
+      </p:sp>
+      <p:sp>
+        <p:nvSpPr>
+          <p:cNvPr id="11" name="Text 7"/>
+          <p:cNvSpPr txBox="1"/>
+          <p:nvPr/>
+        </p:nvSpPr>
+        <p:spPr>
+          <a:xfrm>
+            <a:off x="6446520" y="2926080"/>
+            <a:ext cx="5029200" cy="1280160"/>
+          </a:xfrm>
+          <a:prstGeom prst="rect">
+            <a:avLst/>
+          </a:prstGeom>
+          <a:noFill/>
+          <a:ln/>
+        </p:spPr>
+        <p:txBody>
+          <a:bodyPr wrap="square" lIns="0" tIns="0" rIns="0" bIns="0" rtlCol="0" anchor="ctr"/>
+          <a:lstStyle/>
+          <a:p>
+            <a:pPr indent="0" marL="0">
+              <a:buNone/>
+            </a:pPr>
+            <a:r>
+              <a:rPr lang="en-US" sz="1800" b="1" dirty="0">
+                <a:solidFill>
+                  <a:srgbClr val="C98A1B"/>
+                </a:solidFill>
+              </a:rPr>
+              <a:t>Partial</a:t>
+            </a:r>
+            <a:endParaRPr lang="en-US" sz="1800" dirty="0"/>
+          </a:p>
+          <a:p>
+            <a:pPr indent="0" marL="0">
+              <a:buNone/>
+            </a:pPr>
+            <a:r>
+              <a:rPr lang="en-US" sz="1300" dirty="0">
                 <a:solidFill>
                   <a:srgbClr val="2B1A1D"/>
                 </a:solidFill>
               </a:rPr>
-              <a:t>Run the backtest on live data and publish the top-3 rate</a:t>
-            </a:r>
-            <a:endParaRPr lang="en-US" sz="1500" dirty="0"/>
-          </a:p>
-        </p:txBody>
-      </p:sp>
-      <p:sp>
-        <p:nvSpPr>
-          <p:cNvPr id="14" name="Shape 11"/>
+              <a:t>Faculty screen to pick several BU courses for one external course (API ready) · 5-credit lab rule (BU to answer)</a:t>
+            </a:r>
+            <a:endParaRPr lang="en-US" sz="1800" dirty="0"/>
+          </a:p>
+        </p:txBody>
+      </p:sp>
+      <p:sp>
+        <p:nvSpPr>
+          <p:cNvPr id="12" name="Shape 8"/>
           <p:cNvSpPr/>
           <p:nvPr/>
         </p:nvSpPr>
         <p:spPr>
           <a:xfrm>
-            <a:off x="6309360" y="3566160"/>
-            <a:ext cx="5303520" cy="658368"/>
+            <a:off x="5669280" y="4389120"/>
+            <a:ext cx="5943600" cy="1280160"/>
           </a:xfrm>
           <a:prstGeom prst="roundRect">
             <a:avLst>
-              <a:gd name="adj" fmla="val 16667"/>
+              <a:gd name="adj" fmla="val 8571"/>
             </a:avLst>
           </a:prstGeom>
           <a:solidFill>
@@ -6703,38 +6761,220 @@
       </p:sp>
       <p:sp>
         <p:nvSpPr>
-          <p:cNvPr id="15" name="Text 12"/>
-          <p:cNvSpPr txBox="1"/>
-          <p:nvPr/>
-        </p:nvSpPr>
-        <p:spPr>
-          <a:xfrm>
-            <a:off x="6446520" y="3566160"/>
-            <a:ext cx="457200" cy="658368"/>
-          </a:xfrm>
-          <a:prstGeom prst="rect">
-            <a:avLst/>
-          </a:prstGeom>
-          <a:noFill/>
-          <a:ln/>
-        </p:spPr>
-        <p:txBody>
-          <a:bodyPr wrap="square" lIns="0" tIns="0" rIns="0" bIns="0" rtlCol="0" anchor="ctr"/>
-          <a:lstStyle/>
-          <a:p>
-            <a:pPr indent="0" marL="0">
-              <a:buNone/>
-            </a:pPr>
-            <a:r>
-              <a:rPr lang="en-US" sz="2200" b="1" dirty="0">
-                <a:solidFill>
-                  <a:srgbClr val="D9A441"/>
+          <p:cNvPr id="13" name="Shape 9"/>
+          <p:cNvSpPr/>
+          <p:nvPr/>
+        </p:nvSpPr>
+        <p:spPr>
+          <a:xfrm>
+            <a:off x="5897880" y="4846320"/>
+            <a:ext cx="365760" cy="365760"/>
+          </a:xfrm>
+          <a:prstGeom prst="ellipse">
+            <a:avLst/>
+          </a:prstGeom>
+          <a:solidFill>
+            <a:srgbClr val="2F7D5B"/>
+          </a:solidFill>
+          <a:ln w="12700">
+            <a:solidFill>
+              <a:srgbClr val="2F7D5B"/>
+            </a:solidFill>
+            <a:prstDash val="solid"/>
+          </a:ln>
+        </p:spPr>
+      </p:sp>
+      <p:sp>
+        <p:nvSpPr>
+          <p:cNvPr id="14" name="Text 10"/>
+          <p:cNvSpPr txBox="1"/>
+          <p:nvPr/>
+        </p:nvSpPr>
+        <p:spPr>
+          <a:xfrm>
+            <a:off x="6446520" y="4389120"/>
+            <a:ext cx="5029200" cy="1280160"/>
+          </a:xfrm>
+          <a:prstGeom prst="rect">
+            <a:avLst/>
+          </a:prstGeom>
+          <a:noFill/>
+          <a:ln/>
+        </p:spPr>
+        <p:txBody>
+          <a:bodyPr wrap="square" lIns="0" tIns="0" rIns="0" bIns="0" rtlCol="0" anchor="ctr"/>
+          <a:lstStyle/>
+          <a:p>
+            <a:pPr indent="0" marL="0">
+              <a:buNone/>
+            </a:pPr>
+            <a:r>
+              <a:rPr lang="en-US" sz="1800" b="1" dirty="0">
+                <a:solidFill>
+                  <a:srgbClr val="2F7D5B"/>
+                </a:solidFill>
+              </a:rPr>
+              <a:t>Built</a:t>
+            </a:r>
+            <a:endParaRPr lang="en-US" sz="1800" dirty="0"/>
+          </a:p>
+          <a:p>
+            <a:pPr indent="0" marL="0">
+              <a:buNone/>
+            </a:pPr>
+            <a:r>
+              <a:rPr lang="en-US" sz="1300" dirty="0">
+                <a:solidFill>
+                  <a:srgbClr val="2B1A1D"/>
+                </a:solidFill>
+              </a:rPr>
+              <a:t>Lanes, quarter 2/3, grades, BU caps, Hub, appeals, workflow, learning loop, degree progress, side-by-side compare, programme rules, exam credit, one-year deadline, accuracy backtest, repeatable demo</a:t>
+            </a:r>
+            <a:endParaRPr lang="en-US" sz="1800" dirty="0"/>
+          </a:p>
+        </p:txBody>
+      </p:sp>
+    </p:spTree>
+  </p:cSld>
+  <p:clrMapOvr>
+    <a:masterClrMapping/>
+  </p:clrMapOvr>
+</p:sld>
+</file>
+
+<file path=ppt/slides/slide16.xml><?xml version="1.0" encoding="utf-8"?>
+<p:sld xmlns:a="http://schemas.openxmlformats.org/drawingml/2006/main" xmlns:r="http://schemas.openxmlformats.org/officeDocument/2006/relationships" xmlns:p="http://schemas.openxmlformats.org/presentationml/2006/main">
+  <p:cSld name="Slide 16">
+    <p:bg>
+      <p:bgPr>
+        <a:solidFill>
+          <a:srgbClr val="FFFFFF"/>
+        </a:solidFill>
+      </p:bgPr>
+    </p:bg>
+    <p:spTree>
+      <p:nvGrpSpPr>
+        <p:cNvPr id="1" name=""/>
+        <p:cNvGrpSpPr/>
+        <p:nvPr/>
+      </p:nvGrpSpPr>
+      <p:grpSpPr>
+        <a:xfrm>
+          <a:off x="0" y="0"/>
+          <a:ext cx="0" cy="0"/>
+          <a:chOff x="0" y="0"/>
+          <a:chExt cx="0" cy="0"/>
+        </a:xfrm>
+      </p:grpSpPr>
+      <p:sp>
+        <p:nvSpPr>
+          <p:cNvPr id="2" name="Text 0"/>
+          <p:cNvSpPr txBox="1"/>
+          <p:nvPr/>
+        </p:nvSpPr>
+        <p:spPr>
+          <a:xfrm>
+            <a:off x="548640" y="365760"/>
+            <a:ext cx="11064240" cy="822960"/>
+          </a:xfrm>
+          <a:prstGeom prst="rect">
+            <a:avLst/>
+          </a:prstGeom>
+          <a:noFill/>
+          <a:ln/>
+        </p:spPr>
+        <p:txBody>
+          <a:bodyPr wrap="square" lIns="0" tIns="0" rIns="0" bIns="0" rtlCol="0" anchor="ctr"/>
+          <a:lstStyle/>
+          <a:p>
+            <a:pPr indent="0" marL="0">
+              <a:buNone/>
+            </a:pPr>
+            <a:r>
+              <a:rPr lang="en-US" sz="3400" b="1" dirty="0">
+                <a:solidFill>
+                  <a:srgbClr val="770816"/>
                 </a:solidFill>
                 <a:latin typeface="Cambria" pitchFamily="34" charset="0"/>
                 <a:ea typeface="Cambria" pitchFamily="34" charset="-122"/>
                 <a:cs typeface="Cambria" pitchFamily="34" charset="-120"/>
               </a:rPr>
-              <a:t>3</a:t>
+              <a:t>What we have not proven yet, and what comes next</a:t>
+            </a:r>
+            <a:endParaRPr lang="en-US" sz="3400" dirty="0"/>
+          </a:p>
+        </p:txBody>
+      </p:sp>
+      <p:sp>
+        <p:nvSpPr>
+          <p:cNvPr id="4" name="Text 1"/>
+          <p:cNvSpPr txBox="1"/>
+          <p:nvPr/>
+        </p:nvSpPr>
+        <p:spPr>
+          <a:xfrm>
+            <a:off x="548640" y="6446520"/>
+            <a:ext cx="5486400" cy="274320"/>
+          </a:xfrm>
+          <a:prstGeom prst="rect">
+            <a:avLst/>
+          </a:prstGeom>
+          <a:noFill/>
+          <a:ln/>
+        </p:spPr>
+        <p:txBody>
+          <a:bodyPr wrap="square" lIns="0" tIns="0" rIns="0" bIns="0" rtlCol="0" anchor="ctr"/>
+          <a:lstStyle/>
+          <a:p>
+            <a:pPr indent="0" marL="0">
+              <a:buNone/>
+            </a:pPr>
+            <a:r>
+              <a:rPr lang="en-US" sz="1000" dirty="0">
+                <a:solidFill>
+                  <a:srgbClr val="6B5A5D"/>
+                </a:solidFill>
+              </a:rPr>
+              <a:t>TransferHub  ·  Clopay Code Crafters</a:t>
+            </a:r>
+            <a:endParaRPr lang="en-US" sz="1000" dirty="0"/>
+          </a:p>
+        </p:txBody>
+      </p:sp>
+      <p:sp>
+        <p:nvSpPr>
+          <p:cNvPr id="5" name="Text 2"/>
+          <p:cNvSpPr txBox="1"/>
+          <p:nvPr/>
+        </p:nvSpPr>
+        <p:spPr>
+          <a:xfrm>
+            <a:off x="548640" y="1417320"/>
+            <a:ext cx="5303520" cy="457200"/>
+          </a:xfrm>
+          <a:prstGeom prst="rect">
+            <a:avLst/>
+          </a:prstGeom>
+          <a:noFill/>
+          <a:ln/>
+        </p:spPr>
+        <p:txBody>
+          <a:bodyPr wrap="square" lIns="0" tIns="0" rIns="0" bIns="0" rtlCol="0" anchor="ctr"/>
+          <a:lstStyle/>
+          <a:p>
+            <a:pPr indent="0" marL="0">
+              <a:buNone/>
+            </a:pPr>
+            <a:r>
+              <a:rPr lang="en-US" sz="2200" b="1" dirty="0">
+                <a:solidFill>
+                  <a:srgbClr val="770816"/>
+                </a:solidFill>
+                <a:latin typeface="Cambria" pitchFamily="34" charset="0"/>
+                <a:ea typeface="Cambria" pitchFamily="34" charset="-122"/>
+                <a:cs typeface="Cambria" pitchFamily="34" charset="-120"/>
+              </a:rPr>
+              <a:t>Not proven yet</a:t>
             </a:r>
             <a:endParaRPr lang="en-US" sz="2200" dirty="0"/>
           </a:p>
@@ -6742,49 +6982,146 @@
       </p:sp>
       <p:sp>
         <p:nvSpPr>
-          <p:cNvPr id="16" name="Text 13"/>
-          <p:cNvSpPr txBox="1"/>
-          <p:nvPr/>
-        </p:nvSpPr>
-        <p:spPr>
-          <a:xfrm>
-            <a:off x="6995160" y="3566160"/>
-            <a:ext cx="4480560" cy="658368"/>
-          </a:xfrm>
-          <a:prstGeom prst="rect">
-            <a:avLst/>
-          </a:prstGeom>
-          <a:noFill/>
-          <a:ln/>
-        </p:spPr>
-        <p:txBody>
-          <a:bodyPr wrap="square" lIns="0" tIns="0" rIns="0" bIns="0" rtlCol="0" anchor="ctr"/>
-          <a:lstStyle/>
-          <a:p>
-            <a:pPr indent="0" marL="0">
-              <a:buNone/>
-            </a:pPr>
-            <a:r>
-              <a:rPr lang="en-US" sz="1500" dirty="0">
+          <p:cNvPr id="6" name="Text 3"/>
+          <p:cNvSpPr txBox="1"/>
+          <p:nvPr/>
+        </p:nvSpPr>
+        <p:spPr>
+          <a:xfrm>
+            <a:off x="548640" y="1965960"/>
+            <a:ext cx="5303520" cy="4023360"/>
+          </a:xfrm>
+          <a:prstGeom prst="rect">
+            <a:avLst/>
+          </a:prstGeom>
+          <a:noFill/>
+          <a:ln/>
+        </p:spPr>
+        <p:txBody>
+          <a:bodyPr wrap="square" lIns="0" tIns="0" rIns="0" bIns="0" rtlCol="0" anchor="t"/>
+          <a:lstStyle/>
+          <a:p>
+            <a:pPr marL="342900" indent="-342900">
+              <a:spcAft>
+                <a:spcPts val="1000"/>
+              </a:spcAft>
+              <a:buSzPct val="100000"/>
+              <a:buChar char="•"/>
+            </a:pPr>
+            <a:r>
+              <a:rPr lang="en-US" sz="1600" dirty="0">
                 <a:solidFill>
                   <a:srgbClr val="2B1A1D"/>
                 </a:solidFill>
               </a:rPr>
-              <a:t>Side-by-side course comparison</a:t>
-            </a:r>
-            <a:endParaRPr lang="en-US" sz="1500" dirty="0"/>
-          </a:p>
-        </p:txBody>
-      </p:sp>
-      <p:sp>
-        <p:nvSpPr>
-          <p:cNvPr id="17" name="Shape 14"/>
+              <a:t>No Anthropic key yet: AI paths are unverified, the rules fallback carries the demo</a:t>
+            </a:r>
+            <a:endParaRPr lang="en-US" sz="1600" dirty="0"/>
+          </a:p>
+          <a:p>
+            <a:pPr marL="342900" indent="-342900">
+              <a:spcAft>
+                <a:spcPts val="1000"/>
+              </a:spcAft>
+              <a:buSzPct val="100000"/>
+              <a:buChar char="•"/>
+            </a:pPr>
+            <a:r>
+              <a:rPr lang="en-US" sz="1600" dirty="0">
+                <a:solidFill>
+                  <a:srgbClr val="2B1A1D"/>
+                </a:solidFill>
+              </a:rPr>
+              <a:t>No BU baseline for evaluator minutes or turnaround, so the saving is not yet quantified</a:t>
+            </a:r>
+            <a:endParaRPr lang="en-US" sz="1600" dirty="0"/>
+          </a:p>
+          <a:p>
+            <a:pPr marL="342900" indent="-342900">
+              <a:spcAft>
+                <a:spcPts val="1000"/>
+              </a:spcAft>
+              <a:buSzPct val="100000"/>
+              <a:buChar char="•"/>
+            </a:pPr>
+            <a:r>
+              <a:rPr lang="en-US" sz="1600" dirty="0">
+                <a:solidFill>
+                  <a:srgbClr val="2B1A1D"/>
+                </a:solidFill>
+              </a:rPr>
+              <a:t>No API integration tests yet; coverage is unit tests, an HTTP smoke suite and SQL contract tests</a:t>
+            </a:r>
+            <a:endParaRPr lang="en-US" sz="1600" dirty="0"/>
+          </a:p>
+          <a:p>
+            <a:pPr marL="342900" indent="-342900">
+              <a:spcAft>
+                <a:spcPts val="1000"/>
+              </a:spcAft>
+              <a:buSzPct val="100000"/>
+              <a:buChar char="•"/>
+            </a:pPr>
+            <a:r>
+              <a:rPr lang="en-US" sz="1600" dirty="0">
+                <a:solidFill>
+                  <a:srgbClr val="2B1A1D"/>
+                </a:solidFill>
+              </a:rPr>
+              <a:t>Quarter rounding (2.66) follows the brief; BU to confirm</a:t>
+            </a:r>
+            <a:endParaRPr lang="en-US" sz="1600" dirty="0"/>
+          </a:p>
+        </p:txBody>
+      </p:sp>
+      <p:sp>
+        <p:nvSpPr>
+          <p:cNvPr id="7" name="Text 4"/>
+          <p:cNvSpPr txBox="1"/>
+          <p:nvPr/>
+        </p:nvSpPr>
+        <p:spPr>
+          <a:xfrm>
+            <a:off x="6309360" y="1417320"/>
+            <a:ext cx="5303520" cy="457200"/>
+          </a:xfrm>
+          <a:prstGeom prst="rect">
+            <a:avLst/>
+          </a:prstGeom>
+          <a:noFill/>
+          <a:ln/>
+        </p:spPr>
+        <p:txBody>
+          <a:bodyPr wrap="square" lIns="0" tIns="0" rIns="0" bIns="0" rtlCol="0" anchor="ctr"/>
+          <a:lstStyle/>
+          <a:p>
+            <a:pPr indent="0" marL="0">
+              <a:buNone/>
+            </a:pPr>
+            <a:r>
+              <a:rPr lang="en-US" sz="2200" b="1" dirty="0">
+                <a:solidFill>
+                  <a:srgbClr val="770816"/>
+                </a:solidFill>
+                <a:latin typeface="Cambria" pitchFamily="34" charset="0"/>
+                <a:ea typeface="Cambria" pitchFamily="34" charset="-122"/>
+                <a:cs typeface="Cambria" pitchFamily="34" charset="-120"/>
+              </a:rPr>
+              <a:t>Next</a:t>
+            </a:r>
+            <a:endParaRPr lang="en-US" sz="2200" dirty="0"/>
+          </a:p>
+        </p:txBody>
+      </p:sp>
+      <p:sp>
+        <p:nvSpPr>
+          <p:cNvPr id="8" name="Shape 5"/>
           <p:cNvSpPr/>
           <p:nvPr/>
         </p:nvSpPr>
         <p:spPr>
           <a:xfrm>
-            <a:off x="6309360" y="4343400"/>
+            <a:off x="6309360" y="2011680"/>
             <a:ext cx="5303520" cy="658368"/>
           </a:xfrm>
           <a:prstGeom prst="roundRect">
@@ -6812,13 +7149,13 @@
       </p:sp>
       <p:sp>
         <p:nvSpPr>
-          <p:cNvPr id="18" name="Text 15"/>
-          <p:cNvSpPr txBox="1"/>
-          <p:nvPr/>
-        </p:nvSpPr>
-        <p:spPr>
-          <a:xfrm>
-            <a:off x="6446520" y="4343400"/>
+          <p:cNvPr id="9" name="Text 6"/>
+          <p:cNvSpPr txBox="1"/>
+          <p:nvPr/>
+        </p:nvSpPr>
+        <p:spPr>
+          <a:xfrm>
+            <a:off x="6446520" y="2011680"/>
             <a:ext cx="457200" cy="658368"/>
           </a:xfrm>
           <a:prstGeom prst="rect">
@@ -6843,7 +7180,7 @@
                 <a:ea typeface="Cambria" pitchFamily="34" charset="-122"/>
                 <a:cs typeface="Cambria" pitchFamily="34" charset="-120"/>
               </a:rPr>
-              <a:t>4</a:t>
+              <a:t>1</a:t>
             </a:r>
             <a:endParaRPr lang="en-US" sz="2200" dirty="0"/>
           </a:p>
@@ -6851,13 +7188,13 @@
       </p:sp>
       <p:sp>
         <p:nvSpPr>
-          <p:cNvPr id="19" name="Text 16"/>
-          <p:cNvSpPr txBox="1"/>
-          <p:nvPr/>
-        </p:nvSpPr>
-        <p:spPr>
-          <a:xfrm>
-            <a:off x="6995160" y="4343400"/>
+          <p:cNvPr id="10" name="Text 7"/>
+          <p:cNvSpPr txBox="1"/>
+          <p:nvPr/>
+        </p:nvSpPr>
+        <p:spPr>
+          <a:xfrm>
+            <a:off x="6995160" y="2011680"/>
             <a:ext cx="4480560" cy="658368"/>
           </a:xfrm>
           <a:prstGeom prst="rect">
@@ -6879,7 +7216,7 @@
                   <a:srgbClr val="2B1A1D"/>
                 </a:solidFill>
               </a:rPr>
-              <a:t>One-year deadline and programme rules</a:t>
+              <a:t>Rehearse the demo from the Demo scenario page</a:t>
             </a:r>
             <a:endParaRPr lang="en-US" sz="1500" dirty="0"/>
           </a:p>
@@ -6887,13 +7224,13 @@
       </p:sp>
       <p:sp>
         <p:nvSpPr>
-          <p:cNvPr id="20" name="Shape 17"/>
+          <p:cNvPr id="11" name="Shape 8"/>
           <p:cNvSpPr/>
           <p:nvPr/>
         </p:nvSpPr>
         <p:spPr>
           <a:xfrm>
-            <a:off x="6309360" y="5120640"/>
+            <a:off x="6309360" y="2788920"/>
             <a:ext cx="5303520" cy="658368"/>
           </a:xfrm>
           <a:prstGeom prst="roundRect">
@@ -6921,13 +7258,13 @@
       </p:sp>
       <p:sp>
         <p:nvSpPr>
-          <p:cNvPr id="21" name="Text 18"/>
-          <p:cNvSpPr txBox="1"/>
-          <p:nvPr/>
-        </p:nvSpPr>
-        <p:spPr>
-          <a:xfrm>
-            <a:off x="6446520" y="5120640"/>
+          <p:cNvPr id="12" name="Text 9"/>
+          <p:cNvSpPr txBox="1"/>
+          <p:nvPr/>
+        </p:nvSpPr>
+        <p:spPr>
+          <a:xfrm>
+            <a:off x="6446520" y="2788920"/>
             <a:ext cx="457200" cy="658368"/>
           </a:xfrm>
           <a:prstGeom prst="rect">
@@ -6952,6 +7289,333 @@
                 <a:ea typeface="Cambria" pitchFamily="34" charset="-122"/>
                 <a:cs typeface="Cambria" pitchFamily="34" charset="-120"/>
               </a:rPr>
+              <a:t>2</a:t>
+            </a:r>
+            <a:endParaRPr lang="en-US" sz="2200" dirty="0"/>
+          </a:p>
+        </p:txBody>
+      </p:sp>
+      <p:sp>
+        <p:nvSpPr>
+          <p:cNvPr id="13" name="Text 10"/>
+          <p:cNvSpPr txBox="1"/>
+          <p:nvPr/>
+        </p:nvSpPr>
+        <p:spPr>
+          <a:xfrm>
+            <a:off x="6995160" y="2788920"/>
+            <a:ext cx="4480560" cy="658368"/>
+          </a:xfrm>
+          <a:prstGeom prst="rect">
+            <a:avLst/>
+          </a:prstGeom>
+          <a:noFill/>
+          <a:ln/>
+        </p:spPr>
+        <p:txBody>
+          <a:bodyPr wrap="square" lIns="0" tIns="0" rIns="0" bIns="0" rtlCol="0" anchor="ctr"/>
+          <a:lstStyle/>
+          <a:p>
+            <a:pPr indent="0" marL="0">
+              <a:buNone/>
+            </a:pPr>
+            <a:r>
+              <a:rPr lang="en-US" sz="1500" dirty="0">
+                <a:solidFill>
+                  <a:srgbClr val="2B1A1D"/>
+                </a:solidFill>
+              </a:rPr>
+              <a:t>Get BU answers: 5-credit lab rule, rounding, AP/IB minimums</a:t>
+            </a:r>
+            <a:endParaRPr lang="en-US" sz="1500" dirty="0"/>
+          </a:p>
+        </p:txBody>
+      </p:sp>
+      <p:sp>
+        <p:nvSpPr>
+          <p:cNvPr id="14" name="Shape 11"/>
+          <p:cNvSpPr/>
+          <p:nvPr/>
+        </p:nvSpPr>
+        <p:spPr>
+          <a:xfrm>
+            <a:off x="6309360" y="3566160"/>
+            <a:ext cx="5303520" cy="658368"/>
+          </a:xfrm>
+          <a:prstGeom prst="roundRect">
+            <a:avLst>
+              <a:gd name="adj" fmla="val 16667"/>
+            </a:avLst>
+          </a:prstGeom>
+          <a:solidFill>
+            <a:srgbClr val="FDF2F3"/>
+          </a:solidFill>
+          <a:ln w="12700">
+            <a:solidFill>
+              <a:srgbClr val="FDF2F3"/>
+            </a:solidFill>
+            <a:prstDash val="solid"/>
+          </a:ln>
+          <a:effectLst>
+            <a:outerShdw sx="100000" sy="100000" kx="0" ky="0" algn="bl" rotWithShape="0" blurRad="101600" dist="25400" dir="5400000">
+              <a:srgbClr val="000000">
+                <a:alpha val="8000"/>
+              </a:srgbClr>
+            </a:outerShdw>
+          </a:effectLst>
+        </p:spPr>
+      </p:sp>
+      <p:sp>
+        <p:nvSpPr>
+          <p:cNvPr id="15" name="Text 12"/>
+          <p:cNvSpPr txBox="1"/>
+          <p:nvPr/>
+        </p:nvSpPr>
+        <p:spPr>
+          <a:xfrm>
+            <a:off x="6446520" y="3566160"/>
+            <a:ext cx="457200" cy="658368"/>
+          </a:xfrm>
+          <a:prstGeom prst="rect">
+            <a:avLst/>
+          </a:prstGeom>
+          <a:noFill/>
+          <a:ln/>
+        </p:spPr>
+        <p:txBody>
+          <a:bodyPr wrap="square" lIns="0" tIns="0" rIns="0" bIns="0" rtlCol="0" anchor="ctr"/>
+          <a:lstStyle/>
+          <a:p>
+            <a:pPr indent="0" marL="0">
+              <a:buNone/>
+            </a:pPr>
+            <a:r>
+              <a:rPr lang="en-US" sz="2200" b="1" dirty="0">
+                <a:solidFill>
+                  <a:srgbClr val="D9A441"/>
+                </a:solidFill>
+                <a:latin typeface="Cambria" pitchFamily="34" charset="0"/>
+                <a:ea typeface="Cambria" pitchFamily="34" charset="-122"/>
+                <a:cs typeface="Cambria" pitchFamily="34" charset="-120"/>
+              </a:rPr>
+              <a:t>3</a:t>
+            </a:r>
+            <a:endParaRPr lang="en-US" sz="2200" dirty="0"/>
+          </a:p>
+        </p:txBody>
+      </p:sp>
+      <p:sp>
+        <p:nvSpPr>
+          <p:cNvPr id="16" name="Text 13"/>
+          <p:cNvSpPr txBox="1"/>
+          <p:nvPr/>
+        </p:nvSpPr>
+        <p:spPr>
+          <a:xfrm>
+            <a:off x="6995160" y="3566160"/>
+            <a:ext cx="4480560" cy="658368"/>
+          </a:xfrm>
+          <a:prstGeom prst="rect">
+            <a:avLst/>
+          </a:prstGeom>
+          <a:noFill/>
+          <a:ln/>
+        </p:spPr>
+        <p:txBody>
+          <a:bodyPr wrap="square" lIns="0" tIns="0" rIns="0" bIns="0" rtlCol="0" anchor="ctr"/>
+          <a:lstStyle/>
+          <a:p>
+            <a:pPr indent="0" marL="0">
+              <a:buNone/>
+            </a:pPr>
+            <a:r>
+              <a:rPr lang="en-US" sz="1500" dirty="0">
+                <a:solidFill>
+                  <a:srgbClr val="2B1A1D"/>
+                </a:solidFill>
+              </a:rPr>
+              <a:t>Faculty screen for one-to-many course mappings</a:t>
+            </a:r>
+            <a:endParaRPr lang="en-US" sz="1500" dirty="0"/>
+          </a:p>
+        </p:txBody>
+      </p:sp>
+      <p:sp>
+        <p:nvSpPr>
+          <p:cNvPr id="17" name="Shape 14"/>
+          <p:cNvSpPr/>
+          <p:nvPr/>
+        </p:nvSpPr>
+        <p:spPr>
+          <a:xfrm>
+            <a:off x="6309360" y="4343400"/>
+            <a:ext cx="5303520" cy="658368"/>
+          </a:xfrm>
+          <a:prstGeom prst="roundRect">
+            <a:avLst>
+              <a:gd name="adj" fmla="val 16667"/>
+            </a:avLst>
+          </a:prstGeom>
+          <a:solidFill>
+            <a:srgbClr val="FDF2F3"/>
+          </a:solidFill>
+          <a:ln w="12700">
+            <a:solidFill>
+              <a:srgbClr val="FDF2F3"/>
+            </a:solidFill>
+            <a:prstDash val="solid"/>
+          </a:ln>
+          <a:effectLst>
+            <a:outerShdw sx="100000" sy="100000" kx="0" ky="0" algn="bl" rotWithShape="0" blurRad="101600" dist="25400" dir="5400000">
+              <a:srgbClr val="000000">
+                <a:alpha val="8000"/>
+              </a:srgbClr>
+            </a:outerShdw>
+          </a:effectLst>
+        </p:spPr>
+      </p:sp>
+      <p:sp>
+        <p:nvSpPr>
+          <p:cNvPr id="18" name="Text 15"/>
+          <p:cNvSpPr txBox="1"/>
+          <p:nvPr/>
+        </p:nvSpPr>
+        <p:spPr>
+          <a:xfrm>
+            <a:off x="6446520" y="4343400"/>
+            <a:ext cx="457200" cy="658368"/>
+          </a:xfrm>
+          <a:prstGeom prst="rect">
+            <a:avLst/>
+          </a:prstGeom>
+          <a:noFill/>
+          <a:ln/>
+        </p:spPr>
+        <p:txBody>
+          <a:bodyPr wrap="square" lIns="0" tIns="0" rIns="0" bIns="0" rtlCol="0" anchor="ctr"/>
+          <a:lstStyle/>
+          <a:p>
+            <a:pPr indent="0" marL="0">
+              <a:buNone/>
+            </a:pPr>
+            <a:r>
+              <a:rPr lang="en-US" sz="2200" b="1" dirty="0">
+                <a:solidFill>
+                  <a:srgbClr val="D9A441"/>
+                </a:solidFill>
+                <a:latin typeface="Cambria" pitchFamily="34" charset="0"/>
+                <a:ea typeface="Cambria" pitchFamily="34" charset="-122"/>
+                <a:cs typeface="Cambria" pitchFamily="34" charset="-120"/>
+              </a:rPr>
+              <a:t>4</a:t>
+            </a:r>
+            <a:endParaRPr lang="en-US" sz="2200" dirty="0"/>
+          </a:p>
+        </p:txBody>
+      </p:sp>
+      <p:sp>
+        <p:nvSpPr>
+          <p:cNvPr id="19" name="Text 16"/>
+          <p:cNvSpPr txBox="1"/>
+          <p:nvPr/>
+        </p:nvSpPr>
+        <p:spPr>
+          <a:xfrm>
+            <a:off x="6995160" y="4343400"/>
+            <a:ext cx="4480560" cy="658368"/>
+          </a:xfrm>
+          <a:prstGeom prst="rect">
+            <a:avLst/>
+          </a:prstGeom>
+          <a:noFill/>
+          <a:ln/>
+        </p:spPr>
+        <p:txBody>
+          <a:bodyPr wrap="square" lIns="0" tIns="0" rIns="0" bIns="0" rtlCol="0" anchor="ctr"/>
+          <a:lstStyle/>
+          <a:p>
+            <a:pPr indent="0" marL="0">
+              <a:buNone/>
+            </a:pPr>
+            <a:r>
+              <a:rPr lang="en-US" sz="1500" dirty="0">
+                <a:solidFill>
+                  <a:srgbClr val="2B1A1D"/>
+                </a:solidFill>
+              </a:rPr>
+              <a:t>Turn on Claude and re-run the same backtest</a:t>
+            </a:r>
+            <a:endParaRPr lang="en-US" sz="1500" dirty="0"/>
+          </a:p>
+        </p:txBody>
+      </p:sp>
+      <p:sp>
+        <p:nvSpPr>
+          <p:cNvPr id="20" name="Shape 17"/>
+          <p:cNvSpPr/>
+          <p:nvPr/>
+        </p:nvSpPr>
+        <p:spPr>
+          <a:xfrm>
+            <a:off x="6309360" y="5120640"/>
+            <a:ext cx="5303520" cy="658368"/>
+          </a:xfrm>
+          <a:prstGeom prst="roundRect">
+            <a:avLst>
+              <a:gd name="adj" fmla="val 16667"/>
+            </a:avLst>
+          </a:prstGeom>
+          <a:solidFill>
+            <a:srgbClr val="FDF2F3"/>
+          </a:solidFill>
+          <a:ln w="12700">
+            <a:solidFill>
+              <a:srgbClr val="FDF2F3"/>
+            </a:solidFill>
+            <a:prstDash val="solid"/>
+          </a:ln>
+          <a:effectLst>
+            <a:outerShdw sx="100000" sy="100000" kx="0" ky="0" algn="bl" rotWithShape="0" blurRad="101600" dist="25400" dir="5400000">
+              <a:srgbClr val="000000">
+                <a:alpha val="8000"/>
+              </a:srgbClr>
+            </a:outerShdw>
+          </a:effectLst>
+        </p:spPr>
+      </p:sp>
+      <p:sp>
+        <p:nvSpPr>
+          <p:cNvPr id="21" name="Text 18"/>
+          <p:cNvSpPr txBox="1"/>
+          <p:nvPr/>
+        </p:nvSpPr>
+        <p:spPr>
+          <a:xfrm>
+            <a:off x="6446520" y="5120640"/>
+            <a:ext cx="457200" cy="658368"/>
+          </a:xfrm>
+          <a:prstGeom prst="rect">
+            <a:avLst/>
+          </a:prstGeom>
+          <a:noFill/>
+          <a:ln/>
+        </p:spPr>
+        <p:txBody>
+          <a:bodyPr wrap="square" lIns="0" tIns="0" rIns="0" bIns="0" rtlCol="0" anchor="ctr"/>
+          <a:lstStyle/>
+          <a:p>
+            <a:pPr indent="0" marL="0">
+              <a:buNone/>
+            </a:pPr>
+            <a:r>
+              <a:rPr lang="en-US" sz="2200" b="1" dirty="0">
+                <a:solidFill>
+                  <a:srgbClr val="D9A441"/>
+                </a:solidFill>
+                <a:latin typeface="Cambria" pitchFamily="34" charset="0"/>
+                <a:ea typeface="Cambria" pitchFamily="34" charset="-122"/>
+                <a:cs typeface="Cambria" pitchFamily="34" charset="-120"/>
+              </a:rPr>
               <a:t>5</a:t>
             </a:r>
             <a:endParaRPr lang="en-US" sz="2200" dirty="0"/>
@@ -6988,7 +7652,7 @@
                   <a:srgbClr val="2B1A1D"/>
                 </a:solidFill>
               </a:rPr>
-              <a:t>Turn on Claude and measure</a:t>
+              <a:t>Measure evaluator minutes against a BU baseline</a:t>
             </a:r>
             <a:endParaRPr lang="en-US" sz="1500" dirty="0"/>
           </a:p>
@@ -7002,9 +7666,9 @@
 </p:sld>
 </file>
 
-<file path=ppt/slides/slide16.xml><?xml version="1.0" encoding="utf-8"?>
+<file path=ppt/slides/slide17.xml><?xml version="1.0" encoding="utf-8"?>
 <p:sld xmlns:a="http://schemas.openxmlformats.org/drawingml/2006/main" xmlns:r="http://schemas.openxmlformats.org/officeDocument/2006/relationships" xmlns:p="http://schemas.openxmlformats.org/presentationml/2006/main">
-  <p:cSld name="Slide 16">
+  <p:cSld name="Slide 17">
     <p:bg>
       <p:bgPr>
         <a:solidFill>

--- a/_designs/deck/TransferHub-Hackathon.pptx
+++ b/_designs/deck/TransferHub-Hackathon.pptx
@@ -4,6 +4,9 @@
   <p:sldMasterIdLst>
     <p:sldMasterId id="2147483648" r:id="rId1"/>
   </p:sldMasterIdLst>
+  <p:notesMasterIdLst>
+    <p:notesMasterId r:id="rId18"/>
+  </p:notesMasterIdLst>
   <p:sldIdLst>
     <p:sldId id="256" r:id="rId2"/>
     <p:sldId id="257" r:id="rId3"/>
@@ -22,9 +25,6 @@
     <p:sldId id="270" r:id="rId16"/>
     <p:sldId id="271" r:id="rId17"/>
   </p:sldIdLst>
-  <p:notesMasterIdLst>
-    <p:notesMasterId r:id="rId18"/>
-  </p:notesMasterIdLst>
   <p:sldSz cx="12192000" cy="6858000"/>
   <p:notesSz cx="6858000" cy="12192000"/>
   <p:defaultTextStyle>
@@ -119,13 +119,20 @@
       </a:defRPr>
     </a:lvl9pPr>
   </p:defaultTextStyle>
+  <p:extLst>
+    <p:ext uri="{EFAFB233-063F-42B5-8137-9DF3F51BA10A}">
+      <p15:sldGuideLst xmlns:p15="http://schemas.microsoft.com/office/powerpoint/2012/main"/>
+    </p:ext>
+  </p:extLst>
 </p:presentation>
 </file>
 
 <file path=ppt/charts/chart1.xml><?xml version="1.0" encoding="utf-8"?>
-<c:chartSpace xmlns:c="http://schemas.openxmlformats.org/drawingml/2006/chart" xmlns:a="http://schemas.openxmlformats.org/drawingml/2006/main" xmlns:r="http://schemas.openxmlformats.org/officeDocument/2006/relationships">
+<c:chartSpace xmlns:c="http://schemas.openxmlformats.org/drawingml/2006/chart" xmlns:a="http://schemas.openxmlformats.org/drawingml/2006/main" xmlns:r="http://schemas.openxmlformats.org/officeDocument/2006/relationships" xmlns:c16r2="http://schemas.microsoft.com/office/drawing/2015/06/chart">
   <c:date1904 val="0"/>
+  <c:lang val="en-US"/>
   <c:roundedCorners val="1"/>
+  <c:style val="2"/>
   <c:chart>
     <c:autoTitleDeleted val="1"/>
     <c:plotArea>
@@ -168,6 +175,11 @@
               </a:solidFill>
               <a:effectLst/>
             </c:spPr>
+            <c:extLst>
+              <c:ext xmlns:c16="http://schemas.microsoft.com/office/drawing/2014/chart" uri="{C3380CC4-5D6E-409C-BE32-E72D297353CC}">
+                <c16:uniqueId val="{00000001-01F3-4EA9-8CA9-839332C46831}"/>
+              </c:ext>
+            </c:extLst>
           </c:dPt>
           <c:dPt>
             <c:idx val="1"/>
@@ -178,6 +190,11 @@
               </a:solidFill>
               <a:effectLst/>
             </c:spPr>
+            <c:extLst>
+              <c:ext xmlns:c16="http://schemas.microsoft.com/office/drawing/2014/chart" uri="{C3380CC4-5D6E-409C-BE32-E72D297353CC}">
+                <c16:uniqueId val="{00000003-01F3-4EA9-8CA9-839332C46831}"/>
+              </c:ext>
+            </c:extLst>
           </c:dPt>
           <c:dPt>
             <c:idx val="2"/>
@@ -188,6 +205,11 @@
               </a:solidFill>
               <a:effectLst/>
             </c:spPr>
+            <c:extLst>
+              <c:ext xmlns:c16="http://schemas.microsoft.com/office/drawing/2014/chart" uri="{C3380CC4-5D6E-409C-BE32-E72D297353CC}">
+                <c16:uniqueId val="{00000005-01F3-4EA9-8CA9-839332C46831}"/>
+              </c:ext>
+            </c:extLst>
           </c:dPt>
           <c:dLbls>
             <c:dLbl>
@@ -206,6 +228,7 @@
                       <a:latin typeface="Arial"/>
                     </a:defRPr>
                   </a:pPr>
+                  <a:endParaRPr lang="en-US"/>
                 </a:p>
               </c:txPr>
               <c:showLegendKey val="0"/>
@@ -214,6 +237,12 @@
               <c:showSerName val="0"/>
               <c:showPercent val="0"/>
               <c:showBubbleSize val="0"/>
+              <c:extLst>
+                <c:ext xmlns:c15="http://schemas.microsoft.com/office/drawing/2012/chart" uri="{CE6537A1-D6FC-4f65-9D91-7224C49458BB}"/>
+                <c:ext xmlns:c16="http://schemas.microsoft.com/office/drawing/2014/chart" uri="{C3380CC4-5D6E-409C-BE32-E72D297353CC}">
+                  <c16:uniqueId val="{00000001-01F3-4EA9-8CA9-839332C46831}"/>
+                </c:ext>
+              </c:extLst>
             </c:dLbl>
             <c:dLbl>
               <c:idx val="1"/>
@@ -231,6 +260,7 @@
                       <a:latin typeface="Arial"/>
                     </a:defRPr>
                   </a:pPr>
+                  <a:endParaRPr lang="en-US"/>
                 </a:p>
               </c:txPr>
               <c:showLegendKey val="0"/>
@@ -239,6 +269,12 @@
               <c:showSerName val="0"/>
               <c:showPercent val="0"/>
               <c:showBubbleSize val="0"/>
+              <c:extLst>
+                <c:ext xmlns:c15="http://schemas.microsoft.com/office/drawing/2012/chart" uri="{CE6537A1-D6FC-4f65-9D91-7224C49458BB}"/>
+                <c:ext xmlns:c16="http://schemas.microsoft.com/office/drawing/2014/chart" uri="{C3380CC4-5D6E-409C-BE32-E72D297353CC}">
+                  <c16:uniqueId val="{00000003-01F3-4EA9-8CA9-839332C46831}"/>
+                </c:ext>
+              </c:extLst>
             </c:dLbl>
             <c:dLbl>
               <c:idx val="2"/>
@@ -256,6 +292,7 @@
                       <a:latin typeface="Arial"/>
                     </a:defRPr>
                   </a:pPr>
+                  <a:endParaRPr lang="en-US"/>
                 </a:p>
               </c:txPr>
               <c:showLegendKey val="0"/>
@@ -264,8 +301,21 @@
               <c:showSerName val="0"/>
               <c:showPercent val="0"/>
               <c:showBubbleSize val="0"/>
+              <c:extLst>
+                <c:ext xmlns:c15="http://schemas.microsoft.com/office/drawing/2012/chart" uri="{CE6537A1-D6FC-4f65-9D91-7224C49458BB}"/>
+                <c:ext xmlns:c16="http://schemas.microsoft.com/office/drawing/2014/chart" uri="{C3380CC4-5D6E-409C-BE32-E72D297353CC}">
+                  <c16:uniqueId val="{00000005-01F3-4EA9-8CA9-839332C46831}"/>
+                </c:ext>
+              </c:extLst>
             </c:dLbl>
             <c:numFmt formatCode="General" sourceLinked="0"/>
+            <c:spPr>
+              <a:noFill/>
+              <a:ln>
+                <a:noFill/>
+              </a:ln>
+              <a:effectLst/>
+            </c:spPr>
             <c:txPr>
               <a:bodyPr/>
               <a:lstStyle/>
@@ -278,6 +328,7 @@
                     <a:latin typeface="Arial"/>
                   </a:defRPr>
                 </a:pPr>
+                <a:endParaRPr lang="en-US"/>
               </a:p>
             </c:txPr>
             <c:showLegendKey val="0"/>
@@ -287,6 +338,9 @@
             <c:showPercent val="1"/>
             <c:showBubbleSize val="0"/>
             <c:showLeaderLines val="0"/>
+            <c:extLst>
+              <c:ext xmlns:c15="http://schemas.microsoft.com/office/drawing/2012/chart" uri="{CE6537A1-D6FC-4f65-9D91-7224C49458BB}"/>
+            </c:extLst>
           </c:dLbls>
           <c:cat>
             <c:strRef>
@@ -309,6 +363,7 @@
             <c:numRef>
               <c:f>Sheet1!$B$2:$B$4</c:f>
               <c:numCache>
+                <c:formatCode>General</c:formatCode>
                 <c:ptCount val="3"/>
                 <c:pt idx="0">
                   <c:v>17</c:v>
@@ -322,7 +377,21 @@
               </c:numCache>
             </c:numRef>
           </c:val>
+          <c:extLst>
+            <c:ext xmlns:c16="http://schemas.microsoft.com/office/drawing/2014/chart" uri="{C3380CC4-5D6E-409C-BE32-E72D297353CC}">
+              <c16:uniqueId val="{00000006-01F3-4EA9-8CA9-839332C46831}"/>
+            </c:ext>
+          </c:extLst>
         </c:ser>
+        <c:dLbls>
+          <c:showLegendKey val="0"/>
+          <c:showVal val="0"/>
+          <c:showCatName val="0"/>
+          <c:showSerName val="0"/>
+          <c:showPercent val="0"/>
+          <c:showBubbleSize val="0"/>
+          <c:showLeaderLines val="0"/>
+        </c:dLbls>
         <c:firstSliceAng val="0"/>
         <c:holeSize val="62"/>
       </c:doughnutChart>
@@ -354,6 +423,7 @@
     </c:legend>
     <c:plotVisOnly val="1"/>
     <c:dispBlanksAs val="span"/>
+    <c:showDLblsOverMax val="1"/>
   </c:chart>
   <c:spPr>
     <a:noFill/>
@@ -390,234 +460,10 @@
           <a:chExt cx="0" cy="0"/>
         </a:xfrm>
       </p:grpSpPr>
-      <p:sp>
-        <p:nvSpPr>
-          <p:cNvPr id="2" name="Header Placeholder 1"/>
-          <p:cNvSpPr>
-            <a:spLocks noGrp="1"/>
-          </p:cNvSpPr>
-          <p:nvPr>
-            <p:ph type="hdr" sz="quarter"/>
-          </p:nvPr>
-        </p:nvSpPr>
-        <p:spPr>
-          <a:xfrm>
-            <a:off x="0" y="0"/>
-            <a:ext cx="2971800" cy="458788"/>
-          </a:xfrm>
-          <a:prstGeom prst="rect">
-            <a:avLst/>
-          </a:prstGeom>
-        </p:spPr>
-        <p:txBody>
-          <a:bodyPr vert="horz" lIns="91440" tIns="45720" rIns="91440" bIns="45720" rtlCol="0"/>
-          <a:lstStyle>
-            <a:lvl1pPr algn="l">
-              <a:defRPr sz="1200"/>
-            </a:lvl1pPr>
-          </a:lstStyle>
-          <a:p>
-            <a:endParaRPr lang="en-US"/>
-          </a:p>
-        </p:txBody>
-      </p:sp>
-      <p:sp>
-        <p:nvSpPr>
-          <p:cNvPr id="3" name="Date Placeholder 2"/>
-          <p:cNvSpPr>
-            <a:spLocks noGrp="1"/>
-          </p:cNvSpPr>
-          <p:nvPr>
-            <p:ph type="dt" idx="1"/>
-          </p:nvPr>
-        </p:nvSpPr>
-        <p:spPr>
-          <a:xfrm>
-            <a:off x="3884613" y="0"/>
-            <a:ext cx="2971800" cy="458788"/>
-          </a:xfrm>
-          <a:prstGeom prst="rect">
-            <a:avLst/>
-          </a:prstGeom>
-        </p:spPr>
-        <p:txBody>
-          <a:bodyPr vert="horz" lIns="91440" tIns="45720" rIns="91440" bIns="45720" rtlCol="0"/>
-          <a:lstStyle>
-            <a:lvl1pPr algn="r">
-              <a:defRPr sz="1200"/>
-            </a:lvl1pPr>
-          </a:lstStyle>
-          <a:p>
-            <a:fld id="{5282F153-3F37-0F45-9E97-73ACFA13230C}" type="datetimeFigureOut">
-              <a:rPr lang="en-US"/>
-              <a:t>7/23/19</a:t>
-            </a:fld>
-            <a:endParaRPr lang="en-US"/>
-          </a:p>
-        </p:txBody>
-      </p:sp>
-      <p:sp>
-        <p:nvSpPr>
-          <p:cNvPr id="4" name="Slide Image Placeholder 3"/>
-          <p:cNvSpPr>
-            <a:spLocks noGrp="1" noRot="1" noChangeAspect="1"/>
-          </p:cNvSpPr>
-          <p:nvPr>
-            <p:ph type="sldImg" idx="2"/>
-          </p:nvPr>
-        </p:nvSpPr>
-        <p:spPr>
-          <a:xfrm>
-            <a:off x="685800" y="1143000"/>
-            <a:ext cx="5486400" cy="3086100"/>
-          </a:xfrm>
-          <a:prstGeom prst="rect">
-            <a:avLst/>
-          </a:prstGeom>
-          <a:noFill/>
-          <a:ln w="12700">
-            <a:solidFill>
-              <a:prstClr val="black"/>
-            </a:solidFill>
-          </a:ln>
-        </p:spPr>
-        <p:txBody>
-          <a:bodyPr vert="horz" lIns="91440" tIns="45720" rIns="91440" bIns="45720" rtlCol="0" anchor="ctr"/>
-          <a:lstStyle/>
-          <a:p>
-            <a:endParaRPr lang="en-US"/>
-          </a:p>
-        </p:txBody>
-      </p:sp>
-      <p:sp>
-        <p:nvSpPr>
-          <p:cNvPr id="5" name="Notes Placeholder 4"/>
-          <p:cNvSpPr>
-            <a:spLocks noGrp="1"/>
-          </p:cNvSpPr>
-          <p:nvPr>
-            <p:ph type="body" sz="quarter" idx="3"/>
-          </p:nvPr>
-        </p:nvSpPr>
-        <p:spPr>
-          <a:xfrm>
-            <a:off x="685800" y="4400550"/>
-            <a:ext cx="5486400" cy="3600450"/>
-          </a:xfrm>
-          <a:prstGeom prst="rect">
-            <a:avLst/>
-          </a:prstGeom>
-        </p:spPr>
-        <p:txBody>
-          <a:bodyPr vert="horz" lIns="91440" tIns="45720" rIns="91440" bIns="45720" rtlCol="0"/>
-          <a:lstStyle/>
-          <a:p>
-            <a:pPr lvl="0"/>
-            <a:r>
-              <a:rPr lang="en-US"/>
-              <a:t>Click to edit Master text styles</a:t>
-            </a:r>
-          </a:p>
-          <a:p>
-            <a:pPr lvl="1"/>
-            <a:r>
-              <a:rPr lang="en-US"/>
-              <a:t>Second level</a:t>
-            </a:r>
-          </a:p>
-          <a:p>
-            <a:pPr lvl="2"/>
-            <a:r>
-              <a:rPr lang="en-US"/>
-              <a:t>Third level</a:t>
-            </a:r>
-          </a:p>
-          <a:p>
-            <a:pPr lvl="3"/>
-            <a:r>
-              <a:rPr lang="en-US"/>
-              <a:t>Fourth level</a:t>
-            </a:r>
-          </a:p>
-          <a:p>
-            <a:pPr lvl="4"/>
-            <a:r>
-              <a:rPr lang="en-US"/>
-              <a:t>Fifth level</a:t>
-            </a:r>
-          </a:p>
-        </p:txBody>
-      </p:sp>
-      <p:sp>
-        <p:nvSpPr>
-          <p:cNvPr id="6" name="Footer Placeholder 5"/>
-          <p:cNvSpPr>
-            <a:spLocks noGrp="1"/>
-          </p:cNvSpPr>
-          <p:nvPr>
-            <p:ph type="ftr" sz="quarter" idx="4"/>
-          </p:nvPr>
-        </p:nvSpPr>
-        <p:spPr>
-          <a:xfrm>
-            <a:off x="0" y="8685213"/>
-            <a:ext cx="2971800" cy="458787"/>
-          </a:xfrm>
-          <a:prstGeom prst="rect">
-            <a:avLst/>
-          </a:prstGeom>
-        </p:spPr>
-        <p:txBody>
-          <a:bodyPr vert="horz" lIns="91440" tIns="45720" rIns="91440" bIns="45720" rtlCol="0" anchor="b"/>
-          <a:lstStyle>
-            <a:lvl1pPr algn="l">
-              <a:defRPr sz="1200"/>
-            </a:lvl1pPr>
-          </a:lstStyle>
-          <a:p>
-            <a:endParaRPr lang="en-US"/>
-          </a:p>
-        </p:txBody>
-      </p:sp>
-      <p:sp>
-        <p:nvSpPr>
-          <p:cNvPr id="7" name="Slide Number Placeholder 6"/>
-          <p:cNvSpPr>
-            <a:spLocks noGrp="1"/>
-          </p:cNvSpPr>
-          <p:nvPr>
-            <p:ph type="sldNum" sz="quarter" idx="5"/>
-          </p:nvPr>
-        </p:nvSpPr>
-        <p:spPr>
-          <a:xfrm>
-            <a:off x="3884613" y="8685213"/>
-            <a:ext cx="2971800" cy="458787"/>
-          </a:xfrm>
-          <a:prstGeom prst="rect">
-            <a:avLst/>
-          </a:prstGeom>
-        </p:spPr>
-        <p:txBody>
-          <a:bodyPr vert="horz" lIns="91440" tIns="45720" rIns="91440" bIns="45720" rtlCol="0" anchor="b"/>
-          <a:lstStyle>
-            <a:lvl1pPr algn="r">
-              <a:defRPr sz="1200"/>
-            </a:lvl1pPr>
-          </a:lstStyle>
-          <a:p>
-            <a:fld id="{CE5E9CC1-C706-0F49-92D6-E571CC5EEA8F}" type="slidenum">
-              <a:rPr lang="en-US"/>
-              <a:t>‹#›</a:t>
-            </a:fld>
-            <a:endParaRPr lang="en-US"/>
-          </a:p>
-        </p:txBody>
-      </p:sp>
     </p:spTree>
     <p:extLst>
       <p:ext uri="{BB962C8B-B14F-4D97-AF65-F5344CB8AC3E}">
-        <p14:creationId xmlns:p14="http://schemas.microsoft.com/office/powerpoint/2010/main" val="1024086991"/>
+        <p14:creationId xmlns:p14="http://schemas.microsoft.com/office/powerpoint/2010/main" val="1921764692"/>
       </p:ext>
     </p:extLst>
   </p:cSld>
@@ -765,7 +611,6 @@
               <a:rPr lang="en-US" dirty="0"/>
               <a:t>Open with the one-line promise: faster for evaluators, clearer for students, and the department still decides.</a:t>
             </a:r>
-            <a:endParaRPr lang="en-US" dirty="0"/>
           </a:p>
         </p:txBody>
       </p:sp>
@@ -853,7 +698,6 @@
               <a:rPr lang="en-US" dirty="0"/>
               <a:t>Smart upload classifies and extracts. Intake channels all end at a confirm step before an account exists.</a:t>
             </a:r>
-            <a:endParaRPr lang="en-US" dirty="0"/>
           </a:p>
         </p:txBody>
       </p:sp>
@@ -941,7 +785,6 @@
               <a:rPr lang="en-US" dirty="0"/>
               <a:t>Policy engine mirrors BU's published rules. Workflow engine is configured per university.</a:t>
             </a:r>
-            <a:endParaRPr lang="en-US" dirty="0"/>
           </a:p>
         </p:txBody>
       </p:sp>
@@ -1029,7 +872,6 @@
               <a:rPr lang="en-US" dirty="0"/>
               <a:t>Multi-university master data, permissions matrix, partner API, dashboards, Azure deployment.</a:t>
             </a:r>
-            <a:endParaRPr lang="en-US" dirty="0"/>
           </a:p>
         </p:txBody>
       </p:sp>
@@ -1117,7 +959,6 @@
               <a:rPr lang="en-US" dirty="0"/>
               <a:t>Shortlist is lexical and free. Cache means the same external course costs one call ever.</a:t>
             </a:r>
-            <a:endParaRPr lang="en-US" dirty="0"/>
           </a:p>
         </p:txBody>
       </p:sp>
@@ -1205,7 +1046,6 @@
               <a:rPr lang="en-US" dirty="0"/>
               <a:t>We compared every rule and ask in the design docs with the code. 17 built, 3 partial, 2 open. Full table in _designs/GAP_ANALYSIS.md.</a:t>
             </a:r>
-            <a:endParaRPr lang="en-US" dirty="0"/>
           </a:p>
         </p:txBody>
       </p:sp>
@@ -1293,7 +1133,6 @@
               <a:rPr lang="en-US" dirty="0"/>
               <a:t>Be honest: no live Claude key, no BU baseline numbers. Plan to close the gaps.</a:t>
             </a:r>
-            <a:endParaRPr lang="en-US" dirty="0"/>
           </a:p>
         </p:txBody>
       </p:sp>
@@ -1381,7 +1220,6 @@
               <a:rPr lang="en-US" dirty="0"/>
               <a:t>Close on the promise and invite the live demo.</a:t>
             </a:r>
-            <a:endParaRPr lang="en-US" dirty="0"/>
           </a:p>
         </p:txBody>
       </p:sp>
@@ -1469,7 +1307,6 @@
               <a:rPr lang="en-US" dirty="0"/>
               <a:t>BU takes 800+ transfers a year. Courses without an equivalency show 0 units, students chase syllabi, evaluators compare by hand.</a:t>
             </a:r>
-            <a:endParaRPr lang="en-US" dirty="0"/>
           </a:p>
         </p:txBody>
       </p:sp>
@@ -1557,7 +1394,6 @@
               <a:rPr lang="en-US" dirty="0"/>
               <a:t>Four tests in the brief. Each has a concrete feature you can click.</a:t>
             </a:r>
-            <a:endParaRPr lang="en-US" dirty="0"/>
           </a:p>
         </p:txBody>
       </p:sp>
@@ -1645,7 +1481,6 @@
               <a:rPr lang="en-US" dirty="0"/>
               <a:t>Walk left to right. Rules first, then known equivalencies, then AI or built-in rules, then the people.</a:t>
             </a:r>
-            <a:endParaRPr lang="en-US" dirty="0"/>
           </a:p>
         </p:txBody>
       </p:sp>
@@ -1733,7 +1568,6 @@
               <a:rPr lang="en-US" dirty="0"/>
               <a:t>Maya Rivera moves from Bay State Community College. Three known, two maybe, one quarter-system course converted 4 x 2/3 = 2.66.</a:t>
             </a:r>
-            <a:endParaRPr lang="en-US" dirty="0"/>
           </a:p>
         </p:txBody>
       </p:sp>
@@ -1821,7 +1655,6 @@
               <a:rPr lang="en-US" dirty="0"/>
               <a:t>Request review: timeline, reviewer brief, ranked suggestions with rationale, one-click accept above a threshold, bulk approve in the queue.</a:t>
             </a:r>
-            <a:endParaRPr lang="en-US" dirty="0"/>
           </a:p>
         </p:txBody>
       </p:sp>
@@ -1909,7 +1742,6 @@
               <a:rPr lang="en-US" dirty="0"/>
               <a:t>Per-course lanes, timeline, internal vs student notes, nudge reminders, dashboards.</a:t>
             </a:r>
-            <a:endParaRPr lang="en-US" dirty="0"/>
           </a:p>
         </p:txBody>
       </p:sp>
@@ -1997,7 +1829,6 @@
               <a:rPr lang="en-US" dirty="0"/>
               <a:t>Now the part nobody asked for.</a:t>
             </a:r>
-            <a:endParaRPr lang="en-US" dirty="0"/>
           </a:p>
         </p:txBody>
       </p:sp>
@@ -2085,7 +1916,6 @@
               <a:rPr lang="en-US" dirty="0"/>
               <a:t>No API key yet, budget exhausted, or an outage: the built-in rules engine reads documents and suggests matches. One super-admin switch.</a:t>
             </a:r>
-            <a:endParaRPr lang="en-US" dirty="0"/>
           </a:p>
         </p:txBody>
       </p:sp>
@@ -2158,6 +1988,11 @@
 <file path=ppt/slideMasters/slideMaster1.xml><?xml version="1.0" encoding="utf-8"?>
 <p:sldMaster xmlns:a="http://schemas.openxmlformats.org/drawingml/2006/main" xmlns:r="http://schemas.openxmlformats.org/officeDocument/2006/relationships" xmlns:p="http://schemas.openxmlformats.org/presentationml/2006/main">
   <p:cSld>
+    <p:bg>
+      <p:bgRef idx="1001">
+        <a:schemeClr val="bg1"/>
+      </p:bgRef>
+    </p:bg>
     <p:spTree>
       <p:nvGrpSpPr>
         <p:cNvPr id="1" name=""/>
@@ -2440,6 +2275,7 @@
         <a:solidFill>
           <a:srgbClr val="3A040B"/>
         </a:solidFill>
+        <a:effectLst/>
       </p:bgPr>
     </p:bg>
     <p:spTree>
@@ -2482,17 +2318,24 @@
             <a:prstDash val="solid"/>
           </a:ln>
         </p:spPr>
+        <p:txBody>
+          <a:bodyPr/>
+          <a:lstStyle/>
+          <a:p>
+            <a:endParaRPr lang="en-US"/>
+          </a:p>
+        </p:txBody>
       </p:sp>
       <p:pic>
         <p:nvPicPr>
-          <p:cNvPr id="4" name="Image 0" descr="TransferHub logo">    </p:cNvPr>
+          <p:cNvPr id="4" name="Image 0" descr="TransferHub logo"/>
           <p:cNvPicPr>
             <a:picLocks noChangeAspect="1"/>
           </p:cNvPicPr>
           <p:nvPr/>
         </p:nvPicPr>
         <p:blipFill>
-          <a:blip r:embed="rId1"/>
+          <a:blip r:embed="rId3"/>
           <a:stretch>
             <a:fillRect/>
           </a:stretch>
@@ -2528,7 +2371,7 @@
           <a:bodyPr wrap="square" lIns="0" tIns="0" rIns="0" bIns="0" rtlCol="0" anchor="ctr"/>
           <a:lstStyle/>
           <a:p>
-            <a:pPr indent="0" marL="0">
+            <a:pPr marL="0" indent="0">
               <a:buNone/>
             </a:pPr>
             <a:r>
@@ -2567,7 +2410,7 @@
           <a:bodyPr wrap="square" lIns="0" tIns="0" rIns="0" bIns="0" rtlCol="0" anchor="ctr"/>
           <a:lstStyle/>
           <a:p>
-            <a:pPr indent="0" marL="0">
+            <a:pPr marL="0" indent="0">
               <a:buNone/>
             </a:pPr>
             <a:r>
@@ -2603,7 +2446,7 @@
           <a:bodyPr wrap="square" lIns="0" tIns="0" rIns="0" bIns="0" rtlCol="0" anchor="ctr"/>
           <a:lstStyle/>
           <a:p>
-            <a:pPr indent="0" marL="0">
+            <a:pPr marL="0" indent="0">
               <a:buNone/>
             </a:pPr>
             <a:r>
@@ -2614,9 +2457,6 @@
               </a:rPr>
               <a:t>Clopay Code Crafters</a:t>
             </a:r>
-            <a:pPr indent="0" marL="0">
-              <a:buNone/>
-            </a:pPr>
             <a:r>
               <a:rPr lang="en-US" sz="1800" dirty="0">
                 <a:solidFill>
@@ -2645,6 +2485,7 @@
         <a:solidFill>
           <a:srgbClr val="FFFFFF"/>
         </a:solidFill>
+        <a:effectLst/>
       </p:bgPr>
     </p:bg>
     <p:spTree>
@@ -2682,7 +2523,7 @@
           <a:bodyPr wrap="square" lIns="0" tIns="0" rIns="0" bIns="0" rtlCol="0" anchor="ctr"/>
           <a:lstStyle/>
           <a:p>
-            <a:pPr indent="0" marL="0">
+            <a:pPr marL="0" indent="0">
               <a:buNone/>
             </a:pPr>
             <a:r>
@@ -2721,7 +2562,7 @@
           <a:bodyPr wrap="square" lIns="0" tIns="0" rIns="0" bIns="0" rtlCol="0" anchor="ctr"/>
           <a:lstStyle/>
           <a:p>
-            <a:pPr indent="0" marL="0">
+            <a:pPr marL="0" indent="0">
               <a:buNone/>
             </a:pPr>
             <a:r>
@@ -2738,14 +2579,14 @@
       </p:sp>
       <p:pic>
         <p:nvPicPr>
-          <p:cNvPr id="5" name="Smart upload screenshot" descr="Smart upload screenshot">    </p:cNvPr>
+          <p:cNvPr id="5" name="Smart upload screenshot" descr="Smart upload screenshot"/>
           <p:cNvPicPr>
             <a:picLocks noChangeAspect="1"/>
           </p:cNvPicPr>
           <p:nvPr/>
         </p:nvPicPr>
         <p:blipFill>
-          <a:blip r:embed="rId1"/>
+          <a:blip r:embed="rId3"/>
           <a:stretch>
             <a:fillRect/>
           </a:stretch>
@@ -2759,7 +2600,7 @@
             <a:avLst/>
           </a:prstGeom>
           <a:effectLst>
-            <a:outerShdw sx="100000" sy="100000" kx="0" ky="0" algn="bl" rotWithShape="0" blurRad="152400" dist="38100" dir="5400000">
+            <a:outerShdw blurRad="152400" dist="38100" dir="5400000" algn="bl" rotWithShape="0">
               <a:srgbClr val="000000">
                 <a:alpha val="25000"/>
               </a:srgbClr>
@@ -2769,14 +2610,14 @@
       </p:pic>
       <p:pic>
         <p:nvPicPr>
-          <p:cNvPr id="6" name="Intake lookup screenshot" descr="Intake lookup screenshot">    </p:cNvPr>
+          <p:cNvPr id="6" name="Intake lookup screenshot" descr="Intake lookup screenshot"/>
           <p:cNvPicPr>
             <a:picLocks noChangeAspect="1"/>
           </p:cNvPicPr>
           <p:nvPr/>
         </p:nvPicPr>
         <p:blipFill>
-          <a:blip r:embed="rId2"/>
+          <a:blip r:embed="rId4"/>
           <a:stretch>
             <a:fillRect/>
           </a:stretch>
@@ -2790,7 +2631,7 @@
             <a:avLst/>
           </a:prstGeom>
           <a:effectLst>
-            <a:outerShdw sx="100000" sy="100000" kx="0" ky="0" algn="bl" rotWithShape="0" blurRad="152400" dist="38100" dir="5400000">
+            <a:outerShdw blurRad="152400" dist="38100" dir="5400000" algn="bl" rotWithShape="0">
               <a:srgbClr val="000000">
                 <a:alpha val="25000"/>
               </a:srgbClr>
@@ -2824,13 +2665,20 @@
             <a:prstDash val="solid"/>
           </a:ln>
           <a:effectLst>
-            <a:outerShdw sx="100000" sy="100000" kx="0" ky="0" algn="bl" rotWithShape="0" blurRad="101600" dist="25400" dir="5400000">
+            <a:outerShdw blurRad="101600" dist="25400" dir="5400000" algn="bl" rotWithShape="0">
               <a:srgbClr val="000000">
                 <a:alpha val="8000"/>
               </a:srgbClr>
             </a:outerShdw>
           </a:effectLst>
         </p:spPr>
+        <p:txBody>
+          <a:bodyPr/>
+          <a:lstStyle/>
+          <a:p>
+            <a:endParaRPr lang="en-US"/>
+          </a:p>
+        </p:txBody>
       </p:sp>
       <p:sp>
         <p:nvSpPr>
@@ -2856,17 +2704,24 @@
             <a:prstDash val="solid"/>
           </a:ln>
         </p:spPr>
+        <p:txBody>
+          <a:bodyPr/>
+          <a:lstStyle/>
+          <a:p>
+            <a:endParaRPr lang="en-US"/>
+          </a:p>
+        </p:txBody>
       </p:sp>
       <p:pic>
         <p:nvPicPr>
-          <p:cNvPr id="9" name="Image 2" descr="FiUserPlus">    </p:cNvPr>
+          <p:cNvPr id="9" name="Image 2" descr="FiUserPlus"/>
           <p:cNvPicPr>
             <a:picLocks noChangeAspect="1"/>
           </p:cNvPicPr>
           <p:nvPr/>
         </p:nvPicPr>
         <p:blipFill>
-          <a:blip r:embed="rId3"/>
+          <a:blip r:embed="rId5"/>
           <a:stretch>
             <a:fillRect/>
           </a:stretch>
@@ -2902,7 +2757,7 @@
           <a:bodyPr wrap="square" lIns="0" tIns="0" rIns="0" bIns="0" rtlCol="0" anchor="ctr"/>
           <a:lstStyle/>
           <a:p>
-            <a:pPr indent="0" marL="0">
+            <a:pPr marL="0" indent="0">
               <a:buNone/>
             </a:pPr>
             <a:r>
@@ -2943,13 +2798,20 @@
             <a:prstDash val="solid"/>
           </a:ln>
           <a:effectLst>
-            <a:outerShdw sx="100000" sy="100000" kx="0" ky="0" algn="bl" rotWithShape="0" blurRad="101600" dist="25400" dir="5400000">
+            <a:outerShdw blurRad="101600" dist="25400" dir="5400000" algn="bl" rotWithShape="0">
               <a:srgbClr val="000000">
                 <a:alpha val="8000"/>
               </a:srgbClr>
             </a:outerShdw>
           </a:effectLst>
         </p:spPr>
+        <p:txBody>
+          <a:bodyPr/>
+          <a:lstStyle/>
+          <a:p>
+            <a:endParaRPr lang="en-US"/>
+          </a:p>
+        </p:txBody>
       </p:sp>
       <p:sp>
         <p:nvSpPr>
@@ -2975,17 +2837,24 @@
             <a:prstDash val="solid"/>
           </a:ln>
         </p:spPr>
+        <p:txBody>
+          <a:bodyPr/>
+          <a:lstStyle/>
+          <a:p>
+            <a:endParaRPr lang="en-US"/>
+          </a:p>
+        </p:txBody>
       </p:sp>
       <p:pic>
         <p:nvPicPr>
-          <p:cNvPr id="13" name="Image 3" descr="FiMail">    </p:cNvPr>
+          <p:cNvPr id="13" name="Image 3" descr="FiMail"/>
           <p:cNvPicPr>
             <a:picLocks noChangeAspect="1"/>
           </p:cNvPicPr>
           <p:nvPr/>
         </p:nvPicPr>
         <p:blipFill>
-          <a:blip r:embed="rId4"/>
+          <a:blip r:embed="rId6"/>
           <a:stretch>
             <a:fillRect/>
           </a:stretch>
@@ -3021,7 +2890,7 @@
           <a:bodyPr wrap="square" lIns="0" tIns="0" rIns="0" bIns="0" rtlCol="0" anchor="ctr"/>
           <a:lstStyle/>
           <a:p>
-            <a:pPr indent="0" marL="0">
+            <a:pPr marL="0" indent="0">
               <a:buNone/>
             </a:pPr>
             <a:r>
@@ -3062,13 +2931,20 @@
             <a:prstDash val="solid"/>
           </a:ln>
           <a:effectLst>
-            <a:outerShdw sx="100000" sy="100000" kx="0" ky="0" algn="bl" rotWithShape="0" blurRad="101600" dist="25400" dir="5400000">
+            <a:outerShdw blurRad="101600" dist="25400" dir="5400000" algn="bl" rotWithShape="0">
               <a:srgbClr val="000000">
                 <a:alpha val="8000"/>
               </a:srgbClr>
             </a:outerShdw>
           </a:effectLst>
         </p:spPr>
+        <p:txBody>
+          <a:bodyPr/>
+          <a:lstStyle/>
+          <a:p>
+            <a:endParaRPr lang="en-US"/>
+          </a:p>
+        </p:txBody>
       </p:sp>
       <p:sp>
         <p:nvSpPr>
@@ -3094,17 +2970,24 @@
             <a:prstDash val="solid"/>
           </a:ln>
         </p:spPr>
+        <p:txBody>
+          <a:bodyPr/>
+          <a:lstStyle/>
+          <a:p>
+            <a:endParaRPr lang="en-US"/>
+          </a:p>
+        </p:txBody>
       </p:sp>
       <p:pic>
         <p:nvPicPr>
-          <p:cNvPr id="17" name="Image 4" descr="FiGrid">    </p:cNvPr>
+          <p:cNvPr id="17" name="Image 4" descr="FiGrid"/>
           <p:cNvPicPr>
             <a:picLocks noChangeAspect="1"/>
           </p:cNvPicPr>
           <p:nvPr/>
         </p:nvPicPr>
         <p:blipFill>
-          <a:blip r:embed="rId5"/>
+          <a:blip r:embed="rId7"/>
           <a:stretch>
             <a:fillRect/>
           </a:stretch>
@@ -3140,7 +3023,7 @@
           <a:bodyPr wrap="square" lIns="0" tIns="0" rIns="0" bIns="0" rtlCol="0" anchor="ctr"/>
           <a:lstStyle/>
           <a:p>
-            <a:pPr indent="0" marL="0">
+            <a:pPr marL="0" indent="0">
               <a:buNone/>
             </a:pPr>
             <a:r>
@@ -3181,13 +3064,20 @@
             <a:prstDash val="solid"/>
           </a:ln>
           <a:effectLst>
-            <a:outerShdw sx="100000" sy="100000" kx="0" ky="0" algn="bl" rotWithShape="0" blurRad="101600" dist="25400" dir="5400000">
+            <a:outerShdw blurRad="101600" dist="25400" dir="5400000" algn="bl" rotWithShape="0">
               <a:srgbClr val="000000">
                 <a:alpha val="8000"/>
               </a:srgbClr>
             </a:outerShdw>
           </a:effectLst>
         </p:spPr>
+        <p:txBody>
+          <a:bodyPr/>
+          <a:lstStyle/>
+          <a:p>
+            <a:endParaRPr lang="en-US"/>
+          </a:p>
+        </p:txBody>
       </p:sp>
       <p:sp>
         <p:nvSpPr>
@@ -3213,17 +3103,24 @@
             <a:prstDash val="solid"/>
           </a:ln>
         </p:spPr>
+        <p:txBody>
+          <a:bodyPr/>
+          <a:lstStyle/>
+          <a:p>
+            <a:endParaRPr lang="en-US"/>
+          </a:p>
+        </p:txBody>
       </p:sp>
       <p:pic>
         <p:nvPicPr>
-          <p:cNvPr id="21" name="Image 5" descr="FiDatabase">    </p:cNvPr>
+          <p:cNvPr id="21" name="Image 5" descr="FiDatabase"/>
           <p:cNvPicPr>
             <a:picLocks noChangeAspect="1"/>
           </p:cNvPicPr>
           <p:nvPr/>
         </p:nvPicPr>
         <p:blipFill>
-          <a:blip r:embed="rId6"/>
+          <a:blip r:embed="rId8"/>
           <a:stretch>
             <a:fillRect/>
           </a:stretch>
@@ -3259,7 +3156,7 @@
           <a:bodyPr wrap="square" lIns="0" tIns="0" rIns="0" bIns="0" rtlCol="0" anchor="ctr"/>
           <a:lstStyle/>
           <a:p>
-            <a:pPr indent="0" marL="0">
+            <a:pPr marL="0" indent="0">
               <a:buNone/>
             </a:pPr>
             <a:r>
@@ -3300,13 +3197,20 @@
             <a:prstDash val="solid"/>
           </a:ln>
           <a:effectLst>
-            <a:outerShdw sx="100000" sy="100000" kx="0" ky="0" algn="bl" rotWithShape="0" blurRad="101600" dist="25400" dir="5400000">
+            <a:outerShdw blurRad="101600" dist="25400" dir="5400000" algn="bl" rotWithShape="0">
               <a:srgbClr val="000000">
                 <a:alpha val="8000"/>
               </a:srgbClr>
             </a:outerShdw>
           </a:effectLst>
         </p:spPr>
+        <p:txBody>
+          <a:bodyPr/>
+          <a:lstStyle/>
+          <a:p>
+            <a:endParaRPr lang="en-US"/>
+          </a:p>
+        </p:txBody>
       </p:sp>
       <p:sp>
         <p:nvSpPr>
@@ -3332,17 +3236,24 @@
             <a:prstDash val="solid"/>
           </a:ln>
         </p:spPr>
+        <p:txBody>
+          <a:bodyPr/>
+          <a:lstStyle/>
+          <a:p>
+            <a:endParaRPr lang="en-US"/>
+          </a:p>
+        </p:txBody>
       </p:sp>
       <p:pic>
         <p:nvPicPr>
-          <p:cNvPr id="25" name="Image 6" descr="FiUploadCloud">    </p:cNvPr>
+          <p:cNvPr id="25" name="Image 6" descr="FiUploadCloud"/>
           <p:cNvPicPr>
             <a:picLocks noChangeAspect="1"/>
           </p:cNvPicPr>
           <p:nvPr/>
         </p:nvPicPr>
         <p:blipFill>
-          <a:blip r:embed="rId7"/>
+          <a:blip r:embed="rId9"/>
           <a:stretch>
             <a:fillRect/>
           </a:stretch>
@@ -3378,7 +3289,7 @@
           <a:bodyPr wrap="square" lIns="0" tIns="0" rIns="0" bIns="0" rtlCol="0" anchor="ctr"/>
           <a:lstStyle/>
           <a:p>
-            <a:pPr indent="0" marL="0">
+            <a:pPr marL="0" indent="0">
               <a:buNone/>
             </a:pPr>
             <a:r>
@@ -3409,6 +3320,7 @@
         <a:solidFill>
           <a:srgbClr val="FFFFFF"/>
         </a:solidFill>
+        <a:effectLst/>
       </p:bgPr>
     </p:bg>
     <p:spTree>
@@ -3446,7 +3358,7 @@
           <a:bodyPr wrap="square" lIns="0" tIns="0" rIns="0" bIns="0" rtlCol="0" anchor="ctr"/>
           <a:lstStyle/>
           <a:p>
-            <a:pPr indent="0" marL="0">
+            <a:pPr marL="0" indent="0">
               <a:buNone/>
             </a:pPr>
             <a:r>
@@ -3485,7 +3397,7 @@
           <a:bodyPr wrap="square" lIns="0" tIns="0" rIns="0" bIns="0" rtlCol="0" anchor="ctr"/>
           <a:lstStyle/>
           <a:p>
-            <a:pPr indent="0" marL="0">
+            <a:pPr marL="0" indent="0">
               <a:buNone/>
             </a:pPr>
             <a:r>
@@ -3526,13 +3438,20 @@
             <a:prstDash val="solid"/>
           </a:ln>
           <a:effectLst>
-            <a:outerShdw sx="100000" sy="100000" kx="0" ky="0" algn="bl" rotWithShape="0" blurRad="101600" dist="25400" dir="5400000">
+            <a:outerShdw blurRad="101600" dist="25400" dir="5400000" algn="bl" rotWithShape="0">
               <a:srgbClr val="000000">
                 <a:alpha val="8000"/>
               </a:srgbClr>
             </a:outerShdw>
           </a:effectLst>
         </p:spPr>
+        <p:txBody>
+          <a:bodyPr/>
+          <a:lstStyle/>
+          <a:p>
+            <a:endParaRPr lang="en-US"/>
+          </a:p>
+        </p:txBody>
       </p:sp>
       <p:sp>
         <p:nvSpPr>
@@ -3555,7 +3474,7 @@
           <a:bodyPr wrap="square" lIns="0" tIns="0" rIns="0" bIns="0" rtlCol="0" anchor="ctr"/>
           <a:lstStyle/>
           <a:p>
-            <a:pPr indent="0" marL="0">
+            <a:pPr marL="0" indent="0">
               <a:buNone/>
             </a:pPr>
             <a:r>
@@ -3566,9 +3485,6 @@
               </a:rPr>
               <a:t>Credit cap  </a:t>
             </a:r>
-            <a:pPr indent="0" marL="0">
-              <a:buNone/>
-            </a:pPr>
             <a:r>
               <a:rPr lang="en-US" sz="1400" dirty="0">
                 <a:solidFill>
@@ -3607,13 +3523,20 @@
             <a:prstDash val="solid"/>
           </a:ln>
           <a:effectLst>
-            <a:outerShdw sx="100000" sy="100000" kx="0" ky="0" algn="bl" rotWithShape="0" blurRad="101600" dist="25400" dir="5400000">
+            <a:outerShdw blurRad="101600" dist="25400" dir="5400000" algn="bl" rotWithShape="0">
               <a:srgbClr val="000000">
                 <a:alpha val="8000"/>
               </a:srgbClr>
             </a:outerShdw>
           </a:effectLst>
         </p:spPr>
+        <p:txBody>
+          <a:bodyPr/>
+          <a:lstStyle/>
+          <a:p>
+            <a:endParaRPr lang="en-US"/>
+          </a:p>
+        </p:txBody>
       </p:sp>
       <p:sp>
         <p:nvSpPr>
@@ -3636,7 +3559,7 @@
           <a:bodyPr wrap="square" lIns="0" tIns="0" rIns="0" bIns="0" rtlCol="0" anchor="ctr"/>
           <a:lstStyle/>
           <a:p>
-            <a:pPr indent="0" marL="0">
+            <a:pPr marL="0" indent="0">
               <a:buNone/>
             </a:pPr>
             <a:r>
@@ -3647,9 +3570,6 @@
               </a:rPr>
               <a:t>Grades  </a:t>
             </a:r>
-            <a:pPr indent="0" marL="0">
-              <a:buNone/>
-            </a:pPr>
             <a:r>
               <a:rPr lang="en-US" sz="1400" dirty="0">
                 <a:solidFill>
@@ -3688,13 +3608,20 @@
             <a:prstDash val="solid"/>
           </a:ln>
           <a:effectLst>
-            <a:outerShdw sx="100000" sy="100000" kx="0" ky="0" algn="bl" rotWithShape="0" blurRad="101600" dist="25400" dir="5400000">
+            <a:outerShdw blurRad="101600" dist="25400" dir="5400000" algn="bl" rotWithShape="0">
               <a:srgbClr val="000000">
                 <a:alpha val="8000"/>
               </a:srgbClr>
             </a:outerShdw>
           </a:effectLst>
         </p:spPr>
+        <p:txBody>
+          <a:bodyPr/>
+          <a:lstStyle/>
+          <a:p>
+            <a:endParaRPr lang="en-US"/>
+          </a:p>
+        </p:txBody>
       </p:sp>
       <p:sp>
         <p:nvSpPr>
@@ -3717,7 +3644,7 @@
           <a:bodyPr wrap="square" lIns="0" tIns="0" rIns="0" bIns="0" rtlCol="0" anchor="ctr"/>
           <a:lstStyle/>
           <a:p>
-            <a:pPr indent="0" marL="0">
+            <a:pPr marL="0" indent="0">
               <a:buNone/>
             </a:pPr>
             <a:r>
@@ -3728,9 +3655,6 @@
               </a:rPr>
               <a:t>Age and accreditation  </a:t>
             </a:r>
-            <a:pPr indent="0" marL="0">
-              <a:buNone/>
-            </a:pPr>
             <a:r>
               <a:rPr lang="en-US" sz="1400" dirty="0">
                 <a:solidFill>
@@ -3769,13 +3693,20 @@
             <a:prstDash val="solid"/>
           </a:ln>
           <a:effectLst>
-            <a:outerShdw sx="100000" sy="100000" kx="0" ky="0" algn="bl" rotWithShape="0" blurRad="101600" dist="25400" dir="5400000">
+            <a:outerShdw blurRad="101600" dist="25400" dir="5400000" algn="bl" rotWithShape="0">
               <a:srgbClr val="000000">
                 <a:alpha val="8000"/>
               </a:srgbClr>
             </a:outerShdw>
           </a:effectLst>
         </p:spPr>
+        <p:txBody>
+          <a:bodyPr/>
+          <a:lstStyle/>
+          <a:p>
+            <a:endParaRPr lang="en-US"/>
+          </a:p>
+        </p:txBody>
       </p:sp>
       <p:sp>
         <p:nvSpPr>
@@ -3798,7 +3729,7 @@
           <a:bodyPr wrap="square" lIns="0" tIns="0" rIns="0" bIns="0" rtlCol="0" anchor="ctr"/>
           <a:lstStyle/>
           <a:p>
-            <a:pPr indent="0" marL="0">
+            <a:pPr marL="0" indent="0">
               <a:buNone/>
             </a:pPr>
             <a:r>
@@ -3809,9 +3740,6 @@
               </a:rPr>
               <a:t>Not eligible  </a:t>
             </a:r>
-            <a:pPr indent="0" marL="0">
-              <a:buNone/>
-            </a:pPr>
             <a:r>
               <a:rPr lang="en-US" sz="1400" dirty="0">
                 <a:solidFill>
@@ -3850,13 +3778,20 @@
             <a:prstDash val="solid"/>
           </a:ln>
           <a:effectLst>
-            <a:outerShdw sx="100000" sy="100000" kx="0" ky="0" algn="bl" rotWithShape="0" blurRad="101600" dist="25400" dir="5400000">
+            <a:outerShdw blurRad="101600" dist="25400" dir="5400000" algn="bl" rotWithShape="0">
               <a:srgbClr val="000000">
                 <a:alpha val="8000"/>
               </a:srgbClr>
             </a:outerShdw>
           </a:effectLst>
         </p:spPr>
+        <p:txBody>
+          <a:bodyPr/>
+          <a:lstStyle/>
+          <a:p>
+            <a:endParaRPr lang="en-US"/>
+          </a:p>
+        </p:txBody>
       </p:sp>
       <p:sp>
         <p:nvSpPr>
@@ -3879,7 +3814,7 @@
           <a:bodyPr wrap="square" lIns="0" tIns="0" rIns="0" bIns="0" rtlCol="0" anchor="ctr"/>
           <a:lstStyle/>
           <a:p>
-            <a:pPr indent="0" marL="0">
+            <a:pPr marL="0" indent="0">
               <a:buNone/>
             </a:pPr>
             <a:r>
@@ -3890,9 +3825,6 @@
               </a:rPr>
               <a:t>Hub  </a:t>
             </a:r>
-            <a:pPr indent="0" marL="0">
-              <a:buNone/>
-            </a:pPr>
             <a:r>
               <a:rPr lang="en-US" sz="1400" dirty="0">
                 <a:solidFill>
@@ -3907,14 +3839,14 @@
       </p:sp>
       <p:pic>
         <p:nvPicPr>
-          <p:cNvPr id="15" name="Workflow designer screenshot" descr="Workflow designer screenshot">    </p:cNvPr>
+          <p:cNvPr id="15" name="Workflow designer screenshot" descr="Workflow designer screenshot"/>
           <p:cNvPicPr>
             <a:picLocks noChangeAspect="1"/>
           </p:cNvPicPr>
           <p:nvPr/>
         </p:nvPicPr>
         <p:blipFill>
-          <a:blip r:embed="rId1"/>
+          <a:blip r:embed="rId3"/>
           <a:stretch>
             <a:fillRect/>
           </a:stretch>
@@ -3928,7 +3860,7 @@
             <a:avLst/>
           </a:prstGeom>
           <a:effectLst>
-            <a:outerShdw sx="100000" sy="100000" kx="0" ky="0" algn="bl" rotWithShape="0" blurRad="152400" dist="38100" dir="5400000">
+            <a:outerShdw blurRad="152400" dist="38100" dir="5400000" algn="bl" rotWithShape="0">
               <a:srgbClr val="000000">
                 <a:alpha val="25000"/>
               </a:srgbClr>
@@ -3957,7 +3889,7 @@
           <a:bodyPr wrap="square" lIns="0" tIns="0" rIns="0" bIns="0" rtlCol="0" anchor="ctr"/>
           <a:lstStyle/>
           <a:p>
-            <a:pPr indent="0" marL="0">
+            <a:pPr marL="0" indent="0">
               <a:buNone/>
             </a:pPr>
             <a:r>
@@ -3988,6 +3920,7 @@
         <a:solidFill>
           <a:srgbClr val="FFFFFF"/>
         </a:solidFill>
+        <a:effectLst/>
       </p:bgPr>
     </p:bg>
     <p:spTree>
@@ -4025,7 +3958,7 @@
           <a:bodyPr wrap="square" lIns="0" tIns="0" rIns="0" bIns="0" rtlCol="0" anchor="ctr"/>
           <a:lstStyle/>
           <a:p>
-            <a:pPr indent="0" marL="0">
+            <a:pPr marL="0" indent="0">
               <a:buNone/>
             </a:pPr>
             <a:r>
@@ -4064,7 +3997,7 @@
           <a:bodyPr wrap="square" lIns="0" tIns="0" rIns="0" bIns="0" rtlCol="0" anchor="ctr"/>
           <a:lstStyle/>
           <a:p>
-            <a:pPr indent="0" marL="0">
+            <a:pPr marL="0" indent="0">
               <a:buNone/>
             </a:pPr>
             <a:r>
@@ -4105,13 +4038,20 @@
             <a:prstDash val="solid"/>
           </a:ln>
           <a:effectLst>
-            <a:outerShdw sx="100000" sy="100000" kx="0" ky="0" algn="bl" rotWithShape="0" blurRad="101600" dist="25400" dir="5400000">
+            <a:outerShdw blurRad="101600" dist="25400" dir="5400000" algn="bl" rotWithShape="0">
               <a:srgbClr val="000000">
                 <a:alpha val="8000"/>
               </a:srgbClr>
             </a:outerShdw>
           </a:effectLst>
         </p:spPr>
+        <p:txBody>
+          <a:bodyPr/>
+          <a:lstStyle/>
+          <a:p>
+            <a:endParaRPr lang="en-US"/>
+          </a:p>
+        </p:txBody>
       </p:sp>
       <p:sp>
         <p:nvSpPr>
@@ -4137,17 +4077,24 @@
             <a:prstDash val="solid"/>
           </a:ln>
         </p:spPr>
+        <p:txBody>
+          <a:bodyPr/>
+          <a:lstStyle/>
+          <a:p>
+            <a:endParaRPr lang="en-US"/>
+          </a:p>
+        </p:txBody>
       </p:sp>
       <p:pic>
         <p:nvPicPr>
-          <p:cNvPr id="7" name="Image 0" descr="FiLayers">    </p:cNvPr>
+          <p:cNvPr id="7" name="Image 0" descr="FiLayers"/>
           <p:cNvPicPr>
             <a:picLocks noChangeAspect="1"/>
           </p:cNvPicPr>
           <p:nvPr/>
         </p:nvPicPr>
         <p:blipFill>
-          <a:blip r:embed="rId1"/>
+          <a:blip r:embed="rId3"/>
           <a:stretch>
             <a:fillRect/>
           </a:stretch>
@@ -4183,7 +4130,7 @@
           <a:bodyPr wrap="square" lIns="0" tIns="0" rIns="0" bIns="0" rtlCol="0" anchor="ctr"/>
           <a:lstStyle/>
           <a:p>
-            <a:pPr indent="0" marL="0">
+            <a:pPr marL="0" indent="0">
               <a:buNone/>
             </a:pPr>
             <a:r>
@@ -4222,7 +4169,7 @@
           <a:bodyPr wrap="square" lIns="0" tIns="0" rIns="0" bIns="0" rtlCol="0" anchor="t"/>
           <a:lstStyle/>
           <a:p>
-            <a:pPr indent="0" marL="0">
+            <a:pPr marL="0" indent="0">
               <a:buNone/>
             </a:pPr>
             <a:r>
@@ -4263,13 +4210,20 @@
             <a:prstDash val="solid"/>
           </a:ln>
           <a:effectLst>
-            <a:outerShdw sx="100000" sy="100000" kx="0" ky="0" algn="bl" rotWithShape="0" blurRad="101600" dist="25400" dir="5400000">
+            <a:outerShdw blurRad="101600" dist="25400" dir="5400000" algn="bl" rotWithShape="0">
               <a:srgbClr val="000000">
                 <a:alpha val="8000"/>
               </a:srgbClr>
             </a:outerShdw>
           </a:effectLst>
         </p:spPr>
+        <p:txBody>
+          <a:bodyPr/>
+          <a:lstStyle/>
+          <a:p>
+            <a:endParaRPr lang="en-US"/>
+          </a:p>
+        </p:txBody>
       </p:sp>
       <p:sp>
         <p:nvSpPr>
@@ -4295,17 +4249,24 @@
             <a:prstDash val="solid"/>
           </a:ln>
         </p:spPr>
+        <p:txBody>
+          <a:bodyPr/>
+          <a:lstStyle/>
+          <a:p>
+            <a:endParaRPr lang="en-US"/>
+          </a:p>
+        </p:txBody>
       </p:sp>
       <p:pic>
         <p:nvPicPr>
-          <p:cNvPr id="12" name="Image 1" descr="FiLock">    </p:cNvPr>
+          <p:cNvPr id="12" name="Image 1" descr="FiLock"/>
           <p:cNvPicPr>
             <a:picLocks noChangeAspect="1"/>
           </p:cNvPicPr>
           <p:nvPr/>
         </p:nvPicPr>
         <p:blipFill>
-          <a:blip r:embed="rId2"/>
+          <a:blip r:embed="rId4"/>
           <a:stretch>
             <a:fillRect/>
           </a:stretch>
@@ -4341,7 +4302,7 @@
           <a:bodyPr wrap="square" lIns="0" tIns="0" rIns="0" bIns="0" rtlCol="0" anchor="ctr"/>
           <a:lstStyle/>
           <a:p>
-            <a:pPr indent="0" marL="0">
+            <a:pPr marL="0" indent="0">
               <a:buNone/>
             </a:pPr>
             <a:r>
@@ -4380,7 +4341,7 @@
           <a:bodyPr wrap="square" lIns="0" tIns="0" rIns="0" bIns="0" rtlCol="0" anchor="t"/>
           <a:lstStyle/>
           <a:p>
-            <a:pPr indent="0" marL="0">
+            <a:pPr marL="0" indent="0">
               <a:buNone/>
             </a:pPr>
             <a:r>
@@ -4421,13 +4382,20 @@
             <a:prstDash val="solid"/>
           </a:ln>
           <a:effectLst>
-            <a:outerShdw sx="100000" sy="100000" kx="0" ky="0" algn="bl" rotWithShape="0" blurRad="101600" dist="25400" dir="5400000">
+            <a:outerShdw blurRad="101600" dist="25400" dir="5400000" algn="bl" rotWithShape="0">
               <a:srgbClr val="000000">
                 <a:alpha val="8000"/>
               </a:srgbClr>
             </a:outerShdw>
           </a:effectLst>
         </p:spPr>
+        <p:txBody>
+          <a:bodyPr/>
+          <a:lstStyle/>
+          <a:p>
+            <a:endParaRPr lang="en-US"/>
+          </a:p>
+        </p:txBody>
       </p:sp>
       <p:sp>
         <p:nvSpPr>
@@ -4453,17 +4421,24 @@
             <a:prstDash val="solid"/>
           </a:ln>
         </p:spPr>
+        <p:txBody>
+          <a:bodyPr/>
+          <a:lstStyle/>
+          <a:p>
+            <a:endParaRPr lang="en-US"/>
+          </a:p>
+        </p:txBody>
       </p:sp>
       <p:pic>
         <p:nvPicPr>
-          <p:cNvPr id="17" name="Image 2" descr="FiGlobe">    </p:cNvPr>
+          <p:cNvPr id="17" name="Image 2" descr="FiGlobe"/>
           <p:cNvPicPr>
             <a:picLocks noChangeAspect="1"/>
           </p:cNvPicPr>
           <p:nvPr/>
         </p:nvPicPr>
         <p:blipFill>
-          <a:blip r:embed="rId3"/>
+          <a:blip r:embed="rId5"/>
           <a:stretch>
             <a:fillRect/>
           </a:stretch>
@@ -4499,7 +4474,7 @@
           <a:bodyPr wrap="square" lIns="0" tIns="0" rIns="0" bIns="0" rtlCol="0" anchor="ctr"/>
           <a:lstStyle/>
           <a:p>
-            <a:pPr indent="0" marL="0">
+            <a:pPr marL="0" indent="0">
               <a:buNone/>
             </a:pPr>
             <a:r>
@@ -4538,7 +4513,7 @@
           <a:bodyPr wrap="square" lIns="0" tIns="0" rIns="0" bIns="0" rtlCol="0" anchor="t"/>
           <a:lstStyle/>
           <a:p>
-            <a:pPr indent="0" marL="0">
+            <a:pPr marL="0" indent="0">
               <a:buNone/>
             </a:pPr>
             <a:r>
@@ -4579,13 +4554,20 @@
             <a:prstDash val="solid"/>
           </a:ln>
           <a:effectLst>
-            <a:outerShdw sx="100000" sy="100000" kx="0" ky="0" algn="bl" rotWithShape="0" blurRad="101600" dist="25400" dir="5400000">
+            <a:outerShdw blurRad="101600" dist="25400" dir="5400000" algn="bl" rotWithShape="0">
               <a:srgbClr val="000000">
                 <a:alpha val="8000"/>
               </a:srgbClr>
             </a:outerShdw>
           </a:effectLst>
         </p:spPr>
+        <p:txBody>
+          <a:bodyPr/>
+          <a:lstStyle/>
+          <a:p>
+            <a:endParaRPr lang="en-US"/>
+          </a:p>
+        </p:txBody>
       </p:sp>
       <p:sp>
         <p:nvSpPr>
@@ -4611,17 +4593,24 @@
             <a:prstDash val="solid"/>
           </a:ln>
         </p:spPr>
+        <p:txBody>
+          <a:bodyPr/>
+          <a:lstStyle/>
+          <a:p>
+            <a:endParaRPr lang="en-US"/>
+          </a:p>
+        </p:txBody>
       </p:sp>
       <p:pic>
         <p:nvPicPr>
-          <p:cNvPr id="22" name="Image 3" descr="FiBarChart2">    </p:cNvPr>
+          <p:cNvPr id="22" name="Image 3" descr="FiBarChart2"/>
           <p:cNvPicPr>
             <a:picLocks noChangeAspect="1"/>
           </p:cNvPicPr>
           <p:nvPr/>
         </p:nvPicPr>
         <p:blipFill>
-          <a:blip r:embed="rId4"/>
+          <a:blip r:embed="rId6"/>
           <a:stretch>
             <a:fillRect/>
           </a:stretch>
@@ -4657,7 +4646,7 @@
           <a:bodyPr wrap="square" lIns="0" tIns="0" rIns="0" bIns="0" rtlCol="0" anchor="ctr"/>
           <a:lstStyle/>
           <a:p>
-            <a:pPr indent="0" marL="0">
+            <a:pPr marL="0" indent="0">
               <a:buNone/>
             </a:pPr>
             <a:r>
@@ -4696,7 +4685,7 @@
           <a:bodyPr wrap="square" lIns="0" tIns="0" rIns="0" bIns="0" rtlCol="0" anchor="t"/>
           <a:lstStyle/>
           <a:p>
-            <a:pPr indent="0" marL="0">
+            <a:pPr marL="0" indent="0">
               <a:buNone/>
             </a:pPr>
             <a:r>
@@ -4737,13 +4726,20 @@
             <a:prstDash val="solid"/>
           </a:ln>
           <a:effectLst>
-            <a:outerShdw sx="100000" sy="100000" kx="0" ky="0" algn="bl" rotWithShape="0" blurRad="101600" dist="25400" dir="5400000">
+            <a:outerShdw blurRad="101600" dist="25400" dir="5400000" algn="bl" rotWithShape="0">
               <a:srgbClr val="000000">
                 <a:alpha val="8000"/>
               </a:srgbClr>
             </a:outerShdw>
           </a:effectLst>
         </p:spPr>
+        <p:txBody>
+          <a:bodyPr/>
+          <a:lstStyle/>
+          <a:p>
+            <a:endParaRPr lang="en-US"/>
+          </a:p>
+        </p:txBody>
       </p:sp>
       <p:sp>
         <p:nvSpPr>
@@ -4769,17 +4765,24 @@
             <a:prstDash val="solid"/>
           </a:ln>
         </p:spPr>
+        <p:txBody>
+          <a:bodyPr/>
+          <a:lstStyle/>
+          <a:p>
+            <a:endParaRPr lang="en-US"/>
+          </a:p>
+        </p:txBody>
       </p:sp>
       <p:pic>
         <p:nvPicPr>
-          <p:cNvPr id="27" name="Image 4" descr="FiCloud">    </p:cNvPr>
+          <p:cNvPr id="27" name="Image 4" descr="FiCloud"/>
           <p:cNvPicPr>
             <a:picLocks noChangeAspect="1"/>
           </p:cNvPicPr>
           <p:nvPr/>
         </p:nvPicPr>
         <p:blipFill>
-          <a:blip r:embed="rId5"/>
+          <a:blip r:embed="rId7"/>
           <a:stretch>
             <a:fillRect/>
           </a:stretch>
@@ -4815,7 +4818,7 @@
           <a:bodyPr wrap="square" lIns="0" tIns="0" rIns="0" bIns="0" rtlCol="0" anchor="ctr"/>
           <a:lstStyle/>
           <a:p>
-            <a:pPr indent="0" marL="0">
+            <a:pPr marL="0" indent="0">
               <a:buNone/>
             </a:pPr>
             <a:r>
@@ -4854,7 +4857,7 @@
           <a:bodyPr wrap="square" lIns="0" tIns="0" rIns="0" bIns="0" rtlCol="0" anchor="t"/>
           <a:lstStyle/>
           <a:p>
-            <a:pPr indent="0" marL="0">
+            <a:pPr marL="0" indent="0">
               <a:buNone/>
             </a:pPr>
             <a:r>
@@ -4895,13 +4898,20 @@
             <a:prstDash val="solid"/>
           </a:ln>
           <a:effectLst>
-            <a:outerShdw sx="100000" sy="100000" kx="0" ky="0" algn="bl" rotWithShape="0" blurRad="101600" dist="25400" dir="5400000">
+            <a:outerShdw blurRad="101600" dist="25400" dir="5400000" algn="bl" rotWithShape="0">
               <a:srgbClr val="000000">
                 <a:alpha val="8000"/>
               </a:srgbClr>
             </a:outerShdw>
           </a:effectLst>
         </p:spPr>
+        <p:txBody>
+          <a:bodyPr/>
+          <a:lstStyle/>
+          <a:p>
+            <a:endParaRPr lang="en-US"/>
+          </a:p>
+        </p:txBody>
       </p:sp>
       <p:sp>
         <p:nvSpPr>
@@ -4927,17 +4937,24 @@
             <a:prstDash val="solid"/>
           </a:ln>
         </p:spPr>
+        <p:txBody>
+          <a:bodyPr/>
+          <a:lstStyle/>
+          <a:p>
+            <a:endParaRPr lang="en-US"/>
+          </a:p>
+        </p:txBody>
       </p:sp>
       <p:pic>
         <p:nvPicPr>
-          <p:cNvPr id="32" name="Image 5" descr="FiRepeat">    </p:cNvPr>
+          <p:cNvPr id="32" name="Image 5" descr="FiRepeat"/>
           <p:cNvPicPr>
             <a:picLocks noChangeAspect="1"/>
           </p:cNvPicPr>
           <p:nvPr/>
         </p:nvPicPr>
         <p:blipFill>
-          <a:blip r:embed="rId6"/>
+          <a:blip r:embed="rId8"/>
           <a:stretch>
             <a:fillRect/>
           </a:stretch>
@@ -4973,7 +4990,7 @@
           <a:bodyPr wrap="square" lIns="0" tIns="0" rIns="0" bIns="0" rtlCol="0" anchor="ctr"/>
           <a:lstStyle/>
           <a:p>
-            <a:pPr indent="0" marL="0">
+            <a:pPr marL="0" indent="0">
               <a:buNone/>
             </a:pPr>
             <a:r>
@@ -5012,7 +5029,7 @@
           <a:bodyPr wrap="square" lIns="0" tIns="0" rIns="0" bIns="0" rtlCol="0" anchor="t"/>
           <a:lstStyle/>
           <a:p>
-            <a:pPr indent="0" marL="0">
+            <a:pPr marL="0" indent="0">
               <a:buNone/>
             </a:pPr>
             <a:r>
@@ -5043,6 +5060,7 @@
         <a:solidFill>
           <a:srgbClr val="FFFFFF"/>
         </a:solidFill>
+        <a:effectLst/>
       </p:bgPr>
     </p:bg>
     <p:spTree>
@@ -5080,7 +5098,7 @@
           <a:bodyPr wrap="square" lIns="0" tIns="0" rIns="0" bIns="0" rtlCol="0" anchor="ctr"/>
           <a:lstStyle/>
           <a:p>
-            <a:pPr indent="0" marL="0">
+            <a:pPr marL="0" indent="0">
               <a:buNone/>
             </a:pPr>
             <a:r>
@@ -5119,7 +5137,7 @@
           <a:bodyPr wrap="square" lIns="0" tIns="0" rIns="0" bIns="0" rtlCol="0" anchor="ctr"/>
           <a:lstStyle/>
           <a:p>
-            <a:pPr indent="0" marL="0">
+            <a:pPr marL="0" indent="0">
               <a:buNone/>
             </a:pPr>
             <a:r>
@@ -5158,6 +5176,13 @@
             <a:prstDash val="solid"/>
           </a:ln>
         </p:spPr>
+        <p:txBody>
+          <a:bodyPr/>
+          <a:lstStyle/>
+          <a:p>
+            <a:endParaRPr lang="en-US"/>
+          </a:p>
+        </p:txBody>
       </p:sp>
       <p:sp>
         <p:nvSpPr>
@@ -5180,7 +5205,7 @@
           <a:bodyPr wrap="square" lIns="0" tIns="0" rIns="0" bIns="0" rtlCol="0" anchor="ctr"/>
           <a:lstStyle/>
           <a:p>
-            <a:pPr algn="ctr" indent="0" marL="0">
+            <a:pPr marL="0" indent="0" algn="ctr">
               <a:buNone/>
             </a:pPr>
             <a:r>
@@ -5216,7 +5241,7 @@
           <a:bodyPr wrap="square" lIns="0" tIns="0" rIns="0" bIns="0" rtlCol="0" anchor="ctr"/>
           <a:lstStyle/>
           <a:p>
-            <a:pPr indent="0" marL="0">
+            <a:pPr marL="0" indent="0">
               <a:buNone/>
             </a:pPr>
             <a:r>
@@ -5230,7 +5255,7 @@
             <a:endParaRPr lang="en-US" sz="1900" dirty="0"/>
           </a:p>
           <a:p>
-            <a:pPr indent="0" marL="0">
+            <a:pPr marL="0" indent="0">
               <a:buNone/>
             </a:pPr>
             <a:r>
@@ -5269,6 +5294,13 @@
             <a:prstDash val="solid"/>
           </a:ln>
         </p:spPr>
+        <p:txBody>
+          <a:bodyPr/>
+          <a:lstStyle/>
+          <a:p>
+            <a:endParaRPr lang="en-US"/>
+          </a:p>
+        </p:txBody>
       </p:sp>
       <p:sp>
         <p:nvSpPr>
@@ -5291,7 +5323,7 @@
           <a:bodyPr wrap="square" lIns="0" tIns="0" rIns="0" bIns="0" rtlCol="0" anchor="ctr"/>
           <a:lstStyle/>
           <a:p>
-            <a:pPr algn="ctr" indent="0" marL="0">
+            <a:pPr marL="0" indent="0" algn="ctr">
               <a:buNone/>
             </a:pPr>
             <a:r>
@@ -5327,7 +5359,7 @@
           <a:bodyPr wrap="square" lIns="0" tIns="0" rIns="0" bIns="0" rtlCol="0" anchor="ctr"/>
           <a:lstStyle/>
           <a:p>
-            <a:pPr indent="0" marL="0">
+            <a:pPr marL="0" indent="0">
               <a:buNone/>
             </a:pPr>
             <a:r>
@@ -5341,7 +5373,7 @@
             <a:endParaRPr lang="en-US" sz="1900" dirty="0"/>
           </a:p>
           <a:p>
-            <a:pPr indent="0" marL="0">
+            <a:pPr marL="0" indent="0">
               <a:buNone/>
             </a:pPr>
             <a:r>
@@ -5380,6 +5412,13 @@
             <a:prstDash val="solid"/>
           </a:ln>
         </p:spPr>
+        <p:txBody>
+          <a:bodyPr/>
+          <a:lstStyle/>
+          <a:p>
+            <a:endParaRPr lang="en-US"/>
+          </a:p>
+        </p:txBody>
       </p:sp>
       <p:sp>
         <p:nvSpPr>
@@ -5402,7 +5441,7 @@
           <a:bodyPr wrap="square" lIns="0" tIns="0" rIns="0" bIns="0" rtlCol="0" anchor="ctr"/>
           <a:lstStyle/>
           <a:p>
-            <a:pPr algn="ctr" indent="0" marL="0">
+            <a:pPr marL="0" indent="0" algn="ctr">
               <a:buNone/>
             </a:pPr>
             <a:r>
@@ -5438,7 +5477,7 @@
           <a:bodyPr wrap="square" lIns="0" tIns="0" rIns="0" bIns="0" rtlCol="0" anchor="ctr"/>
           <a:lstStyle/>
           <a:p>
-            <a:pPr indent="0" marL="0">
+            <a:pPr marL="0" indent="0">
               <a:buNone/>
             </a:pPr>
             <a:r>
@@ -5452,7 +5491,7 @@
             <a:endParaRPr lang="en-US" sz="1900" dirty="0"/>
           </a:p>
           <a:p>
-            <a:pPr indent="0" marL="0">
+            <a:pPr marL="0" indent="0">
               <a:buNone/>
             </a:pPr>
             <a:r>
@@ -5491,6 +5530,13 @@
             <a:prstDash val="solid"/>
           </a:ln>
         </p:spPr>
+        <p:txBody>
+          <a:bodyPr/>
+          <a:lstStyle/>
+          <a:p>
+            <a:endParaRPr lang="en-US"/>
+          </a:p>
+        </p:txBody>
       </p:sp>
       <p:sp>
         <p:nvSpPr>
@@ -5513,7 +5559,7 @@
           <a:bodyPr wrap="square" lIns="0" tIns="0" rIns="0" bIns="0" rtlCol="0" anchor="ctr"/>
           <a:lstStyle/>
           <a:p>
-            <a:pPr algn="ctr" indent="0" marL="0">
+            <a:pPr marL="0" indent="0" algn="ctr">
               <a:buNone/>
             </a:pPr>
             <a:r>
@@ -5549,7 +5595,7 @@
           <a:bodyPr wrap="square" lIns="0" tIns="0" rIns="0" bIns="0" rtlCol="0" anchor="ctr"/>
           <a:lstStyle/>
           <a:p>
-            <a:pPr indent="0" marL="0">
+            <a:pPr marL="0" indent="0">
               <a:buNone/>
             </a:pPr>
             <a:r>
@@ -5563,7 +5609,7 @@
             <a:endParaRPr lang="en-US" sz="1900" dirty="0"/>
           </a:p>
           <a:p>
-            <a:pPr indent="0" marL="0">
+            <a:pPr marL="0" indent="0">
               <a:buNone/>
             </a:pPr>
             <a:r>
@@ -5602,6 +5648,13 @@
             <a:prstDash val="solid"/>
           </a:ln>
         </p:spPr>
+        <p:txBody>
+          <a:bodyPr/>
+          <a:lstStyle/>
+          <a:p>
+            <a:endParaRPr lang="en-US"/>
+          </a:p>
+        </p:txBody>
       </p:sp>
       <p:sp>
         <p:nvSpPr>
@@ -5624,7 +5677,7 @@
           <a:bodyPr wrap="square" lIns="0" tIns="0" rIns="0" bIns="0" rtlCol="0" anchor="ctr"/>
           <a:lstStyle/>
           <a:p>
-            <a:pPr algn="ctr" indent="0" marL="0">
+            <a:pPr marL="0" indent="0" algn="ctr">
               <a:buNone/>
             </a:pPr>
             <a:r>
@@ -5660,7 +5713,7 @@
           <a:bodyPr wrap="square" lIns="0" tIns="0" rIns="0" bIns="0" rtlCol="0" anchor="ctr"/>
           <a:lstStyle/>
           <a:p>
-            <a:pPr indent="0" marL="0">
+            <a:pPr marL="0" indent="0">
               <a:buNone/>
             </a:pPr>
             <a:r>
@@ -5674,7 +5727,7 @@
             <a:endParaRPr lang="en-US" sz="1900" dirty="0"/>
           </a:p>
           <a:p>
-            <a:pPr indent="0" marL="0">
+            <a:pPr marL="0" indent="0">
               <a:buNone/>
             </a:pPr>
             <a:r>
@@ -5691,14 +5744,14 @@
       </p:sp>
       <p:pic>
         <p:nvPicPr>
-          <p:cNvPr id="20" name="Dashboard screenshot" descr="Dashboard screenshot">    </p:cNvPr>
+          <p:cNvPr id="20" name="Dashboard screenshot" descr="Dashboard screenshot"/>
           <p:cNvPicPr>
             <a:picLocks noChangeAspect="1"/>
           </p:cNvPicPr>
           <p:nvPr/>
         </p:nvPicPr>
         <p:blipFill>
-          <a:blip r:embed="rId1"/>
+          <a:blip r:embed="rId3"/>
           <a:stretch>
             <a:fillRect/>
           </a:stretch>
@@ -5712,7 +5765,7 @@
             <a:avLst/>
           </a:prstGeom>
           <a:effectLst>
-            <a:outerShdw sx="100000" sy="100000" kx="0" ky="0" algn="bl" rotWithShape="0" blurRad="152400" dist="38100" dir="5400000">
+            <a:outerShdw blurRad="152400" dist="38100" dir="5400000" algn="bl" rotWithShape="0">
               <a:srgbClr val="000000">
                 <a:alpha val="25000"/>
               </a:srgbClr>
@@ -5736,6 +5789,7 @@
         <a:solidFill>
           <a:srgbClr val="FFFFFF"/>
         </a:solidFill>
+        <a:effectLst/>
       </p:bgPr>
     </p:bg>
     <p:spTree>
@@ -5773,7 +5827,7 @@
           <a:bodyPr wrap="square" lIns="0" tIns="0" rIns="0" bIns="0" rtlCol="0" anchor="ctr"/>
           <a:lstStyle/>
           <a:p>
-            <a:pPr indent="0" marL="0">
+            <a:pPr marL="0" indent="0">
               <a:buNone/>
             </a:pPr>
             <a:r>
@@ -5812,7 +5866,7 @@
           <a:bodyPr wrap="square" lIns="0" tIns="0" rIns="0" bIns="0" rtlCol="0" anchor="ctr"/>
           <a:lstStyle/>
           <a:p>
-            <a:pPr indent="0" marL="0">
+            <a:pPr marL="0" indent="0">
               <a:buNone/>
             </a:pPr>
             <a:r>
@@ -5829,7 +5883,7 @@
       </p:sp>
       <p:graphicFrame>
         <p:nvGraphicFramePr>
-          <p:cNvPr id="5" name="Chart 0" descr=""/>
+          <p:cNvPr id="5" name="Chart 0"/>
           <p:cNvGraphicFramePr/>
           <p:nvPr/>
         </p:nvGraphicFramePr>
@@ -5837,9 +5891,9 @@
           <a:off x="548640" y="1371600"/>
           <a:ext cx="4754880" cy="4480560"/>
         </p:xfrm>
-        <a:graphic xmlns:a="http://schemas.openxmlformats.org/drawingml/2006/main">
+        <a:graphic>
           <a:graphicData uri="http://schemas.openxmlformats.org/drawingml/2006/chart">
-            <c:chart xmlns:c="http://schemas.openxmlformats.org/drawingml/2006/chart" r:id="rId1"/>
+            <c:chart xmlns:c="http://schemas.openxmlformats.org/drawingml/2006/chart" xmlns:r="http://schemas.openxmlformats.org/officeDocument/2006/relationships" r:id="rId3"/>
           </a:graphicData>
         </a:graphic>
       </p:graphicFrame>
@@ -5869,13 +5923,20 @@
             <a:prstDash val="solid"/>
           </a:ln>
           <a:effectLst>
-            <a:outerShdw sx="100000" sy="100000" kx="0" ky="0" algn="bl" rotWithShape="0" blurRad="101600" dist="25400" dir="5400000">
+            <a:outerShdw blurRad="101600" dist="25400" dir="5400000" algn="bl" rotWithShape="0">
               <a:srgbClr val="000000">
                 <a:alpha val="8000"/>
               </a:srgbClr>
             </a:outerShdw>
           </a:effectLst>
         </p:spPr>
+        <p:txBody>
+          <a:bodyPr/>
+          <a:lstStyle/>
+          <a:p>
+            <a:endParaRPr lang="en-US"/>
+          </a:p>
+        </p:txBody>
       </p:sp>
       <p:sp>
         <p:nvSpPr>
@@ -5901,6 +5962,13 @@
             <a:prstDash val="solid"/>
           </a:ln>
         </p:spPr>
+        <p:txBody>
+          <a:bodyPr/>
+          <a:lstStyle/>
+          <a:p>
+            <a:endParaRPr lang="en-US"/>
+          </a:p>
+        </p:txBody>
       </p:sp>
       <p:sp>
         <p:nvSpPr>
@@ -5923,7 +5991,7 @@
           <a:bodyPr wrap="square" lIns="0" tIns="0" rIns="0" bIns="0" rtlCol="0" anchor="ctr"/>
           <a:lstStyle/>
           <a:p>
-            <a:pPr indent="0" marL="0">
+            <a:pPr marL="0" indent="0">
               <a:buNone/>
             </a:pPr>
             <a:r>
@@ -5937,7 +6005,7 @@
             <a:endParaRPr lang="en-US" sz="1800" dirty="0"/>
           </a:p>
           <a:p>
-            <a:pPr indent="0" marL="0">
+            <a:pPr marL="0" indent="0">
               <a:buNone/>
             </a:pPr>
             <a:r>
@@ -5978,13 +6046,20 @@
             <a:prstDash val="solid"/>
           </a:ln>
           <a:effectLst>
-            <a:outerShdw sx="100000" sy="100000" kx="0" ky="0" algn="bl" rotWithShape="0" blurRad="101600" dist="25400" dir="5400000">
+            <a:outerShdw blurRad="101600" dist="25400" dir="5400000" algn="bl" rotWithShape="0">
               <a:srgbClr val="000000">
                 <a:alpha val="8000"/>
               </a:srgbClr>
             </a:outerShdw>
           </a:effectLst>
         </p:spPr>
+        <p:txBody>
+          <a:bodyPr/>
+          <a:lstStyle/>
+          <a:p>
+            <a:endParaRPr lang="en-US"/>
+          </a:p>
+        </p:txBody>
       </p:sp>
       <p:sp>
         <p:nvSpPr>
@@ -6010,6 +6085,13 @@
             <a:prstDash val="solid"/>
           </a:ln>
         </p:spPr>
+        <p:txBody>
+          <a:bodyPr/>
+          <a:lstStyle/>
+          <a:p>
+            <a:endParaRPr lang="en-US"/>
+          </a:p>
+        </p:txBody>
       </p:sp>
       <p:sp>
         <p:nvSpPr>
@@ -6032,7 +6114,7 @@
           <a:bodyPr wrap="square" lIns="0" tIns="0" rIns="0" bIns="0" rtlCol="0" anchor="ctr"/>
           <a:lstStyle/>
           <a:p>
-            <a:pPr indent="0" marL="0">
+            <a:pPr marL="0" indent="0">
               <a:buNone/>
             </a:pPr>
             <a:r>
@@ -6046,7 +6128,7 @@
             <a:endParaRPr lang="en-US" sz="1800" dirty="0"/>
           </a:p>
           <a:p>
-            <a:pPr indent="0" marL="0">
+            <a:pPr marL="0" indent="0">
               <a:buNone/>
             </a:pPr>
             <a:r>
@@ -6087,13 +6169,20 @@
             <a:prstDash val="solid"/>
           </a:ln>
           <a:effectLst>
-            <a:outerShdw sx="100000" sy="100000" kx="0" ky="0" algn="bl" rotWithShape="0" blurRad="101600" dist="25400" dir="5400000">
+            <a:outerShdw blurRad="101600" dist="25400" dir="5400000" algn="bl" rotWithShape="0">
               <a:srgbClr val="000000">
                 <a:alpha val="8000"/>
               </a:srgbClr>
             </a:outerShdw>
           </a:effectLst>
         </p:spPr>
+        <p:txBody>
+          <a:bodyPr/>
+          <a:lstStyle/>
+          <a:p>
+            <a:endParaRPr lang="en-US"/>
+          </a:p>
+        </p:txBody>
       </p:sp>
       <p:sp>
         <p:nvSpPr>
@@ -6119,6 +6208,13 @@
             <a:prstDash val="solid"/>
           </a:ln>
         </p:spPr>
+        <p:txBody>
+          <a:bodyPr/>
+          <a:lstStyle/>
+          <a:p>
+            <a:endParaRPr lang="en-US"/>
+          </a:p>
+        </p:txBody>
       </p:sp>
       <p:sp>
         <p:nvSpPr>
@@ -6141,7 +6237,7 @@
           <a:bodyPr wrap="square" lIns="0" tIns="0" rIns="0" bIns="0" rtlCol="0" anchor="ctr"/>
           <a:lstStyle/>
           <a:p>
-            <a:pPr indent="0" marL="0">
+            <a:pPr marL="0" indent="0">
               <a:buNone/>
             </a:pPr>
             <a:r>
@@ -6155,7 +6251,7 @@
             <a:endParaRPr lang="en-US" sz="1800" dirty="0"/>
           </a:p>
           <a:p>
-            <a:pPr indent="0" marL="0">
+            <a:pPr marL="0" indent="0">
               <a:buNone/>
             </a:pPr>
             <a:r>
@@ -6186,6 +6282,7 @@
         <a:solidFill>
           <a:srgbClr val="FFFFFF"/>
         </a:solidFill>
+        <a:effectLst/>
       </p:bgPr>
     </p:bg>
     <p:spTree>
@@ -6223,7 +6320,7 @@
           <a:bodyPr wrap="square" lIns="0" tIns="0" rIns="0" bIns="0" rtlCol="0" anchor="ctr"/>
           <a:lstStyle/>
           <a:p>
-            <a:pPr indent="0" marL="0">
+            <a:pPr marL="0" indent="0">
               <a:buNone/>
             </a:pPr>
             <a:r>
@@ -6262,7 +6359,7 @@
           <a:bodyPr wrap="square" lIns="0" tIns="0" rIns="0" bIns="0" rtlCol="0" anchor="ctr"/>
           <a:lstStyle/>
           <a:p>
-            <a:pPr indent="0" marL="0">
+            <a:pPr marL="0" indent="0">
               <a:buNone/>
             </a:pPr>
             <a:r>
@@ -6298,7 +6395,7 @@
           <a:bodyPr wrap="square" lIns="0" tIns="0" rIns="0" bIns="0" rtlCol="0" anchor="ctr"/>
           <a:lstStyle/>
           <a:p>
-            <a:pPr indent="0" marL="0">
+            <a:pPr marL="0" indent="0">
               <a:buNone/>
             </a:pPr>
             <a:r>
@@ -6431,7 +6528,7 @@
           <a:bodyPr wrap="square" lIns="0" tIns="0" rIns="0" bIns="0" rtlCol="0" anchor="ctr"/>
           <a:lstStyle/>
           <a:p>
-            <a:pPr indent="0" marL="0">
+            <a:pPr marL="0" indent="0">
               <a:buNone/>
             </a:pPr>
             <a:r>
@@ -6475,13 +6572,20 @@
             <a:prstDash val="solid"/>
           </a:ln>
           <a:effectLst>
-            <a:outerShdw sx="100000" sy="100000" kx="0" ky="0" algn="bl" rotWithShape="0" blurRad="101600" dist="25400" dir="5400000">
+            <a:outerShdw blurRad="101600" dist="25400" dir="5400000" algn="bl" rotWithShape="0">
               <a:srgbClr val="000000">
                 <a:alpha val="8000"/>
               </a:srgbClr>
             </a:outerShdw>
           </a:effectLst>
         </p:spPr>
+        <p:txBody>
+          <a:bodyPr/>
+          <a:lstStyle/>
+          <a:p>
+            <a:endParaRPr lang="en-US"/>
+          </a:p>
+        </p:txBody>
       </p:sp>
       <p:sp>
         <p:nvSpPr>
@@ -6504,7 +6608,7 @@
           <a:bodyPr wrap="square" lIns="0" tIns="0" rIns="0" bIns="0" rtlCol="0" anchor="ctr"/>
           <a:lstStyle/>
           <a:p>
-            <a:pPr indent="0" marL="0">
+            <a:pPr marL="0" indent="0">
               <a:buNone/>
             </a:pPr>
             <a:r>
@@ -6543,7 +6647,7 @@
           <a:bodyPr wrap="square" lIns="0" tIns="0" rIns="0" bIns="0" rtlCol="0" anchor="ctr"/>
           <a:lstStyle/>
           <a:p>
-            <a:pPr indent="0" marL="0">
+            <a:pPr marL="0" indent="0">
               <a:buNone/>
             </a:pPr>
             <a:r>
@@ -6584,13 +6688,20 @@
             <a:prstDash val="solid"/>
           </a:ln>
           <a:effectLst>
-            <a:outerShdw sx="100000" sy="100000" kx="0" ky="0" algn="bl" rotWithShape="0" blurRad="101600" dist="25400" dir="5400000">
+            <a:outerShdw blurRad="101600" dist="25400" dir="5400000" algn="bl" rotWithShape="0">
               <a:srgbClr val="000000">
                 <a:alpha val="8000"/>
               </a:srgbClr>
             </a:outerShdw>
           </a:effectLst>
         </p:spPr>
+        <p:txBody>
+          <a:bodyPr/>
+          <a:lstStyle/>
+          <a:p>
+            <a:endParaRPr lang="en-US"/>
+          </a:p>
+        </p:txBody>
       </p:sp>
       <p:sp>
         <p:nvSpPr>
@@ -6613,7 +6724,7 @@
           <a:bodyPr wrap="square" lIns="0" tIns="0" rIns="0" bIns="0" rtlCol="0" anchor="ctr"/>
           <a:lstStyle/>
           <a:p>
-            <a:pPr indent="0" marL="0">
+            <a:pPr marL="0" indent="0">
               <a:buNone/>
             </a:pPr>
             <a:r>
@@ -6652,7 +6763,7 @@
           <a:bodyPr wrap="square" lIns="0" tIns="0" rIns="0" bIns="0" rtlCol="0" anchor="ctr"/>
           <a:lstStyle/>
           <a:p>
-            <a:pPr indent="0" marL="0">
+            <a:pPr marL="0" indent="0">
               <a:buNone/>
             </a:pPr>
             <a:r>
@@ -6693,13 +6804,20 @@
             <a:prstDash val="solid"/>
           </a:ln>
           <a:effectLst>
-            <a:outerShdw sx="100000" sy="100000" kx="0" ky="0" algn="bl" rotWithShape="0" blurRad="101600" dist="25400" dir="5400000">
+            <a:outerShdw blurRad="101600" dist="25400" dir="5400000" algn="bl" rotWithShape="0">
               <a:srgbClr val="000000">
                 <a:alpha val="8000"/>
               </a:srgbClr>
             </a:outerShdw>
           </a:effectLst>
         </p:spPr>
+        <p:txBody>
+          <a:bodyPr/>
+          <a:lstStyle/>
+          <a:p>
+            <a:endParaRPr lang="en-US"/>
+          </a:p>
+        </p:txBody>
       </p:sp>
       <p:sp>
         <p:nvSpPr>
@@ -6722,7 +6840,7 @@
           <a:bodyPr wrap="square" lIns="0" tIns="0" rIns="0" bIns="0" rtlCol="0" anchor="ctr"/>
           <a:lstStyle/>
           <a:p>
-            <a:pPr indent="0" marL="0">
+            <a:pPr marL="0" indent="0">
               <a:buNone/>
             </a:pPr>
             <a:r>
@@ -6761,7 +6879,7 @@
           <a:bodyPr wrap="square" lIns="0" tIns="0" rIns="0" bIns="0" rtlCol="0" anchor="ctr"/>
           <a:lstStyle/>
           <a:p>
-            <a:pPr indent="0" marL="0">
+            <a:pPr marL="0" indent="0">
               <a:buNone/>
             </a:pPr>
             <a:r>
@@ -6802,13 +6920,20 @@
             <a:prstDash val="solid"/>
           </a:ln>
           <a:effectLst>
-            <a:outerShdw sx="100000" sy="100000" kx="0" ky="0" algn="bl" rotWithShape="0" blurRad="101600" dist="25400" dir="5400000">
+            <a:outerShdw blurRad="101600" dist="25400" dir="5400000" algn="bl" rotWithShape="0">
               <a:srgbClr val="000000">
                 <a:alpha val="8000"/>
               </a:srgbClr>
             </a:outerShdw>
           </a:effectLst>
         </p:spPr>
+        <p:txBody>
+          <a:bodyPr/>
+          <a:lstStyle/>
+          <a:p>
+            <a:endParaRPr lang="en-US"/>
+          </a:p>
+        </p:txBody>
       </p:sp>
       <p:sp>
         <p:nvSpPr>
@@ -6831,7 +6956,7 @@
           <a:bodyPr wrap="square" lIns="0" tIns="0" rIns="0" bIns="0" rtlCol="0" anchor="ctr"/>
           <a:lstStyle/>
           <a:p>
-            <a:pPr indent="0" marL="0">
+            <a:pPr marL="0" indent="0">
               <a:buNone/>
             </a:pPr>
             <a:r>
@@ -6870,7 +6995,7 @@
           <a:bodyPr wrap="square" lIns="0" tIns="0" rIns="0" bIns="0" rtlCol="0" anchor="ctr"/>
           <a:lstStyle/>
           <a:p>
-            <a:pPr indent="0" marL="0">
+            <a:pPr marL="0" indent="0">
               <a:buNone/>
             </a:pPr>
             <a:r>
@@ -6911,13 +7036,20 @@
             <a:prstDash val="solid"/>
           </a:ln>
           <a:effectLst>
-            <a:outerShdw sx="100000" sy="100000" kx="0" ky="0" algn="bl" rotWithShape="0" blurRad="101600" dist="25400" dir="5400000">
+            <a:outerShdw blurRad="101600" dist="25400" dir="5400000" algn="bl" rotWithShape="0">
               <a:srgbClr val="000000">
                 <a:alpha val="8000"/>
               </a:srgbClr>
             </a:outerShdw>
           </a:effectLst>
         </p:spPr>
+        <p:txBody>
+          <a:bodyPr/>
+          <a:lstStyle/>
+          <a:p>
+            <a:endParaRPr lang="en-US"/>
+          </a:p>
+        </p:txBody>
       </p:sp>
       <p:sp>
         <p:nvSpPr>
@@ -6940,7 +7072,7 @@
           <a:bodyPr wrap="square" lIns="0" tIns="0" rIns="0" bIns="0" rtlCol="0" anchor="ctr"/>
           <a:lstStyle/>
           <a:p>
-            <a:pPr indent="0" marL="0">
+            <a:pPr marL="0" indent="0">
               <a:buNone/>
             </a:pPr>
             <a:r>
@@ -6979,7 +7111,7 @@
           <a:bodyPr wrap="square" lIns="0" tIns="0" rIns="0" bIns="0" rtlCol="0" anchor="ctr"/>
           <a:lstStyle/>
           <a:p>
-            <a:pPr indent="0" marL="0">
+            <a:pPr marL="0" indent="0">
               <a:buNone/>
             </a:pPr>
             <a:r>
@@ -7010,6 +7142,7 @@
         <a:solidFill>
           <a:srgbClr val="3A040B"/>
         </a:solidFill>
+        <a:effectLst/>
       </p:bgPr>
     </p:bg>
     <p:spTree>
@@ -7047,7 +7180,7 @@
           <a:bodyPr wrap="square" lIns="0" tIns="0" rIns="0" bIns="0" rtlCol="0" anchor="ctr"/>
           <a:lstStyle/>
           <a:p>
-            <a:pPr indent="0" marL="0">
+            <a:pPr marL="0" indent="0">
               <a:buNone/>
             </a:pPr>
             <a:r>
@@ -7086,7 +7219,7 @@
           <a:bodyPr wrap="square" lIns="0" tIns="0" rIns="0" bIns="0" rtlCol="0" anchor="ctr"/>
           <a:lstStyle/>
           <a:p>
-            <a:pPr indent="0" marL="0">
+            <a:pPr marL="0" indent="0">
               <a:buNone/>
             </a:pPr>
             <a:r>
@@ -7127,109 +7260,123 @@
             <a:prstDash val="solid"/>
           </a:ln>
         </p:spPr>
+        <p:txBody>
+          <a:bodyPr/>
+          <a:lstStyle/>
+          <a:p>
+            <a:endParaRPr lang="en-US"/>
+          </a:p>
+        </p:txBody>
+      </p:sp>
+      <p:sp>
+        <p:nvSpPr>
+          <p:cNvPr id="7" name="Text 3"/>
+          <p:cNvSpPr txBox="1"/>
+          <p:nvPr/>
+        </p:nvSpPr>
+        <p:spPr>
+          <a:xfrm>
+            <a:off x="8961120" y="3749040"/>
+            <a:ext cx="2377440" cy="2194560"/>
+          </a:xfrm>
+          <a:prstGeom prst="rect">
+            <a:avLst/>
+          </a:prstGeom>
+          <a:noFill/>
+          <a:ln/>
+        </p:spPr>
+        <p:txBody>
+          <a:bodyPr wrap="square" lIns="0" tIns="0" rIns="0" bIns="0" rtlCol="0" anchor="ctr"/>
+          <a:lstStyle/>
+          <a:p>
+            <a:pPr marL="0" indent="0">
+              <a:buNone/>
+            </a:pPr>
+            <a:r>
+              <a:rPr lang="en-US" sz="1500" dirty="0">
+                <a:solidFill>
+                  <a:srgbClr val="2B1A1D"/>
+                </a:solidFill>
+              </a:rPr>
+              <a:t>Raghuram Raichooti</a:t>
+            </a:r>
+            <a:endParaRPr lang="en-US" sz="1500" dirty="0"/>
+          </a:p>
+          <a:p>
+            <a:pPr marL="0" indent="0">
+              <a:buNone/>
+            </a:pPr>
+            <a:r>
+              <a:rPr lang="en-US" sz="1500" dirty="0">
+                <a:solidFill>
+                  <a:srgbClr val="2B1A1D"/>
+                </a:solidFill>
+              </a:rPr>
+              <a:t>Sankara Varaprasad</a:t>
+            </a:r>
+            <a:endParaRPr lang="en-US" sz="1500" dirty="0"/>
+          </a:p>
+          <a:p>
+            <a:pPr marL="0" indent="0">
+              <a:buNone/>
+            </a:pPr>
+            <a:r>
+              <a:rPr lang="en-US" sz="1500" dirty="0">
+                <a:solidFill>
+                  <a:srgbClr val="2B1A1D"/>
+                </a:solidFill>
+              </a:rPr>
+              <a:t>Swetha Katkkoori</a:t>
+            </a:r>
+            <a:endParaRPr lang="en-US" sz="1500" dirty="0"/>
+          </a:p>
+          <a:p>
+            <a:pPr marL="0" indent="0">
+              <a:buNone/>
+            </a:pPr>
+            <a:r>
+              <a:rPr lang="en-US" sz="1500" dirty="0">
+                <a:solidFill>
+                  <a:srgbClr val="2B1A1D"/>
+                </a:solidFill>
+              </a:rPr>
+              <a:t>Harshil Shah Parimal</a:t>
+            </a:r>
+            <a:endParaRPr lang="en-US" sz="1500" dirty="0"/>
+          </a:p>
+        </p:txBody>
       </p:sp>
       <p:pic>
         <p:nvPicPr>
-          <p:cNvPr id="6" name="Image 0" descr="Clopay Code Crafters team">    </p:cNvPr>
+          <p:cNvPr id="8" name="Picture 7">
+            <a:extLst>
+              <a:ext uri="{FF2B5EF4-FFF2-40B4-BE49-F238E27FC236}">
+                <a16:creationId xmlns:a16="http://schemas.microsoft.com/office/drawing/2014/main" id="{E757D85C-A828-452C-9639-6CCE25BEACC3}"/>
+              </a:ext>
+            </a:extLst>
+          </p:cNvPr>
           <p:cNvPicPr>
             <a:picLocks noChangeAspect="1"/>
           </p:cNvPicPr>
           <p:nvPr/>
         </p:nvPicPr>
         <p:blipFill>
-          <a:blip r:embed="rId1"/>
+          <a:blip r:embed="rId3"/>
+          <a:srcRect l="1292"/>
           <a:stretch>
             <a:fillRect/>
           </a:stretch>
         </p:blipFill>
         <p:spPr>
           <a:xfrm>
-            <a:off x="1280160" y="3657600"/>
-            <a:ext cx="6766560" cy="2492409"/>
+            <a:off x="1138687" y="3531223"/>
+            <a:ext cx="6861420" cy="2630194"/>
           </a:xfrm>
           <a:prstGeom prst="rect">
             <a:avLst/>
           </a:prstGeom>
         </p:spPr>
       </p:pic>
-      <p:sp>
-        <p:nvSpPr>
-          <p:cNvPr id="7" name="Text 3"/>
-          <p:cNvSpPr txBox="1"/>
-          <p:nvPr/>
-        </p:nvSpPr>
-        <p:spPr>
-          <a:xfrm>
-            <a:off x="8961120" y="3749040"/>
-            <a:ext cx="2377440" cy="2194560"/>
-          </a:xfrm>
-          <a:prstGeom prst="rect">
-            <a:avLst/>
-          </a:prstGeom>
-          <a:noFill/>
-          <a:ln/>
-        </p:spPr>
-        <p:txBody>
-          <a:bodyPr wrap="square" lIns="0" tIns="0" rIns="0" bIns="0" rtlCol="0" anchor="ctr"/>
-          <a:lstStyle/>
-          <a:p>
-            <a:pPr indent="0" marL="0">
-              <a:buNone/>
-            </a:pPr>
-            <a:r>
-              <a:rPr lang="en-US" sz="1500" dirty="0">
-                <a:solidFill>
-                  <a:srgbClr val="2B1A1D"/>
-                </a:solidFill>
-              </a:rPr>
-              <a:t>Raghuram Raichooti</a:t>
-            </a:r>
-            <a:endParaRPr lang="en-US" sz="1500" dirty="0"/>
-          </a:p>
-          <a:p>
-            <a:pPr indent="0" marL="0">
-              <a:buNone/>
-            </a:pPr>
-            <a:r>
-              <a:rPr lang="en-US" sz="1500" dirty="0">
-                <a:solidFill>
-                  <a:srgbClr val="2B1A1D"/>
-                </a:solidFill>
-              </a:rPr>
-              <a:t>Sankara Varaprasad</a:t>
-            </a:r>
-            <a:endParaRPr lang="en-US" sz="1500" dirty="0"/>
-          </a:p>
-          <a:p>
-            <a:pPr indent="0" marL="0">
-              <a:buNone/>
-            </a:pPr>
-            <a:r>
-              <a:rPr lang="en-US" sz="1500" dirty="0">
-                <a:solidFill>
-                  <a:srgbClr val="2B1A1D"/>
-                </a:solidFill>
-              </a:rPr>
-              <a:t>Swetha Katkkoori</a:t>
-            </a:r>
-            <a:endParaRPr lang="en-US" sz="1500" dirty="0"/>
-          </a:p>
-          <a:p>
-            <a:pPr indent="0" marL="0">
-              <a:buNone/>
-            </a:pPr>
-            <a:r>
-              <a:rPr lang="en-US" sz="1500" dirty="0">
-                <a:solidFill>
-                  <a:srgbClr val="2B1A1D"/>
-                </a:solidFill>
-              </a:rPr>
-              <a:t>Harshil Shah Parimal</a:t>
-            </a:r>
-            <a:endParaRPr lang="en-US" sz="1500" dirty="0"/>
-          </a:p>
-        </p:txBody>
-      </p:sp>
     </p:spTree>
   </p:cSld>
   <p:clrMapOvr>
@@ -7246,6 +7393,7 @@
         <a:solidFill>
           <a:srgbClr val="FFFFFF"/>
         </a:solidFill>
+        <a:effectLst/>
       </p:bgPr>
     </p:bg>
     <p:spTree>
@@ -7283,7 +7431,7 @@
           <a:bodyPr wrap="square" lIns="0" tIns="0" rIns="0" bIns="0" rtlCol="0" anchor="ctr"/>
           <a:lstStyle/>
           <a:p>
-            <a:pPr indent="0" marL="0">
+            <a:pPr marL="0" indent="0">
               <a:buNone/>
             </a:pPr>
             <a:r>
@@ -7322,7 +7470,7 @@
           <a:bodyPr wrap="square" lIns="0" tIns="0" rIns="0" bIns="0" rtlCol="0" anchor="ctr"/>
           <a:lstStyle/>
           <a:p>
-            <a:pPr indent="0" marL="0">
+            <a:pPr marL="0" indent="0">
               <a:buNone/>
             </a:pPr>
             <a:r>
@@ -7363,13 +7511,20 @@
             <a:prstDash val="solid"/>
           </a:ln>
           <a:effectLst>
-            <a:outerShdw sx="100000" sy="100000" kx="0" ky="0" algn="bl" rotWithShape="0" blurRad="101600" dist="25400" dir="5400000">
+            <a:outerShdw blurRad="101600" dist="25400" dir="5400000" algn="bl" rotWithShape="0">
               <a:srgbClr val="000000">
                 <a:alpha val="8000"/>
               </a:srgbClr>
             </a:outerShdw>
           </a:effectLst>
         </p:spPr>
+        <p:txBody>
+          <a:bodyPr/>
+          <a:lstStyle/>
+          <a:p>
+            <a:endParaRPr lang="en-US"/>
+          </a:p>
+        </p:txBody>
       </p:sp>
       <p:sp>
         <p:nvSpPr>
@@ -7392,7 +7547,7 @@
           <a:bodyPr wrap="square" lIns="0" tIns="0" rIns="0" bIns="0" rtlCol="0" anchor="ctr"/>
           <a:lstStyle/>
           <a:p>
-            <a:pPr algn="ctr" indent="0" marL="0">
+            <a:pPr marL="0" indent="0" algn="ctr">
               <a:buNone/>
             </a:pPr>
             <a:r>
@@ -7431,7 +7586,7 @@
           <a:bodyPr wrap="square" lIns="0" tIns="0" rIns="0" bIns="0" rtlCol="0" anchor="ctr"/>
           <a:lstStyle/>
           <a:p>
-            <a:pPr algn="ctr" indent="0" marL="0">
+            <a:pPr marL="0" indent="0" algn="ctr">
               <a:buNone/>
             </a:pPr>
             <a:r>
@@ -7472,13 +7627,20 @@
             <a:prstDash val="solid"/>
           </a:ln>
           <a:effectLst>
-            <a:outerShdw sx="100000" sy="100000" kx="0" ky="0" algn="bl" rotWithShape="0" blurRad="101600" dist="25400" dir="5400000">
+            <a:outerShdw blurRad="101600" dist="25400" dir="5400000" algn="bl" rotWithShape="0">
               <a:srgbClr val="000000">
                 <a:alpha val="8000"/>
               </a:srgbClr>
             </a:outerShdw>
           </a:effectLst>
         </p:spPr>
+        <p:txBody>
+          <a:bodyPr/>
+          <a:lstStyle/>
+          <a:p>
+            <a:endParaRPr lang="en-US"/>
+          </a:p>
+        </p:txBody>
       </p:sp>
       <p:sp>
         <p:nvSpPr>
@@ -7501,7 +7663,7 @@
           <a:bodyPr wrap="square" lIns="0" tIns="0" rIns="0" bIns="0" rtlCol="0" anchor="ctr"/>
           <a:lstStyle/>
           <a:p>
-            <a:pPr algn="ctr" indent="0" marL="0">
+            <a:pPr marL="0" indent="0" algn="ctr">
               <a:buNone/>
             </a:pPr>
             <a:r>
@@ -7540,7 +7702,7 @@
           <a:bodyPr wrap="square" lIns="0" tIns="0" rIns="0" bIns="0" rtlCol="0" anchor="ctr"/>
           <a:lstStyle/>
           <a:p>
-            <a:pPr algn="ctr" indent="0" marL="0">
+            <a:pPr marL="0" indent="0" algn="ctr">
               <a:buNone/>
             </a:pPr>
             <a:r>
@@ -7581,13 +7743,20 @@
             <a:prstDash val="solid"/>
           </a:ln>
           <a:effectLst>
-            <a:outerShdw sx="100000" sy="100000" kx="0" ky="0" algn="bl" rotWithShape="0" blurRad="101600" dist="25400" dir="5400000">
+            <a:outerShdw blurRad="101600" dist="25400" dir="5400000" algn="bl" rotWithShape="0">
               <a:srgbClr val="000000">
                 <a:alpha val="8000"/>
               </a:srgbClr>
             </a:outerShdw>
           </a:effectLst>
         </p:spPr>
+        <p:txBody>
+          <a:bodyPr/>
+          <a:lstStyle/>
+          <a:p>
+            <a:endParaRPr lang="en-US"/>
+          </a:p>
+        </p:txBody>
       </p:sp>
       <p:sp>
         <p:nvSpPr>
@@ -7610,7 +7779,7 @@
           <a:bodyPr wrap="square" lIns="0" tIns="0" rIns="0" bIns="0" rtlCol="0" anchor="ctr"/>
           <a:lstStyle/>
           <a:p>
-            <a:pPr algn="ctr" indent="0" marL="0">
+            <a:pPr marL="0" indent="0" algn="ctr">
               <a:buNone/>
             </a:pPr>
             <a:r>
@@ -7649,7 +7818,7 @@
           <a:bodyPr wrap="square" lIns="0" tIns="0" rIns="0" bIns="0" rtlCol="0" anchor="ctr"/>
           <a:lstStyle/>
           <a:p>
-            <a:pPr algn="ctr" indent="0" marL="0">
+            <a:pPr marL="0" indent="0" algn="ctr">
               <a:buNone/>
             </a:pPr>
             <a:r>
@@ -7690,13 +7859,20 @@
             <a:prstDash val="solid"/>
           </a:ln>
           <a:effectLst>
-            <a:outerShdw sx="100000" sy="100000" kx="0" ky="0" algn="bl" rotWithShape="0" blurRad="101600" dist="25400" dir="5400000">
+            <a:outerShdw blurRad="101600" dist="25400" dir="5400000" algn="bl" rotWithShape="0">
               <a:srgbClr val="000000">
                 <a:alpha val="8000"/>
               </a:srgbClr>
             </a:outerShdw>
           </a:effectLst>
         </p:spPr>
+        <p:txBody>
+          <a:bodyPr/>
+          <a:lstStyle/>
+          <a:p>
+            <a:endParaRPr lang="en-US"/>
+          </a:p>
+        </p:txBody>
       </p:sp>
       <p:sp>
         <p:nvSpPr>
@@ -7719,7 +7895,7 @@
           <a:bodyPr wrap="square" lIns="0" tIns="0" rIns="0" bIns="0" rtlCol="0" anchor="ctr"/>
           <a:lstStyle/>
           <a:p>
-            <a:pPr algn="ctr" indent="0" marL="0">
+            <a:pPr marL="0" indent="0" algn="ctr">
               <a:buNone/>
             </a:pPr>
             <a:r>
@@ -7758,7 +7934,7 @@
           <a:bodyPr wrap="square" lIns="0" tIns="0" rIns="0" bIns="0" rtlCol="0" anchor="ctr"/>
           <a:lstStyle/>
           <a:p>
-            <a:pPr algn="ctr" indent="0" marL="0">
+            <a:pPr marL="0" indent="0" algn="ctr">
               <a:buNone/>
             </a:pPr>
             <a:r>
@@ -7797,17 +7973,24 @@
             <a:prstDash val="solid"/>
           </a:ln>
         </p:spPr>
+        <p:txBody>
+          <a:bodyPr/>
+          <a:lstStyle/>
+          <a:p>
+            <a:endParaRPr lang="en-US"/>
+          </a:p>
+        </p:txBody>
       </p:sp>
       <p:pic>
         <p:nvPicPr>
-          <p:cNvPr id="18" name="Image 0" descr="FiUser">    </p:cNvPr>
+          <p:cNvPr id="18" name="Image 0" descr="FiUser"/>
           <p:cNvPicPr>
             <a:picLocks noChangeAspect="1"/>
           </p:cNvPicPr>
           <p:nvPr/>
         </p:nvPicPr>
         <p:blipFill>
-          <a:blip r:embed="rId1"/>
+          <a:blip r:embed="rId3"/>
           <a:stretch>
             <a:fillRect/>
           </a:stretch>
@@ -7843,7 +8026,7 @@
           <a:bodyPr wrap="square" lIns="0" tIns="0" rIns="0" bIns="0" rtlCol="0" anchor="ctr"/>
           <a:lstStyle/>
           <a:p>
-            <a:pPr indent="0" marL="0">
+            <a:pPr marL="0" indent="0">
               <a:buNone/>
             </a:pPr>
             <a:r>
@@ -7879,7 +8062,7 @@
           <a:bodyPr wrap="square" lIns="0" tIns="0" rIns="0" bIns="0" rtlCol="0" anchor="t"/>
           <a:lstStyle/>
           <a:p>
-            <a:pPr indent="0" marL="0">
+            <a:pPr marL="0" indent="0">
               <a:buNone/>
             </a:pPr>
             <a:r>
@@ -7918,17 +8101,24 @@
             <a:prstDash val="solid"/>
           </a:ln>
         </p:spPr>
+        <p:txBody>
+          <a:bodyPr/>
+          <a:lstStyle/>
+          <a:p>
+            <a:endParaRPr lang="en-US"/>
+          </a:p>
+        </p:txBody>
       </p:sp>
       <p:pic>
         <p:nvPicPr>
-          <p:cNvPr id="22" name="Image 1" descr="FiClipboard">    </p:cNvPr>
+          <p:cNvPr id="22" name="Image 1" descr="FiClipboard"/>
           <p:cNvPicPr>
             <a:picLocks noChangeAspect="1"/>
           </p:cNvPicPr>
           <p:nvPr/>
         </p:nvPicPr>
         <p:blipFill>
-          <a:blip r:embed="rId2"/>
+          <a:blip r:embed="rId4"/>
           <a:stretch>
             <a:fillRect/>
           </a:stretch>
@@ -7964,7 +8154,7 @@
           <a:bodyPr wrap="square" lIns="0" tIns="0" rIns="0" bIns="0" rtlCol="0" anchor="ctr"/>
           <a:lstStyle/>
           <a:p>
-            <a:pPr indent="0" marL="0">
+            <a:pPr marL="0" indent="0">
               <a:buNone/>
             </a:pPr>
             <a:r>
@@ -8000,7 +8190,7 @@
           <a:bodyPr wrap="square" lIns="0" tIns="0" rIns="0" bIns="0" rtlCol="0" anchor="t"/>
           <a:lstStyle/>
           <a:p>
-            <a:pPr indent="0" marL="0">
+            <a:pPr marL="0" indent="0">
               <a:buNone/>
             </a:pPr>
             <a:r>
@@ -8039,17 +8229,24 @@
             <a:prstDash val="solid"/>
           </a:ln>
         </p:spPr>
+        <p:txBody>
+          <a:bodyPr/>
+          <a:lstStyle/>
+          <a:p>
+            <a:endParaRPr lang="en-US"/>
+          </a:p>
+        </p:txBody>
       </p:sp>
       <p:pic>
         <p:nvPicPr>
-          <p:cNvPr id="26" name="Image 2" descr="FiShield">    </p:cNvPr>
+          <p:cNvPr id="26" name="Image 2" descr="FiShield"/>
           <p:cNvPicPr>
             <a:picLocks noChangeAspect="1"/>
           </p:cNvPicPr>
           <p:nvPr/>
         </p:nvPicPr>
         <p:blipFill>
-          <a:blip r:embed="rId3"/>
+          <a:blip r:embed="rId5"/>
           <a:stretch>
             <a:fillRect/>
           </a:stretch>
@@ -8085,7 +8282,7 @@
           <a:bodyPr wrap="square" lIns="0" tIns="0" rIns="0" bIns="0" rtlCol="0" anchor="ctr"/>
           <a:lstStyle/>
           <a:p>
-            <a:pPr indent="0" marL="0">
+            <a:pPr marL="0" indent="0">
               <a:buNone/>
             </a:pPr>
             <a:r>
@@ -8121,7 +8318,7 @@
           <a:bodyPr wrap="square" lIns="0" tIns="0" rIns="0" bIns="0" rtlCol="0" anchor="t"/>
           <a:lstStyle/>
           <a:p>
-            <a:pPr indent="0" marL="0">
+            <a:pPr marL="0" indent="0">
               <a:buNone/>
             </a:pPr>
             <a:r>
@@ -8152,6 +8349,7 @@
         <a:solidFill>
           <a:srgbClr val="FFFFFF"/>
         </a:solidFill>
+        <a:effectLst/>
       </p:bgPr>
     </p:bg>
     <p:spTree>
@@ -8189,7 +8387,7 @@
           <a:bodyPr wrap="square" lIns="0" tIns="0" rIns="0" bIns="0" rtlCol="0" anchor="ctr"/>
           <a:lstStyle/>
           <a:p>
-            <a:pPr indent="0" marL="0">
+            <a:pPr marL="0" indent="0">
               <a:buNone/>
             </a:pPr>
             <a:r>
@@ -8228,7 +8426,7 @@
           <a:bodyPr wrap="square" lIns="0" tIns="0" rIns="0" bIns="0" rtlCol="0" anchor="ctr"/>
           <a:lstStyle/>
           <a:p>
-            <a:pPr indent="0" marL="0">
+            <a:pPr marL="0" indent="0">
               <a:buNone/>
             </a:pPr>
             <a:r>
@@ -8269,13 +8467,20 @@
             <a:prstDash val="solid"/>
           </a:ln>
           <a:effectLst>
-            <a:outerShdw sx="100000" sy="100000" kx="0" ky="0" algn="bl" rotWithShape="0" blurRad="101600" dist="25400" dir="5400000">
+            <a:outerShdw blurRad="101600" dist="25400" dir="5400000" algn="bl" rotWithShape="0">
               <a:srgbClr val="000000">
                 <a:alpha val="8000"/>
               </a:srgbClr>
             </a:outerShdw>
           </a:effectLst>
         </p:spPr>
+        <p:txBody>
+          <a:bodyPr/>
+          <a:lstStyle/>
+          <a:p>
+            <a:endParaRPr lang="en-US"/>
+          </a:p>
+        </p:txBody>
       </p:sp>
       <p:sp>
         <p:nvSpPr>
@@ -8301,17 +8506,24 @@
             <a:prstDash val="solid"/>
           </a:ln>
         </p:spPr>
+        <p:txBody>
+          <a:bodyPr/>
+          <a:lstStyle/>
+          <a:p>
+            <a:endParaRPr lang="en-US"/>
+          </a:p>
+        </p:txBody>
       </p:sp>
       <p:pic>
         <p:nvPicPr>
-          <p:cNvPr id="7" name="Image 0" descr="FiZap">    </p:cNvPr>
+          <p:cNvPr id="7" name="Image 0" descr="FiZap"/>
           <p:cNvPicPr>
             <a:picLocks noChangeAspect="1"/>
           </p:cNvPicPr>
           <p:nvPr/>
         </p:nvPicPr>
         <p:blipFill>
-          <a:blip r:embed="rId1"/>
+          <a:blip r:embed="rId3"/>
           <a:stretch>
             <a:fillRect/>
           </a:stretch>
@@ -8347,7 +8559,7 @@
           <a:bodyPr wrap="square" lIns="0" tIns="0" rIns="0" bIns="0" rtlCol="0" anchor="ctr"/>
           <a:lstStyle/>
           <a:p>
-            <a:pPr indent="0" marL="0">
+            <a:pPr marL="0" indent="0">
               <a:buNone/>
             </a:pPr>
             <a:r>
@@ -8386,7 +8598,7 @@
           <a:bodyPr wrap="square" lIns="0" tIns="0" rIns="0" bIns="0" rtlCol="0" anchor="ctr"/>
           <a:lstStyle/>
           <a:p>
-            <a:pPr indent="0" marL="0">
+            <a:pPr marL="0" indent="0">
               <a:buNone/>
             </a:pPr>
             <a:r>
@@ -8427,13 +8639,20 @@
             <a:prstDash val="solid"/>
           </a:ln>
           <a:effectLst>
-            <a:outerShdw sx="100000" sy="100000" kx="0" ky="0" algn="bl" rotWithShape="0" blurRad="101600" dist="25400" dir="5400000">
+            <a:outerShdw blurRad="101600" dist="25400" dir="5400000" algn="bl" rotWithShape="0">
               <a:srgbClr val="000000">
                 <a:alpha val="8000"/>
               </a:srgbClr>
             </a:outerShdw>
           </a:effectLst>
         </p:spPr>
+        <p:txBody>
+          <a:bodyPr/>
+          <a:lstStyle/>
+          <a:p>
+            <a:endParaRPr lang="en-US"/>
+          </a:p>
+        </p:txBody>
       </p:sp>
       <p:sp>
         <p:nvSpPr>
@@ -8459,17 +8678,24 @@
             <a:prstDash val="solid"/>
           </a:ln>
         </p:spPr>
+        <p:txBody>
+          <a:bodyPr/>
+          <a:lstStyle/>
+          <a:p>
+            <a:endParaRPr lang="en-US"/>
+          </a:p>
+        </p:txBody>
       </p:sp>
       <p:pic>
         <p:nvPicPr>
-          <p:cNvPr id="12" name="Image 1" descr="FiEye">    </p:cNvPr>
+          <p:cNvPr id="12" name="Image 1" descr="FiEye"/>
           <p:cNvPicPr>
             <a:picLocks noChangeAspect="1"/>
           </p:cNvPicPr>
           <p:nvPr/>
         </p:nvPicPr>
         <p:blipFill>
-          <a:blip r:embed="rId2"/>
+          <a:blip r:embed="rId4"/>
           <a:stretch>
             <a:fillRect/>
           </a:stretch>
@@ -8505,7 +8731,7 @@
           <a:bodyPr wrap="square" lIns="0" tIns="0" rIns="0" bIns="0" rtlCol="0" anchor="ctr"/>
           <a:lstStyle/>
           <a:p>
-            <a:pPr indent="0" marL="0">
+            <a:pPr marL="0" indent="0">
               <a:buNone/>
             </a:pPr>
             <a:r>
@@ -8544,7 +8770,7 @@
           <a:bodyPr wrap="square" lIns="0" tIns="0" rIns="0" bIns="0" rtlCol="0" anchor="ctr"/>
           <a:lstStyle/>
           <a:p>
-            <a:pPr indent="0" marL="0">
+            <a:pPr marL="0" indent="0">
               <a:buNone/>
             </a:pPr>
             <a:r>
@@ -8585,13 +8811,20 @@
             <a:prstDash val="solid"/>
           </a:ln>
           <a:effectLst>
-            <a:outerShdw sx="100000" sy="100000" kx="0" ky="0" algn="bl" rotWithShape="0" blurRad="101600" dist="25400" dir="5400000">
+            <a:outerShdw blurRad="101600" dist="25400" dir="5400000" algn="bl" rotWithShape="0">
               <a:srgbClr val="000000">
                 <a:alpha val="8000"/>
               </a:srgbClr>
             </a:outerShdw>
           </a:effectLst>
         </p:spPr>
+        <p:txBody>
+          <a:bodyPr/>
+          <a:lstStyle/>
+          <a:p>
+            <a:endParaRPr lang="en-US"/>
+          </a:p>
+        </p:txBody>
       </p:sp>
       <p:sp>
         <p:nvSpPr>
@@ -8617,17 +8850,24 @@
             <a:prstDash val="solid"/>
           </a:ln>
         </p:spPr>
+        <p:txBody>
+          <a:bodyPr/>
+          <a:lstStyle/>
+          <a:p>
+            <a:endParaRPr lang="en-US"/>
+          </a:p>
+        </p:txBody>
       </p:sp>
       <p:pic>
         <p:nvPicPr>
-          <p:cNvPr id="17" name="Image 2" descr="FiHeart">    </p:cNvPr>
+          <p:cNvPr id="17" name="Image 2" descr="FiHeart"/>
           <p:cNvPicPr>
             <a:picLocks noChangeAspect="1"/>
           </p:cNvPicPr>
           <p:nvPr/>
         </p:nvPicPr>
         <p:blipFill>
-          <a:blip r:embed="rId3"/>
+          <a:blip r:embed="rId5"/>
           <a:stretch>
             <a:fillRect/>
           </a:stretch>
@@ -8663,7 +8903,7 @@
           <a:bodyPr wrap="square" lIns="0" tIns="0" rIns="0" bIns="0" rtlCol="0" anchor="ctr"/>
           <a:lstStyle/>
           <a:p>
-            <a:pPr indent="0" marL="0">
+            <a:pPr marL="0" indent="0">
               <a:buNone/>
             </a:pPr>
             <a:r>
@@ -8702,7 +8942,7 @@
           <a:bodyPr wrap="square" lIns="0" tIns="0" rIns="0" bIns="0" rtlCol="0" anchor="ctr"/>
           <a:lstStyle/>
           <a:p>
-            <a:pPr indent="0" marL="0">
+            <a:pPr marL="0" indent="0">
               <a:buNone/>
             </a:pPr>
             <a:r>
@@ -8743,13 +8983,20 @@
             <a:prstDash val="solid"/>
           </a:ln>
           <a:effectLst>
-            <a:outerShdw sx="100000" sy="100000" kx="0" ky="0" algn="bl" rotWithShape="0" blurRad="101600" dist="25400" dir="5400000">
+            <a:outerShdw blurRad="101600" dist="25400" dir="5400000" algn="bl" rotWithShape="0">
               <a:srgbClr val="000000">
                 <a:alpha val="8000"/>
               </a:srgbClr>
             </a:outerShdw>
           </a:effectLst>
         </p:spPr>
+        <p:txBody>
+          <a:bodyPr/>
+          <a:lstStyle/>
+          <a:p>
+            <a:endParaRPr lang="en-US"/>
+          </a:p>
+        </p:txBody>
       </p:sp>
       <p:sp>
         <p:nvSpPr>
@@ -8775,17 +9022,24 @@
             <a:prstDash val="solid"/>
           </a:ln>
         </p:spPr>
+        <p:txBody>
+          <a:bodyPr/>
+          <a:lstStyle/>
+          <a:p>
+            <a:endParaRPr lang="en-US"/>
+          </a:p>
+        </p:txBody>
       </p:sp>
       <p:pic>
         <p:nvPicPr>
-          <p:cNvPr id="22" name="Image 3" descr="FiShield">    </p:cNvPr>
+          <p:cNvPr id="22" name="Image 3" descr="FiShield"/>
           <p:cNvPicPr>
             <a:picLocks noChangeAspect="1"/>
           </p:cNvPicPr>
           <p:nvPr/>
         </p:nvPicPr>
         <p:blipFill>
-          <a:blip r:embed="rId4"/>
+          <a:blip r:embed="rId6"/>
           <a:stretch>
             <a:fillRect/>
           </a:stretch>
@@ -8821,7 +9075,7 @@
           <a:bodyPr wrap="square" lIns="0" tIns="0" rIns="0" bIns="0" rtlCol="0" anchor="ctr"/>
           <a:lstStyle/>
           <a:p>
-            <a:pPr indent="0" marL="0">
+            <a:pPr marL="0" indent="0">
               <a:buNone/>
             </a:pPr>
             <a:r>
@@ -8860,7 +9114,7 @@
           <a:bodyPr wrap="square" lIns="0" tIns="0" rIns="0" bIns="0" rtlCol="0" anchor="ctr"/>
           <a:lstStyle/>
           <a:p>
-            <a:pPr indent="0" marL="0">
+            <a:pPr marL="0" indent="0">
               <a:buNone/>
             </a:pPr>
             <a:r>
@@ -8891,6 +9145,7 @@
         <a:solidFill>
           <a:srgbClr val="FFFFFF"/>
         </a:solidFill>
+        <a:effectLst/>
       </p:bgPr>
     </p:bg>
     <p:spTree>
@@ -8928,7 +9183,7 @@
           <a:bodyPr wrap="square" lIns="0" tIns="0" rIns="0" bIns="0" rtlCol="0" anchor="ctr"/>
           <a:lstStyle/>
           <a:p>
-            <a:pPr indent="0" marL="0">
+            <a:pPr marL="0" indent="0">
               <a:buNone/>
             </a:pPr>
             <a:r>
@@ -8967,7 +9222,7 @@
           <a:bodyPr wrap="square" lIns="0" tIns="0" rIns="0" bIns="0" rtlCol="0" anchor="ctr"/>
           <a:lstStyle/>
           <a:p>
-            <a:pPr indent="0" marL="0">
+            <a:pPr marL="0" indent="0">
               <a:buNone/>
             </a:pPr>
             <a:r>
@@ -9008,13 +9263,20 @@
             <a:prstDash val="solid"/>
           </a:ln>
           <a:effectLst>
-            <a:outerShdw sx="100000" sy="100000" kx="0" ky="0" algn="bl" rotWithShape="0" blurRad="101600" dist="25400" dir="5400000">
+            <a:outerShdw blurRad="101600" dist="25400" dir="5400000" algn="bl" rotWithShape="0">
               <a:srgbClr val="000000">
                 <a:alpha val="8000"/>
               </a:srgbClr>
             </a:outerShdw>
           </a:effectLst>
         </p:spPr>
+        <p:txBody>
+          <a:bodyPr/>
+          <a:lstStyle/>
+          <a:p>
+            <a:endParaRPr lang="en-US"/>
+          </a:p>
+        </p:txBody>
       </p:sp>
       <p:sp>
         <p:nvSpPr>
@@ -9040,17 +9302,24 @@
             <a:prstDash val="solid"/>
           </a:ln>
         </p:spPr>
+        <p:txBody>
+          <a:bodyPr/>
+          <a:lstStyle/>
+          <a:p>
+            <a:endParaRPr lang="en-US"/>
+          </a:p>
+        </p:txBody>
       </p:sp>
       <p:pic>
         <p:nvPicPr>
-          <p:cNvPr id="7" name="Image 0" descr="FiUpload">    </p:cNvPr>
+          <p:cNvPr id="7" name="Image 0" descr="FiUpload"/>
           <p:cNvPicPr>
             <a:picLocks noChangeAspect="1"/>
           </p:cNvPicPr>
           <p:nvPr/>
         </p:nvPicPr>
         <p:blipFill>
-          <a:blip r:embed="rId1"/>
+          <a:blip r:embed="rId3"/>
           <a:stretch>
             <a:fillRect/>
           </a:stretch>
@@ -9086,7 +9355,7 @@
           <a:bodyPr wrap="square" lIns="0" tIns="0" rIns="0" bIns="0" rtlCol="0" anchor="ctr"/>
           <a:lstStyle/>
           <a:p>
-            <a:pPr algn="ctr" indent="0" marL="0">
+            <a:pPr marL="0" indent="0" algn="ctr">
               <a:buNone/>
             </a:pPr>
             <a:r>
@@ -9122,7 +9391,7 @@
           <a:bodyPr wrap="square" lIns="0" tIns="0" rIns="0" bIns="0" rtlCol="0" anchor="t"/>
           <a:lstStyle/>
           <a:p>
-            <a:pPr algn="ctr" indent="0" marL="0">
+            <a:pPr marL="0" indent="0" algn="ctr">
               <a:buNone/>
             </a:pPr>
             <a:r>
@@ -9158,7 +9427,7 @@
           <a:bodyPr wrap="square" lIns="0" tIns="0" rIns="0" bIns="0" rtlCol="0" anchor="ctr"/>
           <a:lstStyle/>
           <a:p>
-            <a:pPr algn="ctr" indent="0" marL="0">
+            <a:pPr marL="0" indent="0" algn="ctr">
               <a:buNone/>
             </a:pPr>
             <a:r>
@@ -9199,13 +9468,20 @@
             <a:prstDash val="solid"/>
           </a:ln>
           <a:effectLst>
-            <a:outerShdw sx="100000" sy="100000" kx="0" ky="0" algn="bl" rotWithShape="0" blurRad="101600" dist="25400" dir="5400000">
+            <a:outerShdw blurRad="101600" dist="25400" dir="5400000" algn="bl" rotWithShape="0">
               <a:srgbClr val="000000">
                 <a:alpha val="8000"/>
               </a:srgbClr>
             </a:outerShdw>
           </a:effectLst>
         </p:spPr>
+        <p:txBody>
+          <a:bodyPr/>
+          <a:lstStyle/>
+          <a:p>
+            <a:endParaRPr lang="en-US"/>
+          </a:p>
+        </p:txBody>
       </p:sp>
       <p:sp>
         <p:nvSpPr>
@@ -9231,17 +9507,24 @@
             <a:prstDash val="solid"/>
           </a:ln>
         </p:spPr>
+        <p:txBody>
+          <a:bodyPr/>
+          <a:lstStyle/>
+          <a:p>
+            <a:endParaRPr lang="en-US"/>
+          </a:p>
+        </p:txBody>
       </p:sp>
       <p:pic>
         <p:nvPicPr>
-          <p:cNvPr id="13" name="Image 1" descr="FiSliders">    </p:cNvPr>
+          <p:cNvPr id="13" name="Image 1" descr="FiSliders"/>
           <p:cNvPicPr>
             <a:picLocks noChangeAspect="1"/>
           </p:cNvPicPr>
           <p:nvPr/>
         </p:nvPicPr>
         <p:blipFill>
-          <a:blip r:embed="rId2"/>
+          <a:blip r:embed="rId4"/>
           <a:stretch>
             <a:fillRect/>
           </a:stretch>
@@ -9277,7 +9560,7 @@
           <a:bodyPr wrap="square" lIns="0" tIns="0" rIns="0" bIns="0" rtlCol="0" anchor="ctr"/>
           <a:lstStyle/>
           <a:p>
-            <a:pPr algn="ctr" indent="0" marL="0">
+            <a:pPr marL="0" indent="0" algn="ctr">
               <a:buNone/>
             </a:pPr>
             <a:r>
@@ -9313,7 +9596,7 @@
           <a:bodyPr wrap="square" lIns="0" tIns="0" rIns="0" bIns="0" rtlCol="0" anchor="t"/>
           <a:lstStyle/>
           <a:p>
-            <a:pPr algn="ctr" indent="0" marL="0">
+            <a:pPr marL="0" indent="0" algn="ctr">
               <a:buNone/>
             </a:pPr>
             <a:r>
@@ -9349,7 +9632,7 @@
           <a:bodyPr wrap="square" lIns="0" tIns="0" rIns="0" bIns="0" rtlCol="0" anchor="ctr"/>
           <a:lstStyle/>
           <a:p>
-            <a:pPr algn="ctr" indent="0" marL="0">
+            <a:pPr marL="0" indent="0" algn="ctr">
               <a:buNone/>
             </a:pPr>
             <a:r>
@@ -9390,13 +9673,20 @@
             <a:prstDash val="solid"/>
           </a:ln>
           <a:effectLst>
-            <a:outerShdw sx="100000" sy="100000" kx="0" ky="0" algn="bl" rotWithShape="0" blurRad="101600" dist="25400" dir="5400000">
+            <a:outerShdw blurRad="101600" dist="25400" dir="5400000" algn="bl" rotWithShape="0">
               <a:srgbClr val="000000">
                 <a:alpha val="8000"/>
               </a:srgbClr>
             </a:outerShdw>
           </a:effectLst>
         </p:spPr>
+        <p:txBody>
+          <a:bodyPr/>
+          <a:lstStyle/>
+          <a:p>
+            <a:endParaRPr lang="en-US"/>
+          </a:p>
+        </p:txBody>
       </p:sp>
       <p:sp>
         <p:nvSpPr>
@@ -9422,17 +9712,24 @@
             <a:prstDash val="solid"/>
           </a:ln>
         </p:spPr>
+        <p:txBody>
+          <a:bodyPr/>
+          <a:lstStyle/>
+          <a:p>
+            <a:endParaRPr lang="en-US"/>
+          </a:p>
+        </p:txBody>
       </p:sp>
       <p:pic>
         <p:nvPicPr>
-          <p:cNvPr id="19" name="Image 2" descr="FiCheckCircle">    </p:cNvPr>
+          <p:cNvPr id="19" name="Image 2" descr="FiCheckCircle"/>
           <p:cNvPicPr>
             <a:picLocks noChangeAspect="1"/>
           </p:cNvPicPr>
           <p:nvPr/>
         </p:nvPicPr>
         <p:blipFill>
-          <a:blip r:embed="rId3"/>
+          <a:blip r:embed="rId5"/>
           <a:stretch>
             <a:fillRect/>
           </a:stretch>
@@ -9468,7 +9765,7 @@
           <a:bodyPr wrap="square" lIns="0" tIns="0" rIns="0" bIns="0" rtlCol="0" anchor="ctr"/>
           <a:lstStyle/>
           <a:p>
-            <a:pPr algn="ctr" indent="0" marL="0">
+            <a:pPr marL="0" indent="0" algn="ctr">
               <a:buNone/>
             </a:pPr>
             <a:r>
@@ -9504,7 +9801,7 @@
           <a:bodyPr wrap="square" lIns="0" tIns="0" rIns="0" bIns="0" rtlCol="0" anchor="t"/>
           <a:lstStyle/>
           <a:p>
-            <a:pPr algn="ctr" indent="0" marL="0">
+            <a:pPr marL="0" indent="0" algn="ctr">
               <a:buNone/>
             </a:pPr>
             <a:r>
@@ -9540,7 +9837,7 @@
           <a:bodyPr wrap="square" lIns="0" tIns="0" rIns="0" bIns="0" rtlCol="0" anchor="ctr"/>
           <a:lstStyle/>
           <a:p>
-            <a:pPr algn="ctr" indent="0" marL="0">
+            <a:pPr marL="0" indent="0" algn="ctr">
               <a:buNone/>
             </a:pPr>
             <a:r>
@@ -9581,13 +9878,20 @@
             <a:prstDash val="solid"/>
           </a:ln>
           <a:effectLst>
-            <a:outerShdw sx="100000" sy="100000" kx="0" ky="0" algn="bl" rotWithShape="0" blurRad="101600" dist="25400" dir="5400000">
+            <a:outerShdw blurRad="101600" dist="25400" dir="5400000" algn="bl" rotWithShape="0">
               <a:srgbClr val="000000">
                 <a:alpha val="8000"/>
               </a:srgbClr>
             </a:outerShdw>
           </a:effectLst>
         </p:spPr>
+        <p:txBody>
+          <a:bodyPr/>
+          <a:lstStyle/>
+          <a:p>
+            <a:endParaRPr lang="en-US"/>
+          </a:p>
+        </p:txBody>
       </p:sp>
       <p:sp>
         <p:nvSpPr>
@@ -9613,17 +9917,24 @@
             <a:prstDash val="solid"/>
           </a:ln>
         </p:spPr>
+        <p:txBody>
+          <a:bodyPr/>
+          <a:lstStyle/>
+          <a:p>
+            <a:endParaRPr lang="en-US"/>
+          </a:p>
+        </p:txBody>
       </p:sp>
       <p:pic>
         <p:nvPicPr>
-          <p:cNvPr id="25" name="Image 3" descr="FiCpu">    </p:cNvPr>
+          <p:cNvPr id="25" name="Image 3" descr="FiCpu"/>
           <p:cNvPicPr>
             <a:picLocks noChangeAspect="1"/>
           </p:cNvPicPr>
           <p:nvPr/>
         </p:nvPicPr>
         <p:blipFill>
-          <a:blip r:embed="rId4"/>
+          <a:blip r:embed="rId6"/>
           <a:stretch>
             <a:fillRect/>
           </a:stretch>
@@ -9659,7 +9970,7 @@
           <a:bodyPr wrap="square" lIns="0" tIns="0" rIns="0" bIns="0" rtlCol="0" anchor="ctr"/>
           <a:lstStyle/>
           <a:p>
-            <a:pPr algn="ctr" indent="0" marL="0">
+            <a:pPr marL="0" indent="0" algn="ctr">
               <a:buNone/>
             </a:pPr>
             <a:r>
@@ -9695,7 +10006,7 @@
           <a:bodyPr wrap="square" lIns="0" tIns="0" rIns="0" bIns="0" rtlCol="0" anchor="t"/>
           <a:lstStyle/>
           <a:p>
-            <a:pPr algn="ctr" indent="0" marL="0">
+            <a:pPr marL="0" indent="0" algn="ctr">
               <a:buNone/>
             </a:pPr>
             <a:r>
@@ -9731,7 +10042,7 @@
           <a:bodyPr wrap="square" lIns="0" tIns="0" rIns="0" bIns="0" rtlCol="0" anchor="ctr"/>
           <a:lstStyle/>
           <a:p>
-            <a:pPr algn="ctr" indent="0" marL="0">
+            <a:pPr marL="0" indent="0" algn="ctr">
               <a:buNone/>
             </a:pPr>
             <a:r>
@@ -9772,13 +10083,20 @@
             <a:prstDash val="solid"/>
           </a:ln>
           <a:effectLst>
-            <a:outerShdw sx="100000" sy="100000" kx="0" ky="0" algn="bl" rotWithShape="0" blurRad="101600" dist="25400" dir="5400000">
+            <a:outerShdw blurRad="101600" dist="25400" dir="5400000" algn="bl" rotWithShape="0">
               <a:srgbClr val="000000">
                 <a:alpha val="8000"/>
               </a:srgbClr>
             </a:outerShdw>
           </a:effectLst>
         </p:spPr>
+        <p:txBody>
+          <a:bodyPr/>
+          <a:lstStyle/>
+          <a:p>
+            <a:endParaRPr lang="en-US"/>
+          </a:p>
+        </p:txBody>
       </p:sp>
       <p:sp>
         <p:nvSpPr>
@@ -9804,17 +10122,24 @@
             <a:prstDash val="solid"/>
           </a:ln>
         </p:spPr>
+        <p:txBody>
+          <a:bodyPr/>
+          <a:lstStyle/>
+          <a:p>
+            <a:endParaRPr lang="en-US"/>
+          </a:p>
+        </p:txBody>
       </p:sp>
       <p:pic>
         <p:nvPicPr>
-          <p:cNvPr id="31" name="Image 4" descr="FiUsers">    </p:cNvPr>
+          <p:cNvPr id="31" name="Image 4" descr="FiUsers"/>
           <p:cNvPicPr>
             <a:picLocks noChangeAspect="1"/>
           </p:cNvPicPr>
           <p:nvPr/>
         </p:nvPicPr>
         <p:blipFill>
-          <a:blip r:embed="rId5"/>
+          <a:blip r:embed="rId7"/>
           <a:stretch>
             <a:fillRect/>
           </a:stretch>
@@ -9850,7 +10175,7 @@
           <a:bodyPr wrap="square" lIns="0" tIns="0" rIns="0" bIns="0" rtlCol="0" anchor="ctr"/>
           <a:lstStyle/>
           <a:p>
-            <a:pPr algn="ctr" indent="0" marL="0">
+            <a:pPr marL="0" indent="0" algn="ctr">
               <a:buNone/>
             </a:pPr>
             <a:r>
@@ -9886,7 +10211,7 @@
           <a:bodyPr wrap="square" lIns="0" tIns="0" rIns="0" bIns="0" rtlCol="0" anchor="t"/>
           <a:lstStyle/>
           <a:p>
-            <a:pPr algn="ctr" indent="0" marL="0">
+            <a:pPr marL="0" indent="0" algn="ctr">
               <a:buNone/>
             </a:pPr>
             <a:r>
@@ -9922,7 +10247,7 @@
           <a:bodyPr wrap="square" lIns="0" tIns="0" rIns="0" bIns="0" rtlCol="0" anchor="ctr"/>
           <a:lstStyle/>
           <a:p>
-            <a:pPr algn="ctr" indent="0" marL="0">
+            <a:pPr marL="0" indent="0" algn="ctr">
               <a:buNone/>
             </a:pPr>
             <a:r>
@@ -9963,13 +10288,20 @@
             <a:prstDash val="solid"/>
           </a:ln>
           <a:effectLst>
-            <a:outerShdw sx="100000" sy="100000" kx="0" ky="0" algn="bl" rotWithShape="0" blurRad="101600" dist="25400" dir="5400000">
+            <a:outerShdw blurRad="101600" dist="25400" dir="5400000" algn="bl" rotWithShape="0">
               <a:srgbClr val="000000">
                 <a:alpha val="8000"/>
               </a:srgbClr>
             </a:outerShdw>
           </a:effectLst>
         </p:spPr>
+        <p:txBody>
+          <a:bodyPr/>
+          <a:lstStyle/>
+          <a:p>
+            <a:endParaRPr lang="en-US"/>
+          </a:p>
+        </p:txBody>
       </p:sp>
       <p:sp>
         <p:nvSpPr>
@@ -9995,17 +10327,24 @@
             <a:prstDash val="solid"/>
           </a:ln>
         </p:spPr>
+        <p:txBody>
+          <a:bodyPr/>
+          <a:lstStyle/>
+          <a:p>
+            <a:endParaRPr lang="en-US"/>
+          </a:p>
+        </p:txBody>
       </p:sp>
       <p:pic>
         <p:nvPicPr>
-          <p:cNvPr id="37" name="Image 5" descr="FiFlag">    </p:cNvPr>
+          <p:cNvPr id="37" name="Image 5" descr="FiFlag"/>
           <p:cNvPicPr>
             <a:picLocks noChangeAspect="1"/>
           </p:cNvPicPr>
           <p:nvPr/>
         </p:nvPicPr>
         <p:blipFill>
-          <a:blip r:embed="rId6"/>
+          <a:blip r:embed="rId8"/>
           <a:stretch>
             <a:fillRect/>
           </a:stretch>
@@ -10041,7 +10380,7 @@
           <a:bodyPr wrap="square" lIns="0" tIns="0" rIns="0" bIns="0" rtlCol="0" anchor="ctr"/>
           <a:lstStyle/>
           <a:p>
-            <a:pPr algn="ctr" indent="0" marL="0">
+            <a:pPr marL="0" indent="0" algn="ctr">
               <a:buNone/>
             </a:pPr>
             <a:r>
@@ -10077,7 +10416,7 @@
           <a:bodyPr wrap="square" lIns="0" tIns="0" rIns="0" bIns="0" rtlCol="0" anchor="t"/>
           <a:lstStyle/>
           <a:p>
-            <a:pPr algn="ctr" indent="0" marL="0">
+            <a:pPr marL="0" indent="0" algn="ctr">
               <a:buNone/>
             </a:pPr>
             <a:r>
@@ -10118,6 +10457,13 @@
             <a:prstDash val="solid"/>
           </a:ln>
         </p:spPr>
+        <p:txBody>
+          <a:bodyPr/>
+          <a:lstStyle/>
+          <a:p>
+            <a:endParaRPr lang="en-US"/>
+          </a:p>
+        </p:txBody>
       </p:sp>
       <p:sp>
         <p:nvSpPr>
@@ -10140,7 +10486,7 @@
           <a:bodyPr wrap="square" lIns="0" tIns="0" rIns="0" bIns="0" rtlCol="0" anchor="ctr"/>
           <a:lstStyle/>
           <a:p>
-            <a:pPr indent="0" marL="0">
+            <a:pPr marL="0" indent="0">
               <a:buNone/>
             </a:pPr>
             <a:r>
@@ -10151,9 +10497,6 @@
               </a:rPr>
               <a:t>The learning loop.  </a:t>
             </a:r>
-            <a:pPr indent="0" marL="0">
-              <a:buNone/>
-            </a:pPr>
             <a:r>
               <a:rPr lang="en-US" sz="1700" dirty="0">
                 <a:solidFill>
@@ -10182,6 +10525,7 @@
         <a:solidFill>
           <a:srgbClr val="FFFFFF"/>
         </a:solidFill>
+        <a:effectLst/>
       </p:bgPr>
     </p:bg>
     <p:spTree>
@@ -10219,7 +10563,7 @@
           <a:bodyPr wrap="square" lIns="0" tIns="0" rIns="0" bIns="0" rtlCol="0" anchor="ctr"/>
           <a:lstStyle/>
           <a:p>
-            <a:pPr indent="0" marL="0">
+            <a:pPr marL="0" indent="0">
               <a:buNone/>
             </a:pPr>
             <a:r>
@@ -10258,7 +10602,7 @@
           <a:bodyPr wrap="square" lIns="0" tIns="0" rIns="0" bIns="0" rtlCol="0" anchor="ctr"/>
           <a:lstStyle/>
           <a:p>
-            <a:pPr indent="0" marL="0">
+            <a:pPr marL="0" indent="0">
               <a:buNone/>
             </a:pPr>
             <a:r>
@@ -10294,7 +10638,7 @@
           <a:bodyPr wrap="square" lIns="0" tIns="0" rIns="0" bIns="0" rtlCol="0" anchor="ctr"/>
           <a:lstStyle/>
           <a:p>
-            <a:pPr indent="0" marL="0">
+            <a:pPr marL="0" indent="0">
               <a:buNone/>
             </a:pPr>
             <a:r>
@@ -10330,7 +10674,7 @@
           <a:bodyPr wrap="square" lIns="0" tIns="0" rIns="0" bIns="0" rtlCol="0" anchor="ctr"/>
           <a:lstStyle/>
           <a:p>
-            <a:pPr indent="0" marL="0">
+            <a:pPr marL="0" indent="0">
               <a:buNone/>
             </a:pPr>
             <a:r>
@@ -10366,7 +10710,7 @@
           <a:bodyPr wrap="square" lIns="0" tIns="0" rIns="0" bIns="0" rtlCol="0" anchor="ctr"/>
           <a:lstStyle/>
           <a:p>
-            <a:pPr indent="0" marL="0">
+            <a:pPr marL="0" indent="0">
               <a:buNone/>
             </a:pPr>
             <a:r>
@@ -10407,13 +10751,20 @@
             <a:prstDash val="solid"/>
           </a:ln>
           <a:effectLst>
-            <a:outerShdw sx="100000" sy="100000" kx="0" ky="0" algn="bl" rotWithShape="0" blurRad="101600" dist="25400" dir="5400000">
+            <a:outerShdw blurRad="101600" dist="25400" dir="5400000" algn="bl" rotWithShape="0">
               <a:srgbClr val="000000">
                 <a:alpha val="8000"/>
               </a:srgbClr>
             </a:outerShdw>
           </a:effectLst>
         </p:spPr>
+        <p:txBody>
+          <a:bodyPr/>
+          <a:lstStyle/>
+          <a:p>
+            <a:endParaRPr lang="en-US"/>
+          </a:p>
+        </p:txBody>
       </p:sp>
       <p:sp>
         <p:nvSpPr>
@@ -10436,7 +10787,7 @@
           <a:bodyPr wrap="square" lIns="0" tIns="0" rIns="0" bIns="0" rtlCol="0" anchor="ctr"/>
           <a:lstStyle/>
           <a:p>
-            <a:pPr indent="0" marL="0">
+            <a:pPr marL="0" indent="0">
               <a:buNone/>
             </a:pPr>
             <a:r>
@@ -10477,6 +10828,13 @@
             <a:prstDash val="solid"/>
           </a:ln>
         </p:spPr>
+        <p:txBody>
+          <a:bodyPr/>
+          <a:lstStyle/>
+          <a:p>
+            <a:endParaRPr lang="en-US"/>
+          </a:p>
+        </p:txBody>
       </p:sp>
       <p:sp>
         <p:nvSpPr>
@@ -10499,7 +10857,7 @@
           <a:bodyPr wrap="square" lIns="0" tIns="0" rIns="0" bIns="0" rtlCol="0" anchor="ctr"/>
           <a:lstStyle/>
           <a:p>
-            <a:pPr algn="ctr" indent="0" marL="0">
+            <a:pPr marL="0" indent="0" algn="ctr">
               <a:buNone/>
             </a:pPr>
             <a:r>
@@ -10535,7 +10893,7 @@
           <a:bodyPr wrap="square" lIns="0" tIns="0" rIns="0" bIns="0" rtlCol="0" anchor="ctr"/>
           <a:lstStyle/>
           <a:p>
-            <a:pPr indent="0" marL="0">
+            <a:pPr marL="0" indent="0">
               <a:buNone/>
             </a:pPr>
             <a:r>
@@ -10576,13 +10934,20 @@
             <a:prstDash val="solid"/>
           </a:ln>
           <a:effectLst>
-            <a:outerShdw sx="100000" sy="100000" kx="0" ky="0" algn="bl" rotWithShape="0" blurRad="101600" dist="25400" dir="5400000">
+            <a:outerShdw blurRad="101600" dist="25400" dir="5400000" algn="bl" rotWithShape="0">
               <a:srgbClr val="000000">
                 <a:alpha val="8000"/>
               </a:srgbClr>
             </a:outerShdw>
           </a:effectLst>
         </p:spPr>
+        <p:txBody>
+          <a:bodyPr/>
+          <a:lstStyle/>
+          <a:p>
+            <a:endParaRPr lang="en-US"/>
+          </a:p>
+        </p:txBody>
       </p:sp>
       <p:sp>
         <p:nvSpPr>
@@ -10605,7 +10970,7 @@
           <a:bodyPr wrap="square" lIns="0" tIns="0" rIns="0" bIns="0" rtlCol="0" anchor="ctr"/>
           <a:lstStyle/>
           <a:p>
-            <a:pPr indent="0" marL="0">
+            <a:pPr marL="0" indent="0">
               <a:buNone/>
             </a:pPr>
             <a:r>
@@ -10646,6 +11011,13 @@
             <a:prstDash val="solid"/>
           </a:ln>
         </p:spPr>
+        <p:txBody>
+          <a:bodyPr/>
+          <a:lstStyle/>
+          <a:p>
+            <a:endParaRPr lang="en-US"/>
+          </a:p>
+        </p:txBody>
       </p:sp>
       <p:sp>
         <p:nvSpPr>
@@ -10668,7 +11040,7 @@
           <a:bodyPr wrap="square" lIns="0" tIns="0" rIns="0" bIns="0" rtlCol="0" anchor="ctr"/>
           <a:lstStyle/>
           <a:p>
-            <a:pPr algn="ctr" indent="0" marL="0">
+            <a:pPr marL="0" indent="0" algn="ctr">
               <a:buNone/>
             </a:pPr>
             <a:r>
@@ -10704,7 +11076,7 @@
           <a:bodyPr wrap="square" lIns="0" tIns="0" rIns="0" bIns="0" rtlCol="0" anchor="ctr"/>
           <a:lstStyle/>
           <a:p>
-            <a:pPr indent="0" marL="0">
+            <a:pPr marL="0" indent="0">
               <a:buNone/>
             </a:pPr>
             <a:r>
@@ -10745,13 +11117,20 @@
             <a:prstDash val="solid"/>
           </a:ln>
           <a:effectLst>
-            <a:outerShdw sx="100000" sy="100000" kx="0" ky="0" algn="bl" rotWithShape="0" blurRad="101600" dist="25400" dir="5400000">
+            <a:outerShdw blurRad="101600" dist="25400" dir="5400000" algn="bl" rotWithShape="0">
               <a:srgbClr val="000000">
                 <a:alpha val="8000"/>
               </a:srgbClr>
             </a:outerShdw>
           </a:effectLst>
         </p:spPr>
+        <p:txBody>
+          <a:bodyPr/>
+          <a:lstStyle/>
+          <a:p>
+            <a:endParaRPr lang="en-US"/>
+          </a:p>
+        </p:txBody>
       </p:sp>
       <p:sp>
         <p:nvSpPr>
@@ -10774,7 +11153,7 @@
           <a:bodyPr wrap="square" lIns="0" tIns="0" rIns="0" bIns="0" rtlCol="0" anchor="ctr"/>
           <a:lstStyle/>
           <a:p>
-            <a:pPr indent="0" marL="0">
+            <a:pPr marL="0" indent="0">
               <a:buNone/>
             </a:pPr>
             <a:r>
@@ -10815,6 +11194,13 @@
             <a:prstDash val="solid"/>
           </a:ln>
         </p:spPr>
+        <p:txBody>
+          <a:bodyPr/>
+          <a:lstStyle/>
+          <a:p>
+            <a:endParaRPr lang="en-US"/>
+          </a:p>
+        </p:txBody>
       </p:sp>
       <p:sp>
         <p:nvSpPr>
@@ -10837,7 +11223,7 @@
           <a:bodyPr wrap="square" lIns="0" tIns="0" rIns="0" bIns="0" rtlCol="0" anchor="ctr"/>
           <a:lstStyle/>
           <a:p>
-            <a:pPr algn="ctr" indent="0" marL="0">
+            <a:pPr marL="0" indent="0" algn="ctr">
               <a:buNone/>
             </a:pPr>
             <a:r>
@@ -10873,7 +11259,7 @@
           <a:bodyPr wrap="square" lIns="0" tIns="0" rIns="0" bIns="0" rtlCol="0" anchor="ctr"/>
           <a:lstStyle/>
           <a:p>
-            <a:pPr indent="0" marL="0">
+            <a:pPr marL="0" indent="0">
               <a:buNone/>
             </a:pPr>
             <a:r>
@@ -10914,13 +11300,20 @@
             <a:prstDash val="solid"/>
           </a:ln>
           <a:effectLst>
-            <a:outerShdw sx="100000" sy="100000" kx="0" ky="0" algn="bl" rotWithShape="0" blurRad="101600" dist="25400" dir="5400000">
+            <a:outerShdw blurRad="101600" dist="25400" dir="5400000" algn="bl" rotWithShape="0">
               <a:srgbClr val="000000">
                 <a:alpha val="8000"/>
               </a:srgbClr>
             </a:outerShdw>
           </a:effectLst>
         </p:spPr>
+        <p:txBody>
+          <a:bodyPr/>
+          <a:lstStyle/>
+          <a:p>
+            <a:endParaRPr lang="en-US"/>
+          </a:p>
+        </p:txBody>
       </p:sp>
       <p:sp>
         <p:nvSpPr>
@@ -10943,7 +11336,7 @@
           <a:bodyPr wrap="square" lIns="0" tIns="0" rIns="0" bIns="0" rtlCol="0" anchor="ctr"/>
           <a:lstStyle/>
           <a:p>
-            <a:pPr indent="0" marL="0">
+            <a:pPr marL="0" indent="0">
               <a:buNone/>
             </a:pPr>
             <a:r>
@@ -10984,6 +11377,13 @@
             <a:prstDash val="solid"/>
           </a:ln>
         </p:spPr>
+        <p:txBody>
+          <a:bodyPr/>
+          <a:lstStyle/>
+          <a:p>
+            <a:endParaRPr lang="en-US"/>
+          </a:p>
+        </p:txBody>
       </p:sp>
       <p:sp>
         <p:nvSpPr>
@@ -11006,7 +11406,7 @@
           <a:bodyPr wrap="square" lIns="0" tIns="0" rIns="0" bIns="0" rtlCol="0" anchor="ctr"/>
           <a:lstStyle/>
           <a:p>
-            <a:pPr algn="ctr" indent="0" marL="0">
+            <a:pPr marL="0" indent="0" algn="ctr">
               <a:buNone/>
             </a:pPr>
             <a:r>
@@ -11042,7 +11442,7 @@
           <a:bodyPr wrap="square" lIns="0" tIns="0" rIns="0" bIns="0" rtlCol="0" anchor="ctr"/>
           <a:lstStyle/>
           <a:p>
-            <a:pPr indent="0" marL="0">
+            <a:pPr marL="0" indent="0">
               <a:buNone/>
             </a:pPr>
             <a:r>
@@ -11083,13 +11483,20 @@
             <a:prstDash val="solid"/>
           </a:ln>
           <a:effectLst>
-            <a:outerShdw sx="100000" sy="100000" kx="0" ky="0" algn="bl" rotWithShape="0" blurRad="101600" dist="25400" dir="5400000">
+            <a:outerShdw blurRad="101600" dist="25400" dir="5400000" algn="bl" rotWithShape="0">
               <a:srgbClr val="000000">
                 <a:alpha val="8000"/>
               </a:srgbClr>
             </a:outerShdw>
           </a:effectLst>
         </p:spPr>
+        <p:txBody>
+          <a:bodyPr/>
+          <a:lstStyle/>
+          <a:p>
+            <a:endParaRPr lang="en-US"/>
+          </a:p>
+        </p:txBody>
       </p:sp>
       <p:sp>
         <p:nvSpPr>
@@ -11112,7 +11519,7 @@
           <a:bodyPr wrap="square" lIns="0" tIns="0" rIns="0" bIns="0" rtlCol="0" anchor="ctr"/>
           <a:lstStyle/>
           <a:p>
-            <a:pPr indent="0" marL="0">
+            <a:pPr marL="0" indent="0">
               <a:buNone/>
             </a:pPr>
             <a:r>
@@ -11153,6 +11560,13 @@
             <a:prstDash val="solid"/>
           </a:ln>
         </p:spPr>
+        <p:txBody>
+          <a:bodyPr/>
+          <a:lstStyle/>
+          <a:p>
+            <a:endParaRPr lang="en-US"/>
+          </a:p>
+        </p:txBody>
       </p:sp>
       <p:sp>
         <p:nvSpPr>
@@ -11175,7 +11589,7 @@
           <a:bodyPr wrap="square" lIns="0" tIns="0" rIns="0" bIns="0" rtlCol="0" anchor="ctr"/>
           <a:lstStyle/>
           <a:p>
-            <a:pPr algn="ctr" indent="0" marL="0">
+            <a:pPr marL="0" indent="0" algn="ctr">
               <a:buNone/>
             </a:pPr>
             <a:r>
@@ -11211,7 +11625,7 @@
           <a:bodyPr wrap="square" lIns="0" tIns="0" rIns="0" bIns="0" rtlCol="0" anchor="ctr"/>
           <a:lstStyle/>
           <a:p>
-            <a:pPr indent="0" marL="0">
+            <a:pPr marL="0" indent="0">
               <a:buNone/>
             </a:pPr>
             <a:r>
@@ -11252,13 +11666,20 @@
             <a:prstDash val="solid"/>
           </a:ln>
           <a:effectLst>
-            <a:outerShdw sx="100000" sy="100000" kx="0" ky="0" algn="bl" rotWithShape="0" blurRad="101600" dist="25400" dir="5400000">
+            <a:outerShdw blurRad="101600" dist="25400" dir="5400000" algn="bl" rotWithShape="0">
               <a:srgbClr val="000000">
                 <a:alpha val="8000"/>
               </a:srgbClr>
             </a:outerShdw>
           </a:effectLst>
         </p:spPr>
+        <p:txBody>
+          <a:bodyPr/>
+          <a:lstStyle/>
+          <a:p>
+            <a:endParaRPr lang="en-US"/>
+          </a:p>
+        </p:txBody>
       </p:sp>
       <p:sp>
         <p:nvSpPr>
@@ -11281,7 +11702,7 @@
           <a:bodyPr wrap="square" lIns="0" tIns="0" rIns="0" bIns="0" rtlCol="0" anchor="ctr"/>
           <a:lstStyle/>
           <a:p>
-            <a:pPr indent="0" marL="0">
+            <a:pPr marL="0" indent="0">
               <a:buNone/>
             </a:pPr>
             <a:r>
@@ -11322,6 +11743,13 @@
             <a:prstDash val="solid"/>
           </a:ln>
         </p:spPr>
+        <p:txBody>
+          <a:bodyPr/>
+          <a:lstStyle/>
+          <a:p>
+            <a:endParaRPr lang="en-US"/>
+          </a:p>
+        </p:txBody>
       </p:sp>
       <p:sp>
         <p:nvSpPr>
@@ -11344,7 +11772,7 @@
           <a:bodyPr wrap="square" lIns="0" tIns="0" rIns="0" bIns="0" rtlCol="0" anchor="ctr"/>
           <a:lstStyle/>
           <a:p>
-            <a:pPr algn="ctr" indent="0" marL="0">
+            <a:pPr marL="0" indent="0" algn="ctr">
               <a:buNone/>
             </a:pPr>
             <a:r>
@@ -11380,7 +11808,7 @@
           <a:bodyPr wrap="square" lIns="0" tIns="0" rIns="0" bIns="0" rtlCol="0" anchor="ctr"/>
           <a:lstStyle/>
           <a:p>
-            <a:pPr indent="0" marL="0">
+            <a:pPr marL="0" indent="0">
               <a:buNone/>
             </a:pPr>
             <a:r>
@@ -11416,7 +11844,7 @@
           <a:bodyPr wrap="square" lIns="0" tIns="0" rIns="0" bIns="0" rtlCol="0" anchor="ctr"/>
           <a:lstStyle/>
           <a:p>
-            <a:pPr indent="0" marL="0">
+            <a:pPr marL="0" indent="0">
               <a:buNone/>
             </a:pPr>
             <a:r>
@@ -11447,6 +11875,7 @@
         <a:solidFill>
           <a:srgbClr val="FFFFFF"/>
         </a:solidFill>
+        <a:effectLst/>
       </p:bgPr>
     </p:bg>
     <p:spTree>
@@ -11484,7 +11913,7 @@
           <a:bodyPr wrap="square" lIns="0" tIns="0" rIns="0" bIns="0" rtlCol="0" anchor="ctr"/>
           <a:lstStyle/>
           <a:p>
-            <a:pPr indent="0" marL="0">
+            <a:pPr marL="0" indent="0">
               <a:buNone/>
             </a:pPr>
             <a:r>
@@ -11523,7 +11952,7 @@
           <a:bodyPr wrap="square" lIns="0" tIns="0" rIns="0" bIns="0" rtlCol="0" anchor="ctr"/>
           <a:lstStyle/>
           <a:p>
-            <a:pPr indent="0" marL="0">
+            <a:pPr marL="0" indent="0">
               <a:buNone/>
             </a:pPr>
             <a:r>
@@ -11540,14 +11969,14 @@
       </p:sp>
       <p:pic>
         <p:nvPicPr>
-          <p:cNvPr id="5" name="Request review screenshot" descr="Request review screenshot">    </p:cNvPr>
+          <p:cNvPr id="5" name="Request review screenshot" descr="Request review screenshot"/>
           <p:cNvPicPr>
             <a:picLocks noChangeAspect="1"/>
           </p:cNvPicPr>
           <p:nvPr/>
         </p:nvPicPr>
         <p:blipFill>
-          <a:blip r:embed="rId1"/>
+          <a:blip r:embed="rId3"/>
           <a:stretch>
             <a:fillRect/>
           </a:stretch>
@@ -11561,7 +11990,7 @@
             <a:avLst/>
           </a:prstGeom>
           <a:effectLst>
-            <a:outerShdw sx="100000" sy="100000" kx="0" ky="0" algn="bl" rotWithShape="0" blurRad="152400" dist="38100" dir="5400000">
+            <a:outerShdw blurRad="152400" dist="38100" dir="5400000" algn="bl" rotWithShape="0">
               <a:srgbClr val="000000">
                 <a:alpha val="25000"/>
               </a:srgbClr>
@@ -11590,7 +12019,7 @@
           <a:bodyPr wrap="square" lIns="0" tIns="0" rIns="0" bIns="0" rtlCol="0" anchor="ctr"/>
           <a:lstStyle/>
           <a:p>
-            <a:pPr indent="0" marL="0">
+            <a:pPr marL="0" indent="0">
               <a:buNone/>
             </a:pPr>
             <a:r>
@@ -11629,7 +12058,7 @@
           <a:bodyPr wrap="square" lIns="0" tIns="0" rIns="0" bIns="0" rtlCol="0" anchor="t"/>
           <a:lstStyle/>
           <a:p>
-            <a:pPr indent="0" marL="0">
+            <a:pPr marL="0" indent="0">
               <a:buNone/>
             </a:pPr>
             <a:r>
@@ -11665,7 +12094,7 @@
           <a:bodyPr wrap="square" lIns="0" tIns="0" rIns="0" bIns="0" rtlCol="0" anchor="ctr"/>
           <a:lstStyle/>
           <a:p>
-            <a:pPr indent="0" marL="0">
+            <a:pPr marL="0" indent="0">
               <a:buNone/>
             </a:pPr>
             <a:r>
@@ -11704,7 +12133,7 @@
           <a:bodyPr wrap="square" lIns="0" tIns="0" rIns="0" bIns="0" rtlCol="0" anchor="t"/>
           <a:lstStyle/>
           <a:p>
-            <a:pPr indent="0" marL="0">
+            <a:pPr marL="0" indent="0">
               <a:buNone/>
             </a:pPr>
             <a:r>
@@ -11740,7 +12169,7 @@
           <a:bodyPr wrap="square" lIns="0" tIns="0" rIns="0" bIns="0" rtlCol="0" anchor="ctr"/>
           <a:lstStyle/>
           <a:p>
-            <a:pPr indent="0" marL="0">
+            <a:pPr marL="0" indent="0">
               <a:buNone/>
             </a:pPr>
             <a:r>
@@ -11779,7 +12208,7 @@
           <a:bodyPr wrap="square" lIns="0" tIns="0" rIns="0" bIns="0" rtlCol="0" anchor="t"/>
           <a:lstStyle/>
           <a:p>
-            <a:pPr indent="0" marL="0">
+            <a:pPr marL="0" indent="0">
               <a:buNone/>
             </a:pPr>
             <a:r>
@@ -11815,7 +12244,7 @@
           <a:bodyPr wrap="square" lIns="0" tIns="0" rIns="0" bIns="0" rtlCol="0" anchor="ctr"/>
           <a:lstStyle/>
           <a:p>
-            <a:pPr indent="0" marL="0">
+            <a:pPr marL="0" indent="0">
               <a:buNone/>
             </a:pPr>
             <a:r>
@@ -11854,7 +12283,7 @@
           <a:bodyPr wrap="square" lIns="0" tIns="0" rIns="0" bIns="0" rtlCol="0" anchor="t"/>
           <a:lstStyle/>
           <a:p>
-            <a:pPr indent="0" marL="0">
+            <a:pPr marL="0" indent="0">
               <a:buNone/>
             </a:pPr>
             <a:r>
@@ -11885,6 +12314,7 @@
         <a:solidFill>
           <a:srgbClr val="FFFFFF"/>
         </a:solidFill>
+        <a:effectLst/>
       </p:bgPr>
     </p:bg>
     <p:spTree>
@@ -11922,7 +12352,7 @@
           <a:bodyPr wrap="square" lIns="0" tIns="0" rIns="0" bIns="0" rtlCol="0" anchor="ctr"/>
           <a:lstStyle/>
           <a:p>
-            <a:pPr indent="0" marL="0">
+            <a:pPr marL="0" indent="0">
               <a:buNone/>
             </a:pPr>
             <a:r>
@@ -11961,7 +12391,7 @@
           <a:bodyPr wrap="square" lIns="0" tIns="0" rIns="0" bIns="0" rtlCol="0" anchor="ctr"/>
           <a:lstStyle/>
           <a:p>
-            <a:pPr indent="0" marL="0">
+            <a:pPr marL="0" indent="0">
               <a:buNone/>
             </a:pPr>
             <a:r>
@@ -11978,14 +12408,14 @@
       </p:sp>
       <p:pic>
         <p:nvPicPr>
-          <p:cNvPr id="5" name="Student dashboard screenshot" descr="Student dashboard screenshot">    </p:cNvPr>
+          <p:cNvPr id="5" name="Student dashboard screenshot" descr="Student dashboard screenshot"/>
           <p:cNvPicPr>
             <a:picLocks noChangeAspect="1"/>
           </p:cNvPicPr>
           <p:nvPr/>
         </p:nvPicPr>
         <p:blipFill>
-          <a:blip r:embed="rId1"/>
+          <a:blip r:embed="rId3"/>
           <a:stretch>
             <a:fillRect/>
           </a:stretch>
@@ -11999,7 +12429,7 @@
             <a:avLst/>
           </a:prstGeom>
           <a:effectLst>
-            <a:outerShdw sx="100000" sy="100000" kx="0" ky="0" algn="bl" rotWithShape="0" blurRad="152400" dist="38100" dir="5400000">
+            <a:outerShdw blurRad="152400" dist="38100" dir="5400000" algn="bl" rotWithShape="0">
               <a:srgbClr val="000000">
                 <a:alpha val="25000"/>
               </a:srgbClr>
@@ -12031,17 +12461,24 @@
             <a:prstDash val="solid"/>
           </a:ln>
         </p:spPr>
+        <p:txBody>
+          <a:bodyPr/>
+          <a:lstStyle/>
+          <a:p>
+            <a:endParaRPr lang="en-US"/>
+          </a:p>
+        </p:txBody>
       </p:sp>
       <p:pic>
         <p:nvPicPr>
-          <p:cNvPr id="7" name="Image 1" descr="FiEye">    </p:cNvPr>
+          <p:cNvPr id="7" name="Image 1" descr="FiEye"/>
           <p:cNvPicPr>
             <a:picLocks noChangeAspect="1"/>
           </p:cNvPicPr>
           <p:nvPr/>
         </p:nvPicPr>
         <p:blipFill>
-          <a:blip r:embed="rId2"/>
+          <a:blip r:embed="rId4"/>
           <a:stretch>
             <a:fillRect/>
           </a:stretch>
@@ -12077,7 +12514,7 @@
           <a:bodyPr wrap="square" lIns="0" tIns="0" rIns="0" bIns="0" rtlCol="0" anchor="ctr"/>
           <a:lstStyle/>
           <a:p>
-            <a:pPr indent="0" marL="0">
+            <a:pPr marL="0" indent="0">
               <a:buNone/>
             </a:pPr>
             <a:r>
@@ -12116,7 +12553,7 @@
           <a:bodyPr wrap="square" lIns="0" tIns="0" rIns="0" bIns="0" rtlCol="0" anchor="t"/>
           <a:lstStyle/>
           <a:p>
-            <a:pPr indent="0" marL="0">
+            <a:pPr marL="0" indent="0">
               <a:buNone/>
             </a:pPr>
             <a:r>
@@ -12155,17 +12592,24 @@
             <a:prstDash val="solid"/>
           </a:ln>
         </p:spPr>
+        <p:txBody>
+          <a:bodyPr/>
+          <a:lstStyle/>
+          <a:p>
+            <a:endParaRPr lang="en-US"/>
+          </a:p>
+        </p:txBody>
       </p:sp>
       <p:pic>
         <p:nvPicPr>
-          <p:cNvPr id="11" name="Image 2" descr="FiClock">    </p:cNvPr>
+          <p:cNvPr id="11" name="Image 2" descr="FiClock"/>
           <p:cNvPicPr>
             <a:picLocks noChangeAspect="1"/>
           </p:cNvPicPr>
           <p:nvPr/>
         </p:nvPicPr>
         <p:blipFill>
-          <a:blip r:embed="rId3"/>
+          <a:blip r:embed="rId5"/>
           <a:stretch>
             <a:fillRect/>
           </a:stretch>
@@ -12201,7 +12645,7 @@
           <a:bodyPr wrap="square" lIns="0" tIns="0" rIns="0" bIns="0" rtlCol="0" anchor="ctr"/>
           <a:lstStyle/>
           <a:p>
-            <a:pPr indent="0" marL="0">
+            <a:pPr marL="0" indent="0">
               <a:buNone/>
             </a:pPr>
             <a:r>
@@ -12240,7 +12684,7 @@
           <a:bodyPr wrap="square" lIns="0" tIns="0" rIns="0" bIns="0" rtlCol="0" anchor="t"/>
           <a:lstStyle/>
           <a:p>
-            <a:pPr indent="0" marL="0">
+            <a:pPr marL="0" indent="0">
               <a:buNone/>
             </a:pPr>
             <a:r>
@@ -12279,17 +12723,24 @@
             <a:prstDash val="solid"/>
           </a:ln>
         </p:spPr>
+        <p:txBody>
+          <a:bodyPr/>
+          <a:lstStyle/>
+          <a:p>
+            <a:endParaRPr lang="en-US"/>
+          </a:p>
+        </p:txBody>
       </p:sp>
       <p:pic>
         <p:nvPicPr>
-          <p:cNvPr id="15" name="Image 3" descr="FiBell">    </p:cNvPr>
+          <p:cNvPr id="15" name="Image 3" descr="FiBell"/>
           <p:cNvPicPr>
             <a:picLocks noChangeAspect="1"/>
           </p:cNvPicPr>
           <p:nvPr/>
         </p:nvPicPr>
         <p:blipFill>
-          <a:blip r:embed="rId4"/>
+          <a:blip r:embed="rId6"/>
           <a:stretch>
             <a:fillRect/>
           </a:stretch>
@@ -12325,7 +12776,7 @@
           <a:bodyPr wrap="square" lIns="0" tIns="0" rIns="0" bIns="0" rtlCol="0" anchor="ctr"/>
           <a:lstStyle/>
           <a:p>
-            <a:pPr indent="0" marL="0">
+            <a:pPr marL="0" indent="0">
               <a:buNone/>
             </a:pPr>
             <a:r>
@@ -12364,7 +12815,7 @@
           <a:bodyPr wrap="square" lIns="0" tIns="0" rIns="0" bIns="0" rtlCol="0" anchor="t"/>
           <a:lstStyle/>
           <a:p>
-            <a:pPr indent="0" marL="0">
+            <a:pPr marL="0" indent="0">
               <a:buNone/>
             </a:pPr>
             <a:r>
@@ -12403,17 +12854,24 @@
             <a:prstDash val="solid"/>
           </a:ln>
         </p:spPr>
+        <p:txBody>
+          <a:bodyPr/>
+          <a:lstStyle/>
+          <a:p>
+            <a:endParaRPr lang="en-US"/>
+          </a:p>
+        </p:txBody>
       </p:sp>
       <p:pic>
         <p:nvPicPr>
-          <p:cNvPr id="19" name="Image 4" descr="FiFileText">    </p:cNvPr>
+          <p:cNvPr id="19" name="Image 4" descr="FiFileText"/>
           <p:cNvPicPr>
             <a:picLocks noChangeAspect="1"/>
           </p:cNvPicPr>
           <p:nvPr/>
         </p:nvPicPr>
         <p:blipFill>
-          <a:blip r:embed="rId5"/>
+          <a:blip r:embed="rId7"/>
           <a:stretch>
             <a:fillRect/>
           </a:stretch>
@@ -12449,7 +12907,7 @@
           <a:bodyPr wrap="square" lIns="0" tIns="0" rIns="0" bIns="0" rtlCol="0" anchor="ctr"/>
           <a:lstStyle/>
           <a:p>
-            <a:pPr indent="0" marL="0">
+            <a:pPr marL="0" indent="0">
               <a:buNone/>
             </a:pPr>
             <a:r>
@@ -12488,7 +12946,7 @@
           <a:bodyPr wrap="square" lIns="0" tIns="0" rIns="0" bIns="0" rtlCol="0" anchor="t"/>
           <a:lstStyle/>
           <a:p>
-            <a:pPr indent="0" marL="0">
+            <a:pPr marL="0" indent="0">
               <a:buNone/>
             </a:pPr>
             <a:r>
@@ -12519,6 +12977,7 @@
         <a:solidFill>
           <a:srgbClr val="3A040B"/>
         </a:solidFill>
+        <a:effectLst/>
       </p:bgPr>
     </p:bg>
     <p:spTree>
@@ -12556,7 +13015,7 @@
           <a:bodyPr wrap="square" lIns="0" tIns="0" rIns="0" bIns="0" rtlCol="0" anchor="ctr"/>
           <a:lstStyle/>
           <a:p>
-            <a:pPr indent="0" marL="0">
+            <a:pPr marL="0" indent="0">
               <a:buNone/>
             </a:pPr>
             <a:r>
@@ -12595,7 +13054,7 @@
           <a:bodyPr wrap="square" lIns="0" tIns="0" rIns="0" bIns="0" rtlCol="0" anchor="ctr"/>
           <a:lstStyle/>
           <a:p>
-            <a:pPr indent="0" marL="0">
+            <a:pPr marL="0" indent="0">
               <a:buNone/>
             </a:pPr>
             <a:r>
@@ -12626,6 +13085,7 @@
         <a:solidFill>
           <a:srgbClr val="FFFFFF"/>
         </a:solidFill>
+        <a:effectLst/>
       </p:bgPr>
     </p:bg>
     <p:spTree>
@@ -12663,7 +13123,7 @@
           <a:bodyPr wrap="square" lIns="0" tIns="0" rIns="0" bIns="0" rtlCol="0" anchor="ctr"/>
           <a:lstStyle/>
           <a:p>
-            <a:pPr indent="0" marL="0">
+            <a:pPr marL="0" indent="0">
               <a:buNone/>
             </a:pPr>
             <a:r>
@@ -12702,7 +13162,7 @@
           <a:bodyPr wrap="square" lIns="0" tIns="0" rIns="0" bIns="0" rtlCol="0" anchor="ctr"/>
           <a:lstStyle/>
           <a:p>
-            <a:pPr indent="0" marL="0">
+            <a:pPr marL="0" indent="0">
               <a:buNone/>
             </a:pPr>
             <a:r>
@@ -12743,6 +13203,13 @@
             <a:prstDash val="solid"/>
           </a:ln>
         </p:spPr>
+        <p:txBody>
+          <a:bodyPr/>
+          <a:lstStyle/>
+          <a:p>
+            <a:endParaRPr lang="en-US"/>
+          </a:p>
+        </p:txBody>
       </p:sp>
       <p:sp>
         <p:nvSpPr>
@@ -12765,7 +13232,7 @@
           <a:bodyPr wrap="square" lIns="0" tIns="0" rIns="0" bIns="0" rtlCol="0" anchor="ctr"/>
           <a:lstStyle/>
           <a:p>
-            <a:pPr indent="0" marL="0">
+            <a:pPr marL="0" indent="0">
               <a:buNone/>
             </a:pPr>
             <a:r>
@@ -12804,7 +13271,7 @@
           <a:bodyPr wrap="square" lIns="0" tIns="0" rIns="0" bIns="0" rtlCol="0" anchor="ctr"/>
           <a:lstStyle/>
           <a:p>
-            <a:pPr indent="0" marL="0">
+            <a:pPr marL="0" indent="0">
               <a:buNone/>
             </a:pPr>
             <a:r>
@@ -12818,7 +13285,7 @@
             <a:endParaRPr lang="en-US" sz="2000" dirty="0"/>
           </a:p>
           <a:p>
-            <a:pPr indent="0" marL="0">
+            <a:pPr marL="0" indent="0">
               <a:buNone/>
             </a:pPr>
             <a:r>
@@ -12859,6 +13326,13 @@
             <a:prstDash val="solid"/>
           </a:ln>
         </p:spPr>
+        <p:txBody>
+          <a:bodyPr/>
+          <a:lstStyle/>
+          <a:p>
+            <a:endParaRPr lang="en-US"/>
+          </a:p>
+        </p:txBody>
       </p:sp>
       <p:sp>
         <p:nvSpPr>
@@ -12881,7 +13355,7 @@
           <a:bodyPr wrap="square" lIns="0" tIns="0" rIns="0" bIns="0" rtlCol="0" anchor="ctr"/>
           <a:lstStyle/>
           <a:p>
-            <a:pPr indent="0" marL="0">
+            <a:pPr marL="0" indent="0">
               <a:buNone/>
             </a:pPr>
             <a:r>
@@ -12920,7 +13394,7 @@
           <a:bodyPr wrap="square" lIns="0" tIns="0" rIns="0" bIns="0" rtlCol="0" anchor="ctr"/>
           <a:lstStyle/>
           <a:p>
-            <a:pPr indent="0" marL="0">
+            <a:pPr marL="0" indent="0">
               <a:buNone/>
             </a:pPr>
             <a:r>
@@ -12934,7 +13408,7 @@
             <a:endParaRPr lang="en-US" sz="2000" dirty="0"/>
           </a:p>
           <a:p>
-            <a:pPr indent="0" marL="0">
+            <a:pPr marL="0" indent="0">
               <a:buNone/>
             </a:pPr>
             <a:r>
@@ -12975,6 +13449,13 @@
             <a:prstDash val="solid"/>
           </a:ln>
         </p:spPr>
+        <p:txBody>
+          <a:bodyPr/>
+          <a:lstStyle/>
+          <a:p>
+            <a:endParaRPr lang="en-US"/>
+          </a:p>
+        </p:txBody>
       </p:sp>
       <p:sp>
         <p:nvSpPr>
@@ -12997,7 +13478,7 @@
           <a:bodyPr wrap="square" lIns="0" tIns="0" rIns="0" bIns="0" rtlCol="0" anchor="ctr"/>
           <a:lstStyle/>
           <a:p>
-            <a:pPr indent="0" marL="0">
+            <a:pPr marL="0" indent="0">
               <a:buNone/>
             </a:pPr>
             <a:r>
@@ -13036,7 +13517,7 @@
           <a:bodyPr wrap="square" lIns="0" tIns="0" rIns="0" bIns="0" rtlCol="0" anchor="ctr"/>
           <a:lstStyle/>
           <a:p>
-            <a:pPr indent="0" marL="0">
+            <a:pPr marL="0" indent="0">
               <a:buNone/>
             </a:pPr>
             <a:r>
@@ -13050,7 +13531,7 @@
             <a:endParaRPr lang="en-US" sz="2000" dirty="0"/>
           </a:p>
           <a:p>
-            <a:pPr indent="0" marL="0">
+            <a:pPr marL="0" indent="0">
               <a:buNone/>
             </a:pPr>
             <a:r>
@@ -13067,14 +13548,14 @@
       </p:sp>
       <p:pic>
         <p:nvPicPr>
-          <p:cNvPr id="14" name="AI Controls screenshot" descr="AI Controls screenshot">    </p:cNvPr>
+          <p:cNvPr id="14" name="AI Controls screenshot" descr="AI Controls screenshot"/>
           <p:cNvPicPr>
             <a:picLocks noChangeAspect="1"/>
           </p:cNvPicPr>
           <p:nvPr/>
         </p:nvPicPr>
         <p:blipFill>
-          <a:blip r:embed="rId1"/>
+          <a:blip r:embed="rId3"/>
           <a:stretch>
             <a:fillRect/>
           </a:stretch>
@@ -13088,7 +13569,7 @@
             <a:avLst/>
           </a:prstGeom>
           <a:effectLst>
-            <a:outerShdw sx="100000" sy="100000" kx="0" ky="0" algn="bl" rotWithShape="0" blurRad="152400" dist="38100" dir="5400000">
+            <a:outerShdw blurRad="152400" dist="38100" dir="5400000" algn="bl" rotWithShape="0">
               <a:srgbClr val="000000">
                 <a:alpha val="25000"/>
               </a:srgbClr>
@@ -13117,7 +13598,7 @@
           <a:bodyPr wrap="square" lIns="0" tIns="0" rIns="0" bIns="0" rtlCol="0" anchor="ctr"/>
           <a:lstStyle/>
           <a:p>
-            <a:pPr indent="0" marL="0">
+            <a:pPr marL="0" indent="0">
               <a:buNone/>
             </a:pPr>
             <a:r>
@@ -13433,4 +13914,319 @@
     </a:ext>
   </a:extLst>
 </a:theme>
+</file>
+
+<file path=ppt/theme/theme2.xml><?xml version="1.0" encoding="utf-8"?>
+<a:theme xmlns:a="http://schemas.openxmlformats.org/drawingml/2006/main" name="Office Theme">
+  <a:themeElements>
+    <a:clrScheme name="Office">
+      <a:dk1>
+        <a:sysClr val="windowText" lastClr="000000"/>
+      </a:dk1>
+      <a:lt1>
+        <a:sysClr val="window" lastClr="FFFFFF"/>
+      </a:lt1>
+      <a:dk2>
+        <a:srgbClr val="0E2841"/>
+      </a:dk2>
+      <a:lt2>
+        <a:srgbClr val="E8E8E8"/>
+      </a:lt2>
+      <a:accent1>
+        <a:srgbClr val="156082"/>
+      </a:accent1>
+      <a:accent2>
+        <a:srgbClr val="E97132"/>
+      </a:accent2>
+      <a:accent3>
+        <a:srgbClr val="196B24"/>
+      </a:accent3>
+      <a:accent4>
+        <a:srgbClr val="0F9ED5"/>
+      </a:accent4>
+      <a:accent5>
+        <a:srgbClr val="A02B93"/>
+      </a:accent5>
+      <a:accent6>
+        <a:srgbClr val="4EA72E"/>
+      </a:accent6>
+      <a:hlink>
+        <a:srgbClr val="467886"/>
+      </a:hlink>
+      <a:folHlink>
+        <a:srgbClr val="96607D"/>
+      </a:folHlink>
+    </a:clrScheme>
+    <a:fontScheme name="Office">
+      <a:majorFont>
+        <a:latin typeface="Aptos Display" panose="02110004020202020204"/>
+        <a:ea typeface=""/>
+        <a:cs typeface=""/>
+        <a:font script="Jpan" typeface="游ゴシック Light"/>
+        <a:font script="Hang" typeface="맑은 고딕"/>
+        <a:font script="Hans" typeface="等线 Light"/>
+        <a:font script="Hant" typeface="新細明體"/>
+        <a:font script="Arab" typeface="Times New Roman"/>
+        <a:font script="Hebr" typeface="Times New Roman"/>
+        <a:font script="Thai" typeface="Angsana New"/>
+        <a:font script="Ethi" typeface="Nyala"/>
+        <a:font script="Beng" typeface="Vrinda"/>
+        <a:font script="Gujr" typeface="Shruti"/>
+        <a:font script="Khmr" typeface="MoolBoran"/>
+        <a:font script="Knda" typeface="Tunga"/>
+        <a:font script="Guru" typeface="Raavi"/>
+        <a:font script="Cans" typeface="Euphemia"/>
+        <a:font script="Cher" typeface="Plantagenet Cherokee"/>
+        <a:font script="Yiii" typeface="Microsoft Yi Baiti"/>
+        <a:font script="Tibt" typeface="Microsoft Himalaya"/>
+        <a:font script="Thaa" typeface="MV Boli"/>
+        <a:font script="Deva" typeface="Mangal"/>
+        <a:font script="Telu" typeface="Gautami"/>
+        <a:font script="Taml" typeface="Latha"/>
+        <a:font script="Syrc" typeface="Estrangelo Edessa"/>
+        <a:font script="Orya" typeface="Kalinga"/>
+        <a:font script="Mlym" typeface="Kartika"/>
+        <a:font script="Laoo" typeface="DokChampa"/>
+        <a:font script="Sinh" typeface="Iskoola Pota"/>
+        <a:font script="Mong" typeface="Mongolian Baiti"/>
+        <a:font script="Viet" typeface="Times New Roman"/>
+        <a:font script="Uigh" typeface="Microsoft Uighur"/>
+        <a:font script="Geor" typeface="Sylfaen"/>
+        <a:font script="Armn" typeface="Arial"/>
+        <a:font script="Bugi" typeface="Leelawadee UI"/>
+        <a:font script="Bopo" typeface="Microsoft JhengHei"/>
+        <a:font script="Java" typeface="Javanese Text"/>
+        <a:font script="Lisu" typeface="Segoe UI"/>
+        <a:font script="Mymr" typeface="Myanmar Text"/>
+        <a:font script="Nkoo" typeface="Ebrima"/>
+        <a:font script="Olck" typeface="Nirmala UI"/>
+        <a:font script="Osma" typeface="Ebrima"/>
+        <a:font script="Phag" typeface="Phagspa"/>
+        <a:font script="Syrn" typeface="Estrangelo Edessa"/>
+        <a:font script="Syrj" typeface="Estrangelo Edessa"/>
+        <a:font script="Syre" typeface="Estrangelo Edessa"/>
+        <a:font script="Sora" typeface="Nirmala UI"/>
+        <a:font script="Tale" typeface="Microsoft Tai Le"/>
+        <a:font script="Talu" typeface="Microsoft New Tai Lue"/>
+        <a:font script="Tfng" typeface="Ebrima"/>
+      </a:majorFont>
+      <a:minorFont>
+        <a:latin typeface="Aptos" panose="02110004020202020204"/>
+        <a:ea typeface=""/>
+        <a:cs typeface=""/>
+        <a:font script="Jpan" typeface="游ゴシック"/>
+        <a:font script="Hang" typeface="맑은 고딕"/>
+        <a:font script="Hans" typeface="等线"/>
+        <a:font script="Hant" typeface="新細明體"/>
+        <a:font script="Arab" typeface="Arial"/>
+        <a:font script="Hebr" typeface="Arial"/>
+        <a:font script="Thai" typeface="Cordia New"/>
+        <a:font script="Ethi" typeface="Nyala"/>
+        <a:font script="Beng" typeface="Vrinda"/>
+        <a:font script="Gujr" typeface="Shruti"/>
+        <a:font script="Khmr" typeface="DaunPenh"/>
+        <a:font script="Knda" typeface="Tunga"/>
+        <a:font script="Guru" typeface="Raavi"/>
+        <a:font script="Cans" typeface="Euphemia"/>
+        <a:font script="Cher" typeface="Plantagenet Cherokee"/>
+        <a:font script="Yiii" typeface="Microsoft Yi Baiti"/>
+        <a:font script="Tibt" typeface="Microsoft Himalaya"/>
+        <a:font script="Thaa" typeface="MV Boli"/>
+        <a:font script="Deva" typeface="Mangal"/>
+        <a:font script="Telu" typeface="Gautami"/>
+        <a:font script="Taml" typeface="Latha"/>
+        <a:font script="Syrc" typeface="Estrangelo Edessa"/>
+        <a:font script="Orya" typeface="Kalinga"/>
+        <a:font script="Mlym" typeface="Kartika"/>
+        <a:font script="Laoo" typeface="DokChampa"/>
+        <a:font script="Sinh" typeface="Iskoola Pota"/>
+        <a:font script="Mong" typeface="Mongolian Baiti"/>
+        <a:font script="Viet" typeface="Arial"/>
+        <a:font script="Uigh" typeface="Microsoft Uighur"/>
+        <a:font script="Geor" typeface="Sylfaen"/>
+        <a:font script="Armn" typeface="Arial"/>
+        <a:font script="Bugi" typeface="Leelawadee UI"/>
+        <a:font script="Bopo" typeface="Microsoft JhengHei"/>
+        <a:font script="Java" typeface="Javanese Text"/>
+        <a:font script="Lisu" typeface="Segoe UI"/>
+        <a:font script="Mymr" typeface="Myanmar Text"/>
+        <a:font script="Nkoo" typeface="Ebrima"/>
+        <a:font script="Olck" typeface="Nirmala UI"/>
+        <a:font script="Osma" typeface="Ebrima"/>
+        <a:font script="Phag" typeface="Phagspa"/>
+        <a:font script="Syrn" typeface="Estrangelo Edessa"/>
+        <a:font script="Syrj" typeface="Estrangelo Edessa"/>
+        <a:font script="Syre" typeface="Estrangelo Edessa"/>
+        <a:font script="Sora" typeface="Nirmala UI"/>
+        <a:font script="Tale" typeface="Microsoft Tai Le"/>
+        <a:font script="Talu" typeface="Microsoft New Tai Lue"/>
+        <a:font script="Tfng" typeface="Ebrima"/>
+      </a:minorFont>
+    </a:fontScheme>
+    <a:fmtScheme name="Office">
+      <a:fillStyleLst>
+        <a:solidFill>
+          <a:schemeClr val="phClr"/>
+        </a:solidFill>
+        <a:gradFill rotWithShape="1">
+          <a:gsLst>
+            <a:gs pos="0">
+              <a:schemeClr val="phClr">
+                <a:lumMod val="110000"/>
+                <a:satMod val="105000"/>
+                <a:tint val="67000"/>
+              </a:schemeClr>
+            </a:gs>
+            <a:gs pos="50000">
+              <a:schemeClr val="phClr">
+                <a:lumMod val="105000"/>
+                <a:satMod val="103000"/>
+                <a:tint val="73000"/>
+              </a:schemeClr>
+            </a:gs>
+            <a:gs pos="100000">
+              <a:schemeClr val="phClr">
+                <a:lumMod val="105000"/>
+                <a:satMod val="109000"/>
+                <a:tint val="81000"/>
+              </a:schemeClr>
+            </a:gs>
+          </a:gsLst>
+          <a:lin ang="5400000" scaled="0"/>
+        </a:gradFill>
+        <a:gradFill rotWithShape="1">
+          <a:gsLst>
+            <a:gs pos="0">
+              <a:schemeClr val="phClr">
+                <a:satMod val="103000"/>
+                <a:lumMod val="102000"/>
+                <a:tint val="94000"/>
+              </a:schemeClr>
+            </a:gs>
+            <a:gs pos="50000">
+              <a:schemeClr val="phClr">
+                <a:satMod val="110000"/>
+                <a:lumMod val="100000"/>
+                <a:shade val="100000"/>
+              </a:schemeClr>
+            </a:gs>
+            <a:gs pos="100000">
+              <a:schemeClr val="phClr">
+                <a:lumMod val="99000"/>
+                <a:satMod val="120000"/>
+                <a:shade val="78000"/>
+              </a:schemeClr>
+            </a:gs>
+          </a:gsLst>
+          <a:lin ang="5400000" scaled="0"/>
+        </a:gradFill>
+      </a:fillStyleLst>
+      <a:lnStyleLst>
+        <a:ln w="12700" cap="flat" cmpd="sng" algn="ctr">
+          <a:solidFill>
+            <a:schemeClr val="phClr"/>
+          </a:solidFill>
+          <a:prstDash val="solid"/>
+          <a:miter lim="800000"/>
+        </a:ln>
+        <a:ln w="19050" cap="flat" cmpd="sng" algn="ctr">
+          <a:solidFill>
+            <a:schemeClr val="phClr"/>
+          </a:solidFill>
+          <a:prstDash val="solid"/>
+          <a:miter lim="800000"/>
+        </a:ln>
+        <a:ln w="25400" cap="flat" cmpd="sng" algn="ctr">
+          <a:solidFill>
+            <a:schemeClr val="phClr"/>
+          </a:solidFill>
+          <a:prstDash val="solid"/>
+          <a:miter lim="800000"/>
+        </a:ln>
+      </a:lnStyleLst>
+      <a:effectStyleLst>
+        <a:effectStyle>
+          <a:effectLst/>
+        </a:effectStyle>
+        <a:effectStyle>
+          <a:effectLst/>
+        </a:effectStyle>
+        <a:effectStyle>
+          <a:effectLst>
+            <a:outerShdw blurRad="57150" dist="19050" dir="5400000" algn="ctr" rotWithShape="0">
+              <a:srgbClr val="000000">
+                <a:alpha val="63000"/>
+              </a:srgbClr>
+            </a:outerShdw>
+          </a:effectLst>
+        </a:effectStyle>
+      </a:effectStyleLst>
+      <a:bgFillStyleLst>
+        <a:solidFill>
+          <a:schemeClr val="phClr"/>
+        </a:solidFill>
+        <a:solidFill>
+          <a:schemeClr val="phClr">
+            <a:tint val="95000"/>
+            <a:satMod val="170000"/>
+          </a:schemeClr>
+        </a:solidFill>
+        <a:gradFill rotWithShape="1">
+          <a:gsLst>
+            <a:gs pos="0">
+              <a:schemeClr val="phClr">
+                <a:tint val="93000"/>
+                <a:satMod val="150000"/>
+                <a:shade val="98000"/>
+                <a:lumMod val="102000"/>
+              </a:schemeClr>
+            </a:gs>
+            <a:gs pos="50000">
+              <a:schemeClr val="phClr">
+                <a:tint val="98000"/>
+                <a:satMod val="130000"/>
+                <a:shade val="90000"/>
+                <a:lumMod val="103000"/>
+              </a:schemeClr>
+            </a:gs>
+            <a:gs pos="100000">
+              <a:schemeClr val="phClr">
+                <a:shade val="63000"/>
+                <a:satMod val="120000"/>
+              </a:schemeClr>
+            </a:gs>
+          </a:gsLst>
+          <a:lin ang="5400000" scaled="0"/>
+        </a:gradFill>
+      </a:bgFillStyleLst>
+    </a:fmtScheme>
+  </a:themeElements>
+  <a:objectDefaults>
+    <a:lnDef>
+      <a:spPr/>
+      <a:bodyPr/>
+      <a:lstStyle/>
+      <a:style>
+        <a:lnRef idx="2">
+          <a:schemeClr val="accent1"/>
+        </a:lnRef>
+        <a:fillRef idx="0">
+          <a:schemeClr val="accent1"/>
+        </a:fillRef>
+        <a:effectRef idx="1">
+          <a:schemeClr val="accent1"/>
+        </a:effectRef>
+        <a:fontRef idx="minor">
+          <a:schemeClr val="tx1"/>
+        </a:fontRef>
+      </a:style>
+    </a:lnDef>
+  </a:objectDefaults>
+  <a:extraClrSchemeLst/>
+  <a:extLst>
+    <a:ext uri="{05A4C25C-085E-4340-85A3-A5531E510DB2}">
+      <thm15:themeFamily xmlns:thm15="http://schemas.microsoft.com/office/thememl/2012/main" name="Office Theme" id="{2E142A2C-CD16-42D6-873A-C26D2A0506FA}" vid="{1BDDFF52-6CD6-40A5-AB3C-68EB2F1E4D0A}"/>
+    </a:ext>
+  </a:extLst>
+</a:theme>
 </file>